--- a/docs/week-2/cen429-week-2-sunum.tr.pptx
+++ b/docs/week-2/cen429-week-2-sunum.tr.pptx
@@ -1232,19 +1232,7 @@
           <a:lstStyle/>
           <a:p>
             <a:r>
-              <a:t>BLP paneli</a:t>
-            </a:r>
-          </a:p>
-          <a:p/>
-          <a:p>
-            <a:r>
-              <a:t>ayırıcı</a:t>
-            </a:r>
-          </a:p>
-          <a:p/>
-          <a:p>
-            <a:r>
-              <a:t>Biba paneli (ters)</a:t>
+              <a:t>1a ve 1b'de ACE'ler aynı, yalnız sıra farklı. Son adımda icacls ile demonun kendi dosyasının gerçek ACL'ini gösterin.</a:t>
             </a:r>
           </a:p>
         </p:txBody>
@@ -1314,7 +1302,7 @@
           <a:lstStyle/>
           <a:p>
             <a:r>
-              <a:t>1a ve 1b'de ACE'ler aynı, yalnız sıra farklı. Son adımda icacls ile demonun kendi dosyasının gerçek ACL'ini gösterin.</a:t>
+              <a:t>Benzetimdir; gerçek setuid dosyası oluşturulmaz, sudo gerekmez. Sistemdeki setuid programlar yalnız listelenir.</a:t>
             </a:r>
           </a:p>
         </p:txBody>
@@ -1454,7 +1442,7 @@
           <a:lstStyle/>
           <a:p>
             <a:r>
-              <a:t>Benzetimdir; gerçek setuid dosyası oluşturulmaz, sudo gerekmez. Sistemdeki setuid programlar yalnız listelenir.</a:t>
+              <a:t>Sahada karşılığı: dört göz ilkesi, bölünmüş bilgi ve çift denetim, günlük mutabakat.</a:t>
             </a:r>
           </a:p>
         </p:txBody>
@@ -1524,7 +1512,7 @@
           <a:lstStyle/>
           <a:p>
             <a:r>
-              <a:t>Sahada karşılığı: dört göz ilkesi, bölünmüş bilgi ve çift denetim, günlük mutabakat.</a:t>
+              <a:t>önce sordur, sonra iki cevap slaytını aç.</a:t>
             </a:r>
           </a:p>
         </p:txBody>
@@ -1550,76 +1538,6 @@
 </file>
 
 <file path=ppt/notesSlides/notesSlide22.xml><?xml version="1.0" encoding="utf-8"?>
-<p:notes xmlns:a="http://schemas.openxmlformats.org/drawingml/2006/main" xmlns:p="http://schemas.openxmlformats.org/presentationml/2006/main" xmlns:r="http://schemas.openxmlformats.org/officeDocument/2006/relationships">
-  <p:cSld>
-    <p:spTree>
-      <p:nvGrpSpPr>
-        <p:cNvPr id="1" name=""/>
-        <p:cNvGrpSpPr/>
-        <p:nvPr/>
-      </p:nvGrpSpPr>
-      <p:grpSpPr>
-        <a:xfrm>
-          <a:off x="0" y="0"/>
-          <a:ext cx="0" cy="0"/>
-          <a:chOff x="0" y="0"/>
-          <a:chExt cx="0" cy="0"/>
-        </a:xfrm>
-      </p:grpSpPr>
-      <p:sp>
-        <p:nvSpPr>
-          <p:cNvPr id="2" name="Slide Image Placeholder 1"/>
-          <p:cNvSpPr>
-            <a:spLocks noGrp="1"/>
-          </p:cNvSpPr>
-          <p:nvPr>
-            <p:ph type="sldImg" idx="2"/>
-          </p:nvPr>
-        </p:nvSpPr>
-        <p:spPr/>
-      </p:sp>
-      <p:sp>
-        <p:nvSpPr>
-          <p:cNvPr id="3" name="Notes Placeholder 2"/>
-          <p:cNvSpPr>
-            <a:spLocks noGrp="1"/>
-          </p:cNvSpPr>
-          <p:nvPr>
-            <p:ph type="body" idx="3" sz="quarter"/>
-          </p:nvPr>
-        </p:nvSpPr>
-        <p:spPr/>
-        <p:txBody>
-          <a:bodyPr/>
-          <a:lstStyle/>
-          <a:p>
-            <a:r>
-              <a:t>önce sordur, sonra iki cevap slaytını aç.</a:t>
-            </a:r>
-          </a:p>
-        </p:txBody>
-      </p:sp>
-      <p:sp>
-        <p:nvSpPr>
-          <p:cNvPr id="4" name="Slide Number Placeholder 3"/>
-          <p:cNvSpPr>
-            <a:spLocks noGrp="1"/>
-          </p:cNvSpPr>
-          <p:nvPr>
-            <p:ph type="sldNum" idx="5" sz="quarter"/>
-          </p:nvPr>
-        </p:nvSpPr>
-        <p:spPr/>
-      </p:sp>
-    </p:spTree>
-  </p:cSld>
-  <p:clrMapOvr>
-    <a:masterClrMapping/>
-  </p:clrMapOvr>
-</p:notes>
-</file>
-
-<file path=ppt/notesSlides/notesSlide23.xml><?xml version="1.0" encoding="utf-8"?>
 <p:notes xmlns:a="http://schemas.openxmlformats.org/drawingml/2006/main" xmlns:p="http://schemas.openxmlformats.org/presentationml/2006/main" xmlns:r="http://schemas.openxmlformats.org/officeDocument/2006/relationships">
   <p:cSld>
     <p:spTree>
@@ -28271,16 +28189,40 @@
           </a:p>
         </p:txBody>
       </p:sp>
-      <p:sp>
-        <p:nvSpPr>
-          <p:cNvPr id="7" name="TextBox 6"/>
-          <p:cNvSpPr txBox="1"/>
-          <p:nvPr/>
-        </p:nvSpPr>
-        <p:spPr>
-          <a:xfrm>
-            <a:off x="640080" y="1325880"/>
-            <a:ext cx="10911535" cy="307848"/>
+      <p:pic>
+        <p:nvPicPr>
+          <p:cNvPr id="7" name="Picture 6" descr="h02-05-blp-biba.png"/>
+          <p:cNvPicPr>
+            <a:picLocks noChangeAspect="1"/>
+          </p:cNvPicPr>
+          <p:nvPr/>
+        </p:nvPicPr>
+        <p:blipFill>
+          <a:blip r:embed="rId3"/>
+          <a:stretch>
+            <a:fillRect/>
+          </a:stretch>
+        </p:blipFill>
+        <p:spPr>
+          <a:xfrm>
+            <a:off x="1833529" y="1325880"/>
+            <a:ext cx="8524636" cy="3929289"/>
+          </a:xfrm>
+          <a:prstGeom prst="rect">
+            <a:avLst/>
+          </a:prstGeom>
+        </p:spPr>
+      </p:pic>
+      <p:sp>
+        <p:nvSpPr>
+          <p:cNvPr id="8" name="TextBox 7"/>
+          <p:cNvSpPr txBox="1"/>
+          <p:nvPr/>
+        </p:nvSpPr>
+        <p:spPr>
+          <a:xfrm>
+            <a:off x="640080" y="5364897"/>
+            <a:ext cx="10911535" cy="770128"/>
           </a:xfrm>
           <a:prstGeom prst="rect">
             <a:avLst/>
@@ -28295,143 +28237,7 @@
           <a:p>
             <a:pPr algn="l"/>
             <a:r>
-              <a:rPr sz="1200" b="0">
-                <a:solidFill>
-                  <a:srgbClr val="1F2D3A"/>
-                </a:solidFill>
-              </a:rPr>
-              <a:t>&lt;svg viewBox="0 0 960 330" style="width:96%;height:auto;display:block;margin:4px auto" font-family="sans-serif"&gt;</a:t>
-            </a:r>
-          </a:p>
-        </p:txBody>
-      </p:sp>
-      <p:sp>
-        <p:nvSpPr>
-          <p:cNvPr id="8" name="TextBox 7"/>
-          <p:cNvSpPr txBox="1"/>
-          <p:nvPr/>
-        </p:nvSpPr>
-        <p:spPr>
-          <a:xfrm>
-            <a:off x="640080" y="1743456"/>
-            <a:ext cx="10911535" cy="1496568"/>
-          </a:xfrm>
-          <a:prstGeom prst="rect">
-            <a:avLst/>
-          </a:prstGeom>
-          <a:noFill/>
-        </p:spPr>
-        <p:txBody>
-          <a:bodyPr wrap="square" lIns="45720" rIns="45720">
-            <a:spAutoFit/>
-          </a:bodyPr>
-          <a:lstStyle/>
-          <a:p>
-            <a:pPr algn="l"/>
-            <a:r>
-              <a:rPr sz="1200" b="0">
-                <a:solidFill>
-                  <a:srgbClr val="1F2D3A"/>
-                </a:solidFill>
-              </a:rPr>
-              <a:t>&lt;text x="240" y="26" text-anchor="middle" font-size="22" fill="#006d77" font-weight="bold"&gt;BLP — Gizlilik&lt;/text&gt; &lt;rect x="150" y="50" width="180" height="52" rx="8" fill="#006d77"/&gt;&lt;text x="240" y="83" text-anchor="middle" font-size="20" fill="#fff"&gt;Yüksek gizli&lt;/text&gt; &lt;rect x="150" y="220" width="180" height="52" rx="8" fill="#9ed6d7"/&gt;&lt;text x="240" y="253" text-anchor="middle" font-size="20" fill="#083a3e"&gt;Düşük gizli&lt;/text&gt; &lt;line x1="120" y1="230" x2="120" y2="90" stroke="#c0392b" stroke-width="3" stroke-dasharray="7,5" marker-end="url(#red)"/&gt; &lt;text x="60" y="165" font-size="14" fill="#c0392b" transform="rotate(-90 60 165)" text-anchor="middle"&gt;yukarı OKUMA yok&lt;/text&gt; &lt;line x1="360" y1="100" x2="360" y2="220" stroke="#c0392b" stroke-width="3" stroke-dasharray="7,5" marker-end="url(#red)"/&gt; &lt;text x="420" y="165" font-size="14" fill="#c0392b" transform="rotate(90 420 165)" text-anchor="middle"&gt;aşağı YAZMA yok&lt;/text&gt;</a:t>
-            </a:r>
-          </a:p>
-        </p:txBody>
-      </p:sp>
-      <p:sp>
-        <p:nvSpPr>
-          <p:cNvPr id="9" name="TextBox 8"/>
-          <p:cNvSpPr txBox="1"/>
-          <p:nvPr/>
-        </p:nvSpPr>
-        <p:spPr>
-          <a:xfrm>
-            <a:off x="640080" y="3349752"/>
-            <a:ext cx="10911535" cy="307848"/>
-          </a:xfrm>
-          <a:prstGeom prst="rect">
-            <a:avLst/>
-          </a:prstGeom>
-          <a:noFill/>
-        </p:spPr>
-        <p:txBody>
-          <a:bodyPr wrap="square" lIns="45720" rIns="45720">
-            <a:spAutoFit/>
-          </a:bodyPr>
-          <a:lstStyle/>
-          <a:p>
-            <a:pPr algn="l"/>
-            <a:r>
-              <a:rPr sz="1200" b="0">
-                <a:solidFill>
-                  <a:srgbClr val="1F2D3A"/>
-                </a:solidFill>
-              </a:rPr>
-              <a:t>&lt;line x1="480" y1="20" x2="480" y2="300" stroke="#cfe3e5" stroke-width="2"/&gt;</a:t>
-            </a:r>
-          </a:p>
-        </p:txBody>
-      </p:sp>
-      <p:sp>
-        <p:nvSpPr>
-          <p:cNvPr id="10" name="TextBox 9"/>
-          <p:cNvSpPr txBox="1"/>
-          <p:nvPr/>
-        </p:nvSpPr>
-        <p:spPr>
-          <a:xfrm>
-            <a:off x="640080" y="3767328"/>
-            <a:ext cx="10911535" cy="1694688"/>
-          </a:xfrm>
-          <a:prstGeom prst="rect">
-            <a:avLst/>
-          </a:prstGeom>
-          <a:noFill/>
-        </p:spPr>
-        <p:txBody>
-          <a:bodyPr wrap="square" lIns="45720" rIns="45720">
-            <a:spAutoFit/>
-          </a:bodyPr>
-          <a:lstStyle/>
-          <a:p>
-            <a:pPr algn="l"/>
-            <a:r>
-              <a:rPr sz="1200" b="0">
-                <a:solidFill>
-                  <a:srgbClr val="1F2D3A"/>
-                </a:solidFill>
-              </a:rPr>
-              <a:t>&lt;text x="720" y="26" text-anchor="middle" font-size="22" fill="#006d77" font-weight="bold"&gt;Biba — Bütünlük&lt;/text&gt; &lt;rect x="630" y="50" width="180" height="52" rx="8" fill="#006d77"/&gt;&lt;text x="720" y="83" text-anchor="middle" font-size="20" fill="#fff"&gt;Yüksek güven&lt;/text&gt; &lt;rect x="630" y="220" width="180" height="52" rx="8" fill="#9ed6d7"/&gt;&lt;text x="720" y="253" text-anchor="middle" font-size="20" fill="#083a3e"&gt;Düşük güven&lt;/text&gt; &lt;line x1="600" y1="90" x2="600" y2="230" stroke="#c0392b" stroke-width="3" stroke-dasharray="7,5" marker-end="url(#red)"/&gt; &lt;text x="540" y="165" font-size="14" fill="#c0392b" transform="rotate(-90 540 165)" text-anchor="middle"&gt;aşağı OKUMA yok&lt;/text&gt; &lt;line x1="840" y1="220" x2="840" y2="100" stroke="#c0392b" stroke-width="3" stroke-dasharray="7,5" marker-end="url(#red)"/&gt; &lt;text x="900" y="165" font-size="14" fill="#c0392b" transform="rotate(90 900 165)" text-anchor="middle"&gt;yukarı YAZMA yok&lt;/text&gt; &lt;defs&gt;&lt;marker id="red" markerWidth="9" markerHeight="9" refX="7" refY="3" orient="auto"&gt;&lt;path d="M0,0 L7,3 L0,6 Z" fill="#c0392b"/&gt;&lt;/marker&gt;&lt;/defs&gt; &lt;/svg&gt;</a:t>
-            </a:r>
-          </a:p>
-        </p:txBody>
-      </p:sp>
-      <p:sp>
-        <p:nvSpPr>
-          <p:cNvPr id="11" name="TextBox 10"/>
-          <p:cNvSpPr txBox="1"/>
-          <p:nvPr/>
-        </p:nvSpPr>
-        <p:spPr>
-          <a:xfrm>
-            <a:off x="640080" y="5571744"/>
-            <a:ext cx="10911535" cy="307848"/>
-          </a:xfrm>
-          <a:prstGeom prst="rect">
-            <a:avLst/>
-          </a:prstGeom>
-          <a:noFill/>
-        </p:spPr>
-        <p:txBody>
-          <a:bodyPr wrap="square" lIns="45720" rIns="45720">
-            <a:spAutoFit/>
-          </a:bodyPr>
-          <a:lstStyle/>
-          <a:p>
-            <a:pPr algn="l"/>
-            <a:r>
-              <a:rPr sz="1200" b="1">
+              <a:rPr sz="2000" b="1">
                 <a:solidFill>
                   <a:srgbClr val="1F2D3A"/>
                 </a:solidFill>
@@ -28439,7 +28245,7 @@
               <a:t>Ters yönler:</a:t>
             </a:r>
             <a:r>
-              <a:rPr sz="1200" b="0">
+              <a:rPr sz="2000" b="0">
                 <a:solidFill>
                   <a:srgbClr val="1F2D3A"/>
                 </a:solidFill>

--- a/docs/week-2/cen429-week-2-sunum.tr.pptx
+++ b/docs/week-2/cen429-week-2-sunum.tr.pptx
@@ -112,6 +112,7 @@
     <p:sldId id="360" r:id="rId112"/>
     <p:sldId id="361" r:id="rId113"/>
     <p:sldId id="362" r:id="rId114"/>
+    <p:sldId id="363" r:id="rId115"/>
   </p:sldIdLst>
   <p:sldSz cx="12191695" cy="6858000" type="screen4x3"/>
   <p:notesSz cx="6858000" cy="9144000"/>
@@ -5722,7 +5723,7 @@
                   <a:srgbClr val="006D77"/>
                 </a:solidFill>
               </a:rPr>
-              <a:t>Soru 3</a:t>
+              <a:t>Soru 2</a:t>
             </a:r>
           </a:p>
         </p:txBody>
@@ -5756,7 +5757,7 @@
                   <a:srgbClr val="1F2D3A"/>
                 </a:solidFill>
               </a:rPr>
-              <a:t>İmza ve sezgisel tespitin güçlü/zayıf yanı?</a:t>
+              <a:t>Polimorfik virüs neden imza tespitini zorlar?</a:t>
             </a:r>
           </a:p>
         </p:txBody>
@@ -5798,7 +5799,7 @@
                   <a:srgbClr val="1F2D3A"/>
                 </a:solidFill>
               </a:rPr>
-              <a:t> İmza hızlı ama yeniyi kaçırır; sezgisel yeniyi bulur ama yanlış alarm üretir.</a:t>
+              <a:t> Her kopyada kendini farklı şifreler; sabit bir imza kalmaz. Sezgisel/emülasyon gerekir.</a:t>
             </a:r>
           </a:p>
         </p:txBody>
@@ -5973,7 +5974,7 @@
                   <a:srgbClr val="006D77"/>
                 </a:solidFill>
               </a:rPr>
-              <a:t>Soru 4</a:t>
+              <a:t>Soru 3</a:t>
             </a:r>
           </a:p>
         </p:txBody>
@@ -6007,7 +6008,7 @@
                   <a:srgbClr val="1F2D3A"/>
                 </a:solidFill>
               </a:rPr>
-              <a:t>BLP ile Biba neyi korur, kuralları ters mi?</a:t>
+              <a:t>İmza ve sezgisel tespitin güçlü/zayıf yanı?</a:t>
             </a:r>
           </a:p>
         </p:txBody>
@@ -6049,7 +6050,7 @@
                   <a:srgbClr val="1F2D3A"/>
                 </a:solidFill>
               </a:rPr>
-              <a:t> BLP gizliliği (yukarı okuma yok), Biba bütünlüğü (aşağı okuma yok). Evet, yönleri terstir.</a:t>
+              <a:t> İmza hızlı ama yeniyi kaçırır; sezgisel yeniyi bulur ama yanlış alarm üretir.</a:t>
             </a:r>
           </a:p>
         </p:txBody>
@@ -6224,7 +6225,7 @@
                   <a:srgbClr val="006D77"/>
                 </a:solidFill>
               </a:rPr>
-              <a:t>Soru 5</a:t>
+              <a:t>Soru 4</a:t>
             </a:r>
           </a:p>
         </p:txBody>
@@ -6258,7 +6259,7 @@
                   <a:srgbClr val="1F2D3A"/>
                 </a:solidFill>
               </a:rPr>
-              <a:t>CWE ile CVE farkı?</a:t>
+              <a:t>BLP ile Biba neyi korur, kuralları ters mi?</a:t>
             </a:r>
           </a:p>
         </p:txBody>
@@ -6300,39 +6301,7 @@
                   <a:srgbClr val="1F2D3A"/>
                 </a:solidFill>
               </a:rPr>
-              <a:t> CWE zayıflık </a:t>
-            </a:r>
-            <a:r>
-              <a:rPr sz="2000" b="1">
-                <a:solidFill>
-                  <a:srgbClr val="1F2D3A"/>
-                </a:solidFill>
-              </a:rPr>
-              <a:t>türü</a:t>
-            </a:r>
-            <a:r>
-              <a:rPr sz="2000" b="0">
-                <a:solidFill>
-                  <a:srgbClr val="1F2D3A"/>
-                </a:solidFill>
-              </a:rPr>
-              <a:t> (örn. use-after-free); CVE belirli bir üründeki </a:t>
-            </a:r>
-            <a:r>
-              <a:rPr sz="2000" b="1">
-                <a:solidFill>
-                  <a:srgbClr val="1F2D3A"/>
-                </a:solidFill>
-              </a:rPr>
-              <a:t>somut</a:t>
-            </a:r>
-            <a:r>
-              <a:rPr sz="2000" b="0">
-                <a:solidFill>
-                  <a:srgbClr val="1F2D3A"/>
-                </a:solidFill>
-              </a:rPr>
-              <a:t> açık.</a:t>
+              <a:t> BLP gizliliği (yukarı okuma yok), Biba bütünlüğü (aşağı okuma yok). Evet, yönleri terstir.</a:t>
             </a:r>
           </a:p>
         </p:txBody>
@@ -6507,7 +6476,7 @@
                   <a:srgbClr val="006D77"/>
                 </a:solidFill>
               </a:rPr>
-              <a:t>Soru 6</a:t>
+              <a:t>Soru 5</a:t>
             </a:r>
           </a:p>
         </p:txBody>
@@ -6541,7 +6510,7 @@
                   <a:srgbClr val="1F2D3A"/>
                 </a:solidFill>
               </a:rPr>
-              <a:t>CVSS ne söyler?</a:t>
+              <a:t>CWE ile CVE farkı?</a:t>
             </a:r>
           </a:p>
         </p:txBody>
@@ -6583,7 +6552,39 @@
                   <a:srgbClr val="1F2D3A"/>
                 </a:solidFill>
               </a:rPr>
-              <a:t> Bir açığın ciddiyetini standart bir puanla (0–10); önceliklendirmede kullanılır.</a:t>
+              <a:t> CWE zayıflık </a:t>
+            </a:r>
+            <a:r>
+              <a:rPr sz="2000" b="1">
+                <a:solidFill>
+                  <a:srgbClr val="1F2D3A"/>
+                </a:solidFill>
+              </a:rPr>
+              <a:t>türü</a:t>
+            </a:r>
+            <a:r>
+              <a:rPr sz="2000" b="0">
+                <a:solidFill>
+                  <a:srgbClr val="1F2D3A"/>
+                </a:solidFill>
+              </a:rPr>
+              <a:t> (örn. use-after-free); CVE belirli bir üründeki </a:t>
+            </a:r>
+            <a:r>
+              <a:rPr sz="2000" b="1">
+                <a:solidFill>
+                  <a:srgbClr val="1F2D3A"/>
+                </a:solidFill>
+              </a:rPr>
+              <a:t>somut</a:t>
+            </a:r>
+            <a:r>
+              <a:rPr sz="2000" b="0">
+                <a:solidFill>
+                  <a:srgbClr val="1F2D3A"/>
+                </a:solidFill>
+              </a:rPr>
+              <a:t> açık.</a:t>
             </a:r>
           </a:p>
         </p:txBody>
@@ -6758,7 +6759,7 @@
                   <a:srgbClr val="006D77"/>
                 </a:solidFill>
               </a:rPr>
-              <a:t>Soru 7</a:t>
+              <a:t>Soru 6</a:t>
             </a:r>
           </a:p>
         </p:txBody>
@@ -6792,7 +6793,7 @@
                   <a:srgbClr val="1F2D3A"/>
                 </a:solidFill>
               </a:rPr>
-              <a:t>Günlük enjeksiyonu (CWE-117) nasıl önlenir?</a:t>
+              <a:t>CVSS ne söyler?</a:t>
             </a:r>
           </a:p>
         </p:txBody>
@@ -6834,7 +6835,7 @@
                   <a:srgbClr val="1F2D3A"/>
                 </a:solidFill>
               </a:rPr>
-              <a:t> Günlüğe yazılan kullanıcı verisindeki satır sonu/kontrol karakterlerini temizle/kaçır; yapılandırılmış günlük kullan.</a:t>
+              <a:t> Bir açığın ciddiyetini standart bir puanla (0–10); önceliklendirmede kullanılır.</a:t>
             </a:r>
           </a:p>
         </p:txBody>
@@ -7009,7 +7010,7 @@
                   <a:srgbClr val="006D77"/>
                 </a:solidFill>
               </a:rPr>
-              <a:t>Soru 8</a:t>
+              <a:t>Soru 7</a:t>
             </a:r>
           </a:p>
         </p:txBody>
@@ -7043,7 +7044,7 @@
                   <a:srgbClr val="1F2D3A"/>
                 </a:solidFill>
               </a:rPr>
-              <a:t>Sorumlu ifşa nedir?</a:t>
+              <a:t>Günlük enjeksiyonu (CWE-117) nasıl önlenir?</a:t>
             </a:r>
           </a:p>
         </p:txBody>
@@ -7085,7 +7086,7 @@
                   <a:srgbClr val="1F2D3A"/>
                 </a:solidFill>
               </a:rPr>
-              <a:t> Açığı önce üreticiye bildirip yama için süre tanımak, sonra kamuya açıklamak.</a:t>
+              <a:t> Günlüğe yazılan kullanıcı verisindeki satır sonu/kontrol karakterlerini temizle/kaçır; yapılandırılmış günlük kullan.</a:t>
             </a:r>
           </a:p>
         </p:txBody>
@@ -7228,6 +7229,257 @@
                 </a:solidFill>
               </a:rPr>
               <a:t>106</a:t>
+            </a:r>
+          </a:p>
+        </p:txBody>
+      </p:sp>
+      <p:sp>
+        <p:nvSpPr>
+          <p:cNvPr id="6" name="TextBox 5"/>
+          <p:cNvSpPr txBox="1"/>
+          <p:nvPr/>
+        </p:nvSpPr>
+        <p:spPr>
+          <a:xfrm>
+            <a:off x="640080" y="548640"/>
+            <a:ext cx="10911535" cy="731520"/>
+          </a:xfrm>
+          <a:prstGeom prst="rect">
+            <a:avLst/>
+          </a:prstGeom>
+          <a:noFill/>
+        </p:spPr>
+        <p:txBody>
+          <a:bodyPr wrap="square" lIns="45720" rIns="45720" anchor="ctr">
+            <a:spAutoFit/>
+          </a:bodyPr>
+          <a:lstStyle/>
+          <a:p>
+            <a:r>
+              <a:rPr sz="3000" b="1">
+                <a:solidFill>
+                  <a:srgbClr val="006D77"/>
+                </a:solidFill>
+              </a:rPr>
+              <a:t>Soru 8</a:t>
+            </a:r>
+          </a:p>
+        </p:txBody>
+      </p:sp>
+      <p:sp>
+        <p:nvSpPr>
+          <p:cNvPr id="7" name="TextBox 6"/>
+          <p:cNvSpPr txBox="1"/>
+          <p:nvPr/>
+        </p:nvSpPr>
+        <p:spPr>
+          <a:xfrm>
+            <a:off x="640080" y="1325880"/>
+            <a:ext cx="10911535" cy="439928"/>
+          </a:xfrm>
+          <a:prstGeom prst="rect">
+            <a:avLst/>
+          </a:prstGeom>
+          <a:noFill/>
+        </p:spPr>
+        <p:txBody>
+          <a:bodyPr wrap="square" lIns="45720" rIns="45720">
+            <a:spAutoFit/>
+          </a:bodyPr>
+          <a:lstStyle/>
+          <a:p>
+            <a:pPr algn="l"/>
+            <a:r>
+              <a:rPr sz="2000" b="1">
+                <a:solidFill>
+                  <a:srgbClr val="1F2D3A"/>
+                </a:solidFill>
+              </a:rPr>
+              <a:t>Sorumlu ifşa nedir?</a:t>
+            </a:r>
+          </a:p>
+        </p:txBody>
+      </p:sp>
+      <p:sp>
+        <p:nvSpPr>
+          <p:cNvPr id="8" name="TextBox 7"/>
+          <p:cNvSpPr txBox="1"/>
+          <p:nvPr/>
+        </p:nvSpPr>
+        <p:spPr>
+          <a:xfrm>
+            <a:off x="640080" y="1875536"/>
+            <a:ext cx="10911535" cy="770128"/>
+          </a:xfrm>
+          <a:prstGeom prst="rect">
+            <a:avLst/>
+          </a:prstGeom>
+          <a:noFill/>
+        </p:spPr>
+        <p:txBody>
+          <a:bodyPr wrap="square" lIns="45720" rIns="45720">
+            <a:spAutoFit/>
+          </a:bodyPr>
+          <a:lstStyle/>
+          <a:p>
+            <a:pPr algn="l"/>
+            <a:r>
+              <a:rPr sz="2000" b="1">
+                <a:solidFill>
+                  <a:srgbClr val="1F2D3A"/>
+                </a:solidFill>
+              </a:rPr>
+              <a:t>Cevap:</a:t>
+            </a:r>
+            <a:r>
+              <a:rPr sz="2000" b="0">
+                <a:solidFill>
+                  <a:srgbClr val="1F2D3A"/>
+                </a:solidFill>
+              </a:rPr>
+              <a:t> Açığı önce üreticiye bildirip yama için süre tanımak, sonra kamuya açıklamak.</a:t>
+            </a:r>
+          </a:p>
+        </p:txBody>
+      </p:sp>
+    </p:spTree>
+  </p:cSld>
+  <p:clrMapOvr>
+    <a:masterClrMapping/>
+  </p:clrMapOvr>
+</p:sld>
+</file>
+
+<file path=ppt/slides/slide107.xml><?xml version="1.0" encoding="utf-8"?>
+<p:sld xmlns:a="http://schemas.openxmlformats.org/drawingml/2006/main" xmlns:p="http://schemas.openxmlformats.org/presentationml/2006/main" xmlns:r="http://schemas.openxmlformats.org/officeDocument/2006/relationships">
+  <p:cSld>
+    <p:spTree>
+      <p:nvGrpSpPr>
+        <p:cNvPr id="1" name=""/>
+        <p:cNvGrpSpPr/>
+        <p:nvPr/>
+      </p:nvGrpSpPr>
+      <p:grpSpPr/>
+      <p:pic>
+        <p:nvPicPr>
+          <p:cNvPr id="2" name="Picture 1" descr="rteu_logo_kucuk.jpg"/>
+          <p:cNvPicPr>
+            <a:picLocks noChangeAspect="1"/>
+          </p:cNvPicPr>
+          <p:nvPr/>
+        </p:nvPicPr>
+        <p:blipFill>
+          <a:blip r:embed="rId2"/>
+          <a:stretch>
+            <a:fillRect/>
+          </a:stretch>
+        </p:blipFill>
+        <p:spPr>
+          <a:xfrm>
+            <a:off x="640080" y="164592"/>
+            <a:ext cx="242773" cy="329184"/>
+          </a:xfrm>
+          <a:prstGeom prst="rect">
+            <a:avLst/>
+          </a:prstGeom>
+        </p:spPr>
+      </p:pic>
+      <p:sp>
+        <p:nvSpPr>
+          <p:cNvPr id="3" name="TextBox 2"/>
+          <p:cNvSpPr txBox="1"/>
+          <p:nvPr/>
+        </p:nvSpPr>
+        <p:spPr>
+          <a:xfrm>
+            <a:off x="1051560" y="182880"/>
+            <a:ext cx="7315200" cy="320040"/>
+          </a:xfrm>
+          <a:prstGeom prst="rect">
+            <a:avLst/>
+          </a:prstGeom>
+          <a:noFill/>
+        </p:spPr>
+        <p:txBody>
+          <a:bodyPr wrap="square" lIns="45720" rIns="45720">
+            <a:spAutoFit/>
+          </a:bodyPr>
+          <a:lstStyle/>
+          <a:p>
+            <a:r>
+              <a:rPr sz="1100" b="0">
+                <a:solidFill>
+                  <a:srgbClr val="5B6770"/>
+                </a:solidFill>
+              </a:rPr>
+              <a:t>CEN429 Güvenli Programlama · Hafta 2</a:t>
+            </a:r>
+          </a:p>
+        </p:txBody>
+      </p:sp>
+      <p:sp>
+        <p:nvSpPr>
+          <p:cNvPr id="4" name="TextBox 3"/>
+          <p:cNvSpPr txBox="1"/>
+          <p:nvPr/>
+        </p:nvSpPr>
+        <p:spPr>
+          <a:xfrm>
+            <a:off x="640080" y="6446520"/>
+            <a:ext cx="7315200" cy="274320"/>
+          </a:xfrm>
+          <a:prstGeom prst="rect">
+            <a:avLst/>
+          </a:prstGeom>
+          <a:noFill/>
+        </p:spPr>
+        <p:txBody>
+          <a:bodyPr wrap="square" lIns="45720" rIns="45720">
+            <a:spAutoFit/>
+          </a:bodyPr>
+          <a:lstStyle/>
+          <a:p>
+            <a:r>
+              <a:rPr sz="1000" b="0">
+                <a:solidFill>
+                  <a:srgbClr val="5B6770"/>
+                </a:solidFill>
+              </a:rPr>
+              <a:t>RTEÜ Bilgisayar Mühendisliği · 2026-2027 Güz</a:t>
+            </a:r>
+          </a:p>
+        </p:txBody>
+      </p:sp>
+      <p:sp>
+        <p:nvSpPr>
+          <p:cNvPr id="5" name="TextBox 4"/>
+          <p:cNvSpPr txBox="1"/>
+          <p:nvPr/>
+        </p:nvSpPr>
+        <p:spPr>
+          <a:xfrm>
+            <a:off x="10637215" y="6446520"/>
+            <a:ext cx="914400" cy="274320"/>
+          </a:xfrm>
+          <a:prstGeom prst="rect">
+            <a:avLst/>
+          </a:prstGeom>
+          <a:noFill/>
+        </p:spPr>
+        <p:txBody>
+          <a:bodyPr wrap="square" lIns="45720" rIns="45720">
+            <a:spAutoFit/>
+          </a:bodyPr>
+          <a:lstStyle/>
+          <a:p>
+            <a:pPr algn="r"/>
+            <a:r>
+              <a:rPr sz="1000" b="0">
+                <a:solidFill>
+                  <a:srgbClr val="5B6770"/>
+                </a:solidFill>
+              </a:rPr>
+              <a:t>107</a:t>
             </a:r>
           </a:p>
         </p:txBody>
@@ -7607,7 +7859,7 @@
 </p:sld>
 </file>
 
-<file path=ppt/slides/slide107.xml><?xml version="1.0" encoding="utf-8"?>
+<file path=ppt/slides/slide108.xml><?xml version="1.0" encoding="utf-8"?>
 <p:sld xmlns:a="http://schemas.openxmlformats.org/drawingml/2006/main" xmlns:p="http://schemas.openxmlformats.org/presentationml/2006/main" xmlns:r="http://schemas.openxmlformats.org/officeDocument/2006/relationships">
   <p:cSld>
     <p:spTree>
@@ -7736,7 +7988,7 @@
                   <a:srgbClr val="5B6770"/>
                 </a:solidFill>
               </a:rPr>
-              <a:t>107</a:t>
+              <a:t>108</a:t>
             </a:r>
           </a:p>
         </p:txBody>
@@ -32751,6 +33003,496 @@
           <a:lstStyle/>
           <a:p>
             <a:r>
+              <a:rPr sz="3000" b="1">
+                <a:solidFill>
+                  <a:srgbClr val="006D77"/>
+                </a:solidFill>
+              </a:rPr>
+              <a:t>Unix izin bitleri — şema</a:t>
+            </a:r>
+          </a:p>
+        </p:txBody>
+      </p:sp>
+      <p:pic>
+        <p:nvPicPr>
+          <p:cNvPr id="7" name="Picture 6" descr="h02-08-unix-izinleri.png"/>
+          <p:cNvPicPr>
+            <a:picLocks noChangeAspect="1"/>
+          </p:cNvPicPr>
+          <p:nvPr/>
+        </p:nvPicPr>
+        <p:blipFill>
+          <a:blip r:embed="rId3"/>
+          <a:stretch>
+            <a:fillRect/>
+          </a:stretch>
+        </p:blipFill>
+        <p:spPr>
+          <a:xfrm>
+            <a:off x="2046645" y="1325880"/>
+            <a:ext cx="8098404" cy="3345570"/>
+          </a:xfrm>
+          <a:prstGeom prst="rect">
+            <a:avLst/>
+          </a:prstGeom>
+        </p:spPr>
+      </p:pic>
+    </p:spTree>
+  </p:cSld>
+  <p:clrMapOvr>
+    <a:masterClrMapping/>
+  </p:clrMapOvr>
+</p:sld>
+</file>
+
+<file path=ppt/slides/slide7.xml><?xml version="1.0" encoding="utf-8"?>
+<p:sld xmlns:a="http://schemas.openxmlformats.org/drawingml/2006/main" xmlns:p="http://schemas.openxmlformats.org/presentationml/2006/main" xmlns:r="http://schemas.openxmlformats.org/officeDocument/2006/relationships">
+  <p:cSld>
+    <p:spTree>
+      <p:nvGrpSpPr>
+        <p:cNvPr id="1" name=""/>
+        <p:cNvGrpSpPr/>
+        <p:nvPr/>
+      </p:nvGrpSpPr>
+      <p:grpSpPr/>
+      <p:pic>
+        <p:nvPicPr>
+          <p:cNvPr id="2" name="Picture 1" descr="rteu_logo_kucuk.jpg"/>
+          <p:cNvPicPr>
+            <a:picLocks noChangeAspect="1"/>
+          </p:cNvPicPr>
+          <p:nvPr/>
+        </p:nvPicPr>
+        <p:blipFill>
+          <a:blip r:embed="rId2"/>
+          <a:stretch>
+            <a:fillRect/>
+          </a:stretch>
+        </p:blipFill>
+        <p:spPr>
+          <a:xfrm>
+            <a:off x="640080" y="164592"/>
+            <a:ext cx="242773" cy="329184"/>
+          </a:xfrm>
+          <a:prstGeom prst="rect">
+            <a:avLst/>
+          </a:prstGeom>
+        </p:spPr>
+      </p:pic>
+      <p:sp>
+        <p:nvSpPr>
+          <p:cNvPr id="3" name="TextBox 2"/>
+          <p:cNvSpPr txBox="1"/>
+          <p:nvPr/>
+        </p:nvSpPr>
+        <p:spPr>
+          <a:xfrm>
+            <a:off x="1051560" y="182880"/>
+            <a:ext cx="7315200" cy="320040"/>
+          </a:xfrm>
+          <a:prstGeom prst="rect">
+            <a:avLst/>
+          </a:prstGeom>
+          <a:noFill/>
+        </p:spPr>
+        <p:txBody>
+          <a:bodyPr wrap="square" lIns="45720" rIns="45720">
+            <a:spAutoFit/>
+          </a:bodyPr>
+          <a:lstStyle/>
+          <a:p>
+            <a:r>
+              <a:rPr sz="1100" b="0">
+                <a:solidFill>
+                  <a:srgbClr val="5B6770"/>
+                </a:solidFill>
+              </a:rPr>
+              <a:t>CEN429 Güvenli Programlama · Hafta 2</a:t>
+            </a:r>
+          </a:p>
+        </p:txBody>
+      </p:sp>
+      <p:sp>
+        <p:nvSpPr>
+          <p:cNvPr id="4" name="TextBox 3"/>
+          <p:cNvSpPr txBox="1"/>
+          <p:nvPr/>
+        </p:nvSpPr>
+        <p:spPr>
+          <a:xfrm>
+            <a:off x="640080" y="6446520"/>
+            <a:ext cx="7315200" cy="274320"/>
+          </a:xfrm>
+          <a:prstGeom prst="rect">
+            <a:avLst/>
+          </a:prstGeom>
+          <a:noFill/>
+        </p:spPr>
+        <p:txBody>
+          <a:bodyPr wrap="square" lIns="45720" rIns="45720">
+            <a:spAutoFit/>
+          </a:bodyPr>
+          <a:lstStyle/>
+          <a:p>
+            <a:r>
+              <a:rPr sz="1000" b="0">
+                <a:solidFill>
+                  <a:srgbClr val="5B6770"/>
+                </a:solidFill>
+              </a:rPr>
+              <a:t>RTEÜ Bilgisayar Mühendisliği · 2026-2027 Güz</a:t>
+            </a:r>
+          </a:p>
+        </p:txBody>
+      </p:sp>
+      <p:sp>
+        <p:nvSpPr>
+          <p:cNvPr id="5" name="TextBox 4"/>
+          <p:cNvSpPr txBox="1"/>
+          <p:nvPr/>
+        </p:nvSpPr>
+        <p:spPr>
+          <a:xfrm>
+            <a:off x="10637215" y="6446520"/>
+            <a:ext cx="914400" cy="274320"/>
+          </a:xfrm>
+          <a:prstGeom prst="rect">
+            <a:avLst/>
+          </a:prstGeom>
+          <a:noFill/>
+        </p:spPr>
+        <p:txBody>
+          <a:bodyPr wrap="square" lIns="45720" rIns="45720">
+            <a:spAutoFit/>
+          </a:bodyPr>
+          <a:lstStyle/>
+          <a:p>
+            <a:pPr algn="r"/>
+            <a:r>
+              <a:rPr sz="1000" b="0">
+                <a:solidFill>
+                  <a:srgbClr val="5B6770"/>
+                </a:solidFill>
+              </a:rPr>
+              <a:t>7</a:t>
+            </a:r>
+          </a:p>
+        </p:txBody>
+      </p:sp>
+      <p:sp>
+        <p:nvSpPr>
+          <p:cNvPr id="6" name="TextBox 5"/>
+          <p:cNvSpPr txBox="1"/>
+          <p:nvPr/>
+        </p:nvSpPr>
+        <p:spPr>
+          <a:xfrm>
+            <a:off x="640080" y="548640"/>
+            <a:ext cx="10911535" cy="731520"/>
+          </a:xfrm>
+          <a:prstGeom prst="rect">
+            <a:avLst/>
+          </a:prstGeom>
+          <a:noFill/>
+        </p:spPr>
+        <p:txBody>
+          <a:bodyPr wrap="square" lIns="45720" rIns="45720" anchor="ctr">
+            <a:spAutoFit/>
+          </a:bodyPr>
+          <a:lstStyle/>
+          <a:p>
+            <a:r>
+              <a:rPr sz="3000" b="1">
+                <a:solidFill>
+                  <a:srgbClr val="006D77"/>
+                </a:solidFill>
+              </a:rPr>
+              <a:t>Bir virüsün üç parçası</a:t>
+            </a:r>
+          </a:p>
+        </p:txBody>
+      </p:sp>
+      <p:sp>
+        <p:nvSpPr>
+          <p:cNvPr id="7" name="TextBox 6"/>
+          <p:cNvSpPr txBox="1"/>
+          <p:nvPr/>
+        </p:nvSpPr>
+        <p:spPr>
+          <a:xfrm>
+            <a:off x="640080" y="1325880"/>
+            <a:ext cx="10911535" cy="1219200"/>
+          </a:xfrm>
+          <a:prstGeom prst="rect">
+            <a:avLst/>
+          </a:prstGeom>
+          <a:noFill/>
+        </p:spPr>
+        <p:txBody>
+          <a:bodyPr wrap="square" lIns="45720" rIns="45720">
+            <a:spAutoFit/>
+          </a:bodyPr>
+          <a:lstStyle/>
+          <a:p>
+            <a:pPr>
+              <a:spcAft>
+                <a:spcPts val="300"/>
+              </a:spcAft>
+            </a:pPr>
+            <a:r>
+              <a:rPr sz="2000" b="1">
+                <a:solidFill>
+                  <a:srgbClr val="006D77"/>
+                </a:solidFill>
+              </a:rPr>
+              <a:t>• </a:t>
+            </a:r>
+            <a:r>
+              <a:rPr sz="2000" b="1">
+                <a:solidFill>
+                  <a:srgbClr val="1F2D3A"/>
+                </a:solidFill>
+              </a:rPr>
+              <a:t>Bulaştırıcı:</a:t>
+            </a:r>
+            <a:r>
+              <a:rPr sz="2000" b="0">
+                <a:solidFill>
+                  <a:srgbClr val="1F2D3A"/>
+                </a:solidFill>
+              </a:rPr>
+              <a:t> nasıl yayılır.</a:t>
+            </a:r>
+          </a:p>
+          <a:p>
+            <a:pPr>
+              <a:spcAft>
+                <a:spcPts val="300"/>
+              </a:spcAft>
+            </a:pPr>
+            <a:r>
+              <a:rPr sz="2000" b="1">
+                <a:solidFill>
+                  <a:srgbClr val="006D77"/>
+                </a:solidFill>
+              </a:rPr>
+              <a:t>• </a:t>
+            </a:r>
+            <a:r>
+              <a:rPr sz="2000" b="1">
+                <a:solidFill>
+                  <a:srgbClr val="1F2D3A"/>
+                </a:solidFill>
+              </a:rPr>
+              <a:t>Tetikleyici:</a:t>
+            </a:r>
+            <a:r>
+              <a:rPr sz="2000" b="0">
+                <a:solidFill>
+                  <a:srgbClr val="1F2D3A"/>
+                </a:solidFill>
+              </a:rPr>
+              <a:t> ne zaman etkinleşir.</a:t>
+            </a:r>
+          </a:p>
+          <a:p>
+            <a:pPr>
+              <a:spcAft>
+                <a:spcPts val="300"/>
+              </a:spcAft>
+            </a:pPr>
+            <a:r>
+              <a:rPr sz="2000" b="1">
+                <a:solidFill>
+                  <a:srgbClr val="006D77"/>
+                </a:solidFill>
+              </a:rPr>
+              <a:t>• </a:t>
+            </a:r>
+            <a:r>
+              <a:rPr sz="2000" b="1">
+                <a:solidFill>
+                  <a:srgbClr val="1F2D3A"/>
+                </a:solidFill>
+              </a:rPr>
+              <a:t>Yük (payload):</a:t>
+            </a:r>
+            <a:r>
+              <a:rPr sz="2000" b="0">
+                <a:solidFill>
+                  <a:srgbClr val="1F2D3A"/>
+                </a:solidFill>
+              </a:rPr>
+              <a:t> ne yapar.</a:t>
+            </a:r>
+          </a:p>
+        </p:txBody>
+      </p:sp>
+    </p:spTree>
+  </p:cSld>
+  <p:clrMapOvr>
+    <a:masterClrMapping/>
+  </p:clrMapOvr>
+</p:sld>
+</file>
+
+<file path=ppt/slides/slide70.xml><?xml version="1.0" encoding="utf-8"?>
+<p:sld xmlns:a="http://schemas.openxmlformats.org/drawingml/2006/main" xmlns:p="http://schemas.openxmlformats.org/presentationml/2006/main" xmlns:r="http://schemas.openxmlformats.org/officeDocument/2006/relationships">
+  <p:cSld>
+    <p:spTree>
+      <p:nvGrpSpPr>
+        <p:cNvPr id="1" name=""/>
+        <p:cNvGrpSpPr/>
+        <p:nvPr/>
+      </p:nvGrpSpPr>
+      <p:grpSpPr/>
+      <p:pic>
+        <p:nvPicPr>
+          <p:cNvPr id="2" name="Picture 1" descr="rteu_logo_kucuk.jpg"/>
+          <p:cNvPicPr>
+            <a:picLocks noChangeAspect="1"/>
+          </p:cNvPicPr>
+          <p:nvPr/>
+        </p:nvPicPr>
+        <p:blipFill>
+          <a:blip r:embed="rId2"/>
+          <a:stretch>
+            <a:fillRect/>
+          </a:stretch>
+        </p:blipFill>
+        <p:spPr>
+          <a:xfrm>
+            <a:off x="640080" y="164592"/>
+            <a:ext cx="242773" cy="329184"/>
+          </a:xfrm>
+          <a:prstGeom prst="rect">
+            <a:avLst/>
+          </a:prstGeom>
+        </p:spPr>
+      </p:pic>
+      <p:sp>
+        <p:nvSpPr>
+          <p:cNvPr id="3" name="TextBox 2"/>
+          <p:cNvSpPr txBox="1"/>
+          <p:nvPr/>
+        </p:nvSpPr>
+        <p:spPr>
+          <a:xfrm>
+            <a:off x="1051560" y="182880"/>
+            <a:ext cx="7315200" cy="320040"/>
+          </a:xfrm>
+          <a:prstGeom prst="rect">
+            <a:avLst/>
+          </a:prstGeom>
+          <a:noFill/>
+        </p:spPr>
+        <p:txBody>
+          <a:bodyPr wrap="square" lIns="45720" rIns="45720">
+            <a:spAutoFit/>
+          </a:bodyPr>
+          <a:lstStyle/>
+          <a:p>
+            <a:r>
+              <a:rPr sz="1100" b="0">
+                <a:solidFill>
+                  <a:srgbClr val="5B6770"/>
+                </a:solidFill>
+              </a:rPr>
+              <a:t>CEN429 Güvenli Programlama · Hafta 2</a:t>
+            </a:r>
+          </a:p>
+        </p:txBody>
+      </p:sp>
+      <p:sp>
+        <p:nvSpPr>
+          <p:cNvPr id="4" name="TextBox 3"/>
+          <p:cNvSpPr txBox="1"/>
+          <p:nvPr/>
+        </p:nvSpPr>
+        <p:spPr>
+          <a:xfrm>
+            <a:off x="640080" y="6446520"/>
+            <a:ext cx="7315200" cy="274320"/>
+          </a:xfrm>
+          <a:prstGeom prst="rect">
+            <a:avLst/>
+          </a:prstGeom>
+          <a:noFill/>
+        </p:spPr>
+        <p:txBody>
+          <a:bodyPr wrap="square" lIns="45720" rIns="45720">
+            <a:spAutoFit/>
+          </a:bodyPr>
+          <a:lstStyle/>
+          <a:p>
+            <a:r>
+              <a:rPr sz="1000" b="0">
+                <a:solidFill>
+                  <a:srgbClr val="5B6770"/>
+                </a:solidFill>
+              </a:rPr>
+              <a:t>RTEÜ Bilgisayar Mühendisliği · 2026-2027 Güz</a:t>
+            </a:r>
+          </a:p>
+        </p:txBody>
+      </p:sp>
+      <p:sp>
+        <p:nvSpPr>
+          <p:cNvPr id="5" name="TextBox 4"/>
+          <p:cNvSpPr txBox="1"/>
+          <p:nvPr/>
+        </p:nvSpPr>
+        <p:spPr>
+          <a:xfrm>
+            <a:off x="10637215" y="6446520"/>
+            <a:ext cx="914400" cy="274320"/>
+          </a:xfrm>
+          <a:prstGeom prst="rect">
+            <a:avLst/>
+          </a:prstGeom>
+          <a:noFill/>
+        </p:spPr>
+        <p:txBody>
+          <a:bodyPr wrap="square" lIns="45720" rIns="45720">
+            <a:spAutoFit/>
+          </a:bodyPr>
+          <a:lstStyle/>
+          <a:p>
+            <a:pPr algn="r"/>
+            <a:r>
+              <a:rPr sz="1000" b="0">
+                <a:solidFill>
+                  <a:srgbClr val="5B6770"/>
+                </a:solidFill>
+              </a:rPr>
+              <a:t>70</a:t>
+            </a:r>
+          </a:p>
+        </p:txBody>
+      </p:sp>
+      <p:sp>
+        <p:nvSpPr>
+          <p:cNvPr id="6" name="TextBox 5"/>
+          <p:cNvSpPr txBox="1"/>
+          <p:nvPr/>
+        </p:nvSpPr>
+        <p:spPr>
+          <a:xfrm>
+            <a:off x="640080" y="548640"/>
+            <a:ext cx="10911535" cy="731520"/>
+          </a:xfrm>
+          <a:prstGeom prst="rect">
+            <a:avLst/>
+          </a:prstGeom>
+          <a:noFill/>
+        </p:spPr>
+        <p:txBody>
+          <a:bodyPr wrap="square" lIns="45720" rIns="45720" anchor="ctr">
+            <a:spAutoFit/>
+          </a:bodyPr>
+          <a:lstStyle/>
+          <a:p>
+            <a:r>
               <a:rPr sz="2600" b="1">
                 <a:solidFill>
                   <a:srgbClr val="006D77"/>
@@ -33247,681 +33989,6 @@
 </p:sld>
 </file>
 
-<file path=ppt/slides/slide7.xml><?xml version="1.0" encoding="utf-8"?>
-<p:sld xmlns:a="http://schemas.openxmlformats.org/drawingml/2006/main" xmlns:p="http://schemas.openxmlformats.org/presentationml/2006/main" xmlns:r="http://schemas.openxmlformats.org/officeDocument/2006/relationships">
-  <p:cSld>
-    <p:spTree>
-      <p:nvGrpSpPr>
-        <p:cNvPr id="1" name=""/>
-        <p:cNvGrpSpPr/>
-        <p:nvPr/>
-      </p:nvGrpSpPr>
-      <p:grpSpPr/>
-      <p:pic>
-        <p:nvPicPr>
-          <p:cNvPr id="2" name="Picture 1" descr="rteu_logo_kucuk.jpg"/>
-          <p:cNvPicPr>
-            <a:picLocks noChangeAspect="1"/>
-          </p:cNvPicPr>
-          <p:nvPr/>
-        </p:nvPicPr>
-        <p:blipFill>
-          <a:blip r:embed="rId2"/>
-          <a:stretch>
-            <a:fillRect/>
-          </a:stretch>
-        </p:blipFill>
-        <p:spPr>
-          <a:xfrm>
-            <a:off x="640080" y="164592"/>
-            <a:ext cx="242773" cy="329184"/>
-          </a:xfrm>
-          <a:prstGeom prst="rect">
-            <a:avLst/>
-          </a:prstGeom>
-        </p:spPr>
-      </p:pic>
-      <p:sp>
-        <p:nvSpPr>
-          <p:cNvPr id="3" name="TextBox 2"/>
-          <p:cNvSpPr txBox="1"/>
-          <p:nvPr/>
-        </p:nvSpPr>
-        <p:spPr>
-          <a:xfrm>
-            <a:off x="1051560" y="182880"/>
-            <a:ext cx="7315200" cy="320040"/>
-          </a:xfrm>
-          <a:prstGeom prst="rect">
-            <a:avLst/>
-          </a:prstGeom>
-          <a:noFill/>
-        </p:spPr>
-        <p:txBody>
-          <a:bodyPr wrap="square" lIns="45720" rIns="45720">
-            <a:spAutoFit/>
-          </a:bodyPr>
-          <a:lstStyle/>
-          <a:p>
-            <a:r>
-              <a:rPr sz="1100" b="0">
-                <a:solidFill>
-                  <a:srgbClr val="5B6770"/>
-                </a:solidFill>
-              </a:rPr>
-              <a:t>CEN429 Güvenli Programlama · Hafta 2</a:t>
-            </a:r>
-          </a:p>
-        </p:txBody>
-      </p:sp>
-      <p:sp>
-        <p:nvSpPr>
-          <p:cNvPr id="4" name="TextBox 3"/>
-          <p:cNvSpPr txBox="1"/>
-          <p:nvPr/>
-        </p:nvSpPr>
-        <p:spPr>
-          <a:xfrm>
-            <a:off x="640080" y="6446520"/>
-            <a:ext cx="7315200" cy="274320"/>
-          </a:xfrm>
-          <a:prstGeom prst="rect">
-            <a:avLst/>
-          </a:prstGeom>
-          <a:noFill/>
-        </p:spPr>
-        <p:txBody>
-          <a:bodyPr wrap="square" lIns="45720" rIns="45720">
-            <a:spAutoFit/>
-          </a:bodyPr>
-          <a:lstStyle/>
-          <a:p>
-            <a:r>
-              <a:rPr sz="1000" b="0">
-                <a:solidFill>
-                  <a:srgbClr val="5B6770"/>
-                </a:solidFill>
-              </a:rPr>
-              <a:t>RTEÜ Bilgisayar Mühendisliği · 2026-2027 Güz</a:t>
-            </a:r>
-          </a:p>
-        </p:txBody>
-      </p:sp>
-      <p:sp>
-        <p:nvSpPr>
-          <p:cNvPr id="5" name="TextBox 4"/>
-          <p:cNvSpPr txBox="1"/>
-          <p:nvPr/>
-        </p:nvSpPr>
-        <p:spPr>
-          <a:xfrm>
-            <a:off x="10637215" y="6446520"/>
-            <a:ext cx="914400" cy="274320"/>
-          </a:xfrm>
-          <a:prstGeom prst="rect">
-            <a:avLst/>
-          </a:prstGeom>
-          <a:noFill/>
-        </p:spPr>
-        <p:txBody>
-          <a:bodyPr wrap="square" lIns="45720" rIns="45720">
-            <a:spAutoFit/>
-          </a:bodyPr>
-          <a:lstStyle/>
-          <a:p>
-            <a:pPr algn="r"/>
-            <a:r>
-              <a:rPr sz="1000" b="0">
-                <a:solidFill>
-                  <a:srgbClr val="5B6770"/>
-                </a:solidFill>
-              </a:rPr>
-              <a:t>7</a:t>
-            </a:r>
-          </a:p>
-        </p:txBody>
-      </p:sp>
-      <p:sp>
-        <p:nvSpPr>
-          <p:cNvPr id="6" name="TextBox 5"/>
-          <p:cNvSpPr txBox="1"/>
-          <p:nvPr/>
-        </p:nvSpPr>
-        <p:spPr>
-          <a:xfrm>
-            <a:off x="640080" y="548640"/>
-            <a:ext cx="10911535" cy="731520"/>
-          </a:xfrm>
-          <a:prstGeom prst="rect">
-            <a:avLst/>
-          </a:prstGeom>
-          <a:noFill/>
-        </p:spPr>
-        <p:txBody>
-          <a:bodyPr wrap="square" lIns="45720" rIns="45720" anchor="ctr">
-            <a:spAutoFit/>
-          </a:bodyPr>
-          <a:lstStyle/>
-          <a:p>
-            <a:r>
-              <a:rPr sz="3000" b="1">
-                <a:solidFill>
-                  <a:srgbClr val="006D77"/>
-                </a:solidFill>
-              </a:rPr>
-              <a:t>Bir virüsün üç parçası</a:t>
-            </a:r>
-          </a:p>
-        </p:txBody>
-      </p:sp>
-      <p:sp>
-        <p:nvSpPr>
-          <p:cNvPr id="7" name="TextBox 6"/>
-          <p:cNvSpPr txBox="1"/>
-          <p:nvPr/>
-        </p:nvSpPr>
-        <p:spPr>
-          <a:xfrm>
-            <a:off x="640080" y="1325880"/>
-            <a:ext cx="10911535" cy="1219200"/>
-          </a:xfrm>
-          <a:prstGeom prst="rect">
-            <a:avLst/>
-          </a:prstGeom>
-          <a:noFill/>
-        </p:spPr>
-        <p:txBody>
-          <a:bodyPr wrap="square" lIns="45720" rIns="45720">
-            <a:spAutoFit/>
-          </a:bodyPr>
-          <a:lstStyle/>
-          <a:p>
-            <a:pPr>
-              <a:spcAft>
-                <a:spcPts val="300"/>
-              </a:spcAft>
-            </a:pPr>
-            <a:r>
-              <a:rPr sz="2000" b="1">
-                <a:solidFill>
-                  <a:srgbClr val="006D77"/>
-                </a:solidFill>
-              </a:rPr>
-              <a:t>• </a:t>
-            </a:r>
-            <a:r>
-              <a:rPr sz="2000" b="1">
-                <a:solidFill>
-                  <a:srgbClr val="1F2D3A"/>
-                </a:solidFill>
-              </a:rPr>
-              <a:t>Bulaştırıcı:</a:t>
-            </a:r>
-            <a:r>
-              <a:rPr sz="2000" b="0">
-                <a:solidFill>
-                  <a:srgbClr val="1F2D3A"/>
-                </a:solidFill>
-              </a:rPr>
-              <a:t> nasıl yayılır.</a:t>
-            </a:r>
-          </a:p>
-          <a:p>
-            <a:pPr>
-              <a:spcAft>
-                <a:spcPts val="300"/>
-              </a:spcAft>
-            </a:pPr>
-            <a:r>
-              <a:rPr sz="2000" b="1">
-                <a:solidFill>
-                  <a:srgbClr val="006D77"/>
-                </a:solidFill>
-              </a:rPr>
-              <a:t>• </a:t>
-            </a:r>
-            <a:r>
-              <a:rPr sz="2000" b="1">
-                <a:solidFill>
-                  <a:srgbClr val="1F2D3A"/>
-                </a:solidFill>
-              </a:rPr>
-              <a:t>Tetikleyici:</a:t>
-            </a:r>
-            <a:r>
-              <a:rPr sz="2000" b="0">
-                <a:solidFill>
-                  <a:srgbClr val="1F2D3A"/>
-                </a:solidFill>
-              </a:rPr>
-              <a:t> ne zaman etkinleşir.</a:t>
-            </a:r>
-          </a:p>
-          <a:p>
-            <a:pPr>
-              <a:spcAft>
-                <a:spcPts val="300"/>
-              </a:spcAft>
-            </a:pPr>
-            <a:r>
-              <a:rPr sz="2000" b="1">
-                <a:solidFill>
-                  <a:srgbClr val="006D77"/>
-                </a:solidFill>
-              </a:rPr>
-              <a:t>• </a:t>
-            </a:r>
-            <a:r>
-              <a:rPr sz="2000" b="1">
-                <a:solidFill>
-                  <a:srgbClr val="1F2D3A"/>
-                </a:solidFill>
-              </a:rPr>
-              <a:t>Yük (payload):</a:t>
-            </a:r>
-            <a:r>
-              <a:rPr sz="2000" b="0">
-                <a:solidFill>
-                  <a:srgbClr val="1F2D3A"/>
-                </a:solidFill>
-              </a:rPr>
-              <a:t> ne yapar.</a:t>
-            </a:r>
-          </a:p>
-        </p:txBody>
-      </p:sp>
-    </p:spTree>
-  </p:cSld>
-  <p:clrMapOvr>
-    <a:masterClrMapping/>
-  </p:clrMapOvr>
-</p:sld>
-</file>
-
-<file path=ppt/slides/slide70.xml><?xml version="1.0" encoding="utf-8"?>
-<p:sld xmlns:a="http://schemas.openxmlformats.org/drawingml/2006/main" xmlns:p="http://schemas.openxmlformats.org/presentationml/2006/main" xmlns:r="http://schemas.openxmlformats.org/officeDocument/2006/relationships">
-  <p:cSld>
-    <p:spTree>
-      <p:nvGrpSpPr>
-        <p:cNvPr id="1" name=""/>
-        <p:cNvGrpSpPr/>
-        <p:nvPr/>
-      </p:nvGrpSpPr>
-      <p:grpSpPr/>
-      <p:pic>
-        <p:nvPicPr>
-          <p:cNvPr id="2" name="Picture 1" descr="rteu_logo_kucuk.jpg"/>
-          <p:cNvPicPr>
-            <a:picLocks noChangeAspect="1"/>
-          </p:cNvPicPr>
-          <p:nvPr/>
-        </p:nvPicPr>
-        <p:blipFill>
-          <a:blip r:embed="rId2"/>
-          <a:stretch>
-            <a:fillRect/>
-          </a:stretch>
-        </p:blipFill>
-        <p:spPr>
-          <a:xfrm>
-            <a:off x="640080" y="164592"/>
-            <a:ext cx="242773" cy="329184"/>
-          </a:xfrm>
-          <a:prstGeom prst="rect">
-            <a:avLst/>
-          </a:prstGeom>
-        </p:spPr>
-      </p:pic>
-      <p:sp>
-        <p:nvSpPr>
-          <p:cNvPr id="3" name="TextBox 2"/>
-          <p:cNvSpPr txBox="1"/>
-          <p:nvPr/>
-        </p:nvSpPr>
-        <p:spPr>
-          <a:xfrm>
-            <a:off x="1051560" y="182880"/>
-            <a:ext cx="7315200" cy="320040"/>
-          </a:xfrm>
-          <a:prstGeom prst="rect">
-            <a:avLst/>
-          </a:prstGeom>
-          <a:noFill/>
-        </p:spPr>
-        <p:txBody>
-          <a:bodyPr wrap="square" lIns="45720" rIns="45720">
-            <a:spAutoFit/>
-          </a:bodyPr>
-          <a:lstStyle/>
-          <a:p>
-            <a:r>
-              <a:rPr sz="1100" b="0">
-                <a:solidFill>
-                  <a:srgbClr val="5B6770"/>
-                </a:solidFill>
-              </a:rPr>
-              <a:t>CEN429 Güvenli Programlama · Hafta 2</a:t>
-            </a:r>
-          </a:p>
-        </p:txBody>
-      </p:sp>
-      <p:sp>
-        <p:nvSpPr>
-          <p:cNvPr id="4" name="TextBox 3"/>
-          <p:cNvSpPr txBox="1"/>
-          <p:nvPr/>
-        </p:nvSpPr>
-        <p:spPr>
-          <a:xfrm>
-            <a:off x="640080" y="6446520"/>
-            <a:ext cx="7315200" cy="274320"/>
-          </a:xfrm>
-          <a:prstGeom prst="rect">
-            <a:avLst/>
-          </a:prstGeom>
-          <a:noFill/>
-        </p:spPr>
-        <p:txBody>
-          <a:bodyPr wrap="square" lIns="45720" rIns="45720">
-            <a:spAutoFit/>
-          </a:bodyPr>
-          <a:lstStyle/>
-          <a:p>
-            <a:r>
-              <a:rPr sz="1000" b="0">
-                <a:solidFill>
-                  <a:srgbClr val="5B6770"/>
-                </a:solidFill>
-              </a:rPr>
-              <a:t>RTEÜ Bilgisayar Mühendisliği · 2026-2027 Güz</a:t>
-            </a:r>
-          </a:p>
-        </p:txBody>
-      </p:sp>
-      <p:sp>
-        <p:nvSpPr>
-          <p:cNvPr id="5" name="TextBox 4"/>
-          <p:cNvSpPr txBox="1"/>
-          <p:nvPr/>
-        </p:nvSpPr>
-        <p:spPr>
-          <a:xfrm>
-            <a:off x="10637215" y="6446520"/>
-            <a:ext cx="914400" cy="274320"/>
-          </a:xfrm>
-          <a:prstGeom prst="rect">
-            <a:avLst/>
-          </a:prstGeom>
-          <a:noFill/>
-        </p:spPr>
-        <p:txBody>
-          <a:bodyPr wrap="square" lIns="45720" rIns="45720">
-            <a:spAutoFit/>
-          </a:bodyPr>
-          <a:lstStyle/>
-          <a:p>
-            <a:pPr algn="r"/>
-            <a:r>
-              <a:rPr sz="1000" b="0">
-                <a:solidFill>
-                  <a:srgbClr val="5B6770"/>
-                </a:solidFill>
-              </a:rPr>
-              <a:t>70</a:t>
-            </a:r>
-          </a:p>
-        </p:txBody>
-      </p:sp>
-      <p:sp>
-        <p:nvSpPr>
-          <p:cNvPr id="6" name="TextBox 5"/>
-          <p:cNvSpPr txBox="1"/>
-          <p:nvPr/>
-        </p:nvSpPr>
-        <p:spPr>
-          <a:xfrm>
-            <a:off x="640080" y="548640"/>
-            <a:ext cx="10911535" cy="731520"/>
-          </a:xfrm>
-          <a:prstGeom prst="rect">
-            <a:avLst/>
-          </a:prstGeom>
-          <a:noFill/>
-        </p:spPr>
-        <p:txBody>
-          <a:bodyPr wrap="square" lIns="45720" rIns="45720" anchor="ctr">
-            <a:spAutoFit/>
-          </a:bodyPr>
-          <a:lstStyle/>
-          <a:p>
-            <a:r>
-              <a:rPr sz="3000" b="1">
-                <a:solidFill>
-                  <a:srgbClr val="006D77"/>
-                </a:solidFill>
-              </a:rPr>
-              <a:t>Demo 06 — TOCTOU yarışı (CWE-367)</a:t>
-            </a:r>
-          </a:p>
-        </p:txBody>
-      </p:sp>
-      <p:sp>
-        <p:nvSpPr>
-          <p:cNvPr id="7" name="TextBox 6"/>
-          <p:cNvSpPr txBox="1"/>
-          <p:nvPr/>
-        </p:nvSpPr>
-        <p:spPr>
-          <a:xfrm>
-            <a:off x="640080" y="1325880"/>
-            <a:ext cx="10911535" cy="439928"/>
-          </a:xfrm>
-          <a:prstGeom prst="rect">
-            <a:avLst/>
-          </a:prstGeom>
-          <a:noFill/>
-        </p:spPr>
-        <p:txBody>
-          <a:bodyPr wrap="square" lIns="45720" rIns="45720">
-            <a:spAutoFit/>
-          </a:bodyPr>
-          <a:lstStyle/>
-          <a:p>
-            <a:pPr algn="l"/>
-            <a:r>
-              <a:rPr sz="2000" b="0">
-                <a:solidFill>
-                  <a:srgbClr val="A1123F"/>
-                </a:solidFill>
-                <a:latin typeface="Consolas"/>
-              </a:rPr>
-              <a:t>code/week-02/06-toctou</a:t>
-            </a:r>
-            <a:r>
-              <a:rPr sz="2000" b="0">
-                <a:solidFill>
-                  <a:srgbClr val="1F2D3A"/>
-                </a:solidFill>
-              </a:rPr>
-              <a:t> (yalnız WSL/Linux) · Kitap: Tarif 2.3</a:t>
-            </a:r>
-          </a:p>
-        </p:txBody>
-      </p:sp>
-      <p:sp>
-        <p:nvSpPr>
-          <p:cNvPr id="8" name="Rectangle 7"/>
-          <p:cNvSpPr/>
-          <p:nvPr/>
-        </p:nvSpPr>
-        <p:spPr>
-          <a:xfrm>
-            <a:off x="640080" y="1875536"/>
-            <a:ext cx="10911535" cy="1030224"/>
-          </a:xfrm>
-          <a:prstGeom prst="rect">
-            <a:avLst/>
-          </a:prstGeom>
-          <a:solidFill>
-            <a:srgbClr val="F3F4F6"/>
-          </a:solidFill>
-          <a:ln>
-            <a:solidFill>
-              <a:srgbClr val="D9DEE3"/>
-            </a:solidFill>
-          </a:ln>
-        </p:spPr>
-        <p:style>
-          <a:lnRef idx="1">
-            <a:schemeClr val="accent1"/>
-          </a:lnRef>
-          <a:fillRef idx="3">
-            <a:schemeClr val="accent1"/>
-          </a:fillRef>
-          <a:effectRef idx="2">
-            <a:schemeClr val="accent1"/>
-          </a:effectRef>
-          <a:fontRef idx="minor">
-            <a:schemeClr val="lt1"/>
-          </a:fontRef>
-        </p:style>
-        <p:txBody>
-          <a:bodyPr rtlCol="0" anchor="t" wrap="none" lIns="137160" rIns="137160" tIns="91440" bIns="91440"/>
-          <a:lstStyle/>
-          <a:p>
-            <a:pPr algn="l"/>
-            <a:r>
-              <a:rPr sz="1240">
-                <a:solidFill>
-                  <a:srgbClr val="1F2D3A"/>
-                </a:solidFill>
-                <a:latin typeface="Consolas"/>
-              </a:rPr>
-              <a:t>GUVENSIZ (once lstat, sonra fopen):</a:t>
-            </a:r>
-          </a:p>
-          <a:p>
-            <a:pPr algn="l"/>
-            <a:r>
-              <a:rPr sz="1240">
-                <a:solidFill>
-                  <a:srgbClr val="1F2D3A"/>
-                </a:solidFill>
-                <a:latin typeface="Consolas"/>
-              </a:rPr>
-              <a:t>  &gt;&gt;&gt; SALDIRI BASARILI: yazi gizli_hedef.txt'e yonlendirildi!</a:t>
-            </a:r>
-          </a:p>
-          <a:p>
-            <a:pPr algn="l"/>
-            <a:r>
-              <a:rPr sz="1240">
-                <a:solidFill>
-                  <a:srgbClr val="1F2D3A"/>
-                </a:solidFill>
-                <a:latin typeface="Consolas"/>
-              </a:rPr>
-              <a:t>GUVENLI (O_NOFOLLOW ile tek adim):</a:t>
-            </a:r>
-          </a:p>
-          <a:p>
-            <a:pPr algn="l"/>
-            <a:r>
-              <a:rPr sz="1240">
-                <a:solidFill>
-                  <a:srgbClr val="1F2D3A"/>
-                </a:solidFill>
-                <a:latin typeface="Consolas"/>
-              </a:rPr>
-              <a:t>  reddedildi: hedef sembolik bag</a:t>
-            </a:r>
-          </a:p>
-        </p:txBody>
-      </p:sp>
-      <p:sp>
-        <p:nvSpPr>
-          <p:cNvPr id="9" name="TextBox 8"/>
-          <p:cNvSpPr txBox="1"/>
-          <p:nvPr/>
-        </p:nvSpPr>
-        <p:spPr>
-          <a:xfrm>
-            <a:off x="640080" y="3015488"/>
-            <a:ext cx="10911535" cy="770128"/>
-          </a:xfrm>
-          <a:prstGeom prst="rect">
-            <a:avLst/>
-          </a:prstGeom>
-          <a:noFill/>
-        </p:spPr>
-        <p:txBody>
-          <a:bodyPr wrap="square" lIns="45720" rIns="45720">
-            <a:spAutoFit/>
-          </a:bodyPr>
-          <a:lstStyle/>
-          <a:p>
-            <a:pPr algn="l"/>
-            <a:r>
-              <a:rPr sz="2000" b="1">
-                <a:solidFill>
-                  <a:srgbClr val="1F2D3A"/>
-                </a:solidFill>
-              </a:rPr>
-              <a:t>Denetim ile kullanım arasındaki boşluk</a:t>
-            </a:r>
-            <a:r>
-              <a:rPr sz="2000" b="0">
-                <a:solidFill>
-                  <a:srgbClr val="1F2D3A"/>
-                </a:solidFill>
-              </a:rPr>
-              <a:t> bir yarıştır. Çözüm: tek atomik adım (</a:t>
-            </a:r>
-            <a:r>
-              <a:rPr sz="2000" b="0">
-                <a:solidFill>
-                  <a:srgbClr val="A1123F"/>
-                </a:solidFill>
-                <a:latin typeface="Consolas"/>
-              </a:rPr>
-              <a:t>O_NOFOLLOW</a:t>
-            </a:r>
-            <a:r>
-              <a:rPr sz="2000" b="0">
-                <a:solidFill>
-                  <a:srgbClr val="1F2D3A"/>
-                </a:solidFill>
-              </a:rPr>
-              <a:t>, </a:t>
-            </a:r>
-            <a:r>
-              <a:rPr sz="2000" b="0">
-                <a:solidFill>
-                  <a:srgbClr val="A1123F"/>
-                </a:solidFill>
-                <a:latin typeface="Consolas"/>
-              </a:rPr>
-              <a:t>O_EXCL</a:t>
-            </a:r>
-            <a:r>
-              <a:rPr sz="2000" b="0">
-                <a:solidFill>
-                  <a:srgbClr val="1F2D3A"/>
-                </a:solidFill>
-              </a:rPr>
-              <a:t>), fd üzerinden çalış.</a:t>
-            </a:r>
-          </a:p>
-        </p:txBody>
-      </p:sp>
-    </p:spTree>
-  </p:cSld>
-  <p:clrMapOvr>
-    <a:masterClrMapping/>
-  </p:clrMapOvr>
-</p:sld>
-</file>
-
 <file path=ppt/slides/slide71.xml><?xml version="1.0" encoding="utf-8"?>
 <p:sld xmlns:a="http://schemas.openxmlformats.org/drawingml/2006/main" xmlns:p="http://schemas.openxmlformats.org/presentationml/2006/main" xmlns:r="http://schemas.openxmlformats.org/officeDocument/2006/relationships">
   <p:cSld>
@@ -34079,12 +34146,12 @@
           <a:lstStyle/>
           <a:p>
             <a:r>
-              <a:rPr sz="2600" b="1">
+              <a:rPr sz="3000" b="1">
                 <a:solidFill>
                   <a:srgbClr val="006D77"/>
                 </a:solidFill>
               </a:rPr>
-              <a:t>Demo 12 — ACE değerlendirme algoritması</a:t>
+              <a:t>Demo 06 — TOCTOU yarışı (CWE-367)</a:t>
             </a:r>
           </a:p>
         </p:txBody>
@@ -34098,7 +34165,7 @@
         <p:spPr>
           <a:xfrm>
             <a:off x="640080" y="1325880"/>
-            <a:ext cx="10911535" cy="406908"/>
+            <a:ext cx="10911535" cy="439928"/>
           </a:xfrm>
           <a:prstGeom prst="rect">
             <a:avLst/>
@@ -34113,21 +34180,21 @@
           <a:p>
             <a:pPr algn="l"/>
             <a:r>
-              <a:rPr sz="1800" b="0">
+              <a:rPr sz="2000" b="0">
                 <a:solidFill>
                   <a:srgbClr val="A1123F"/>
                 </a:solidFill>
                 <a:latin typeface="Consolas"/>
               </a:rPr>
-              <a:t>code/week-02/12-ace-degerlendirme</a:t>
-            </a:r>
-            <a:r>
-              <a:rPr sz="1800" b="0">
-                <a:solidFill>
-                  <a:srgbClr val="1F2D3A"/>
-                </a:solidFill>
-              </a:rPr>
-              <a:t> · Tarif 2.2</a:t>
+              <a:t>code/week-02/06-toctou</a:t>
+            </a:r>
+            <a:r>
+              <a:rPr sz="2000" b="0">
+                <a:solidFill>
+                  <a:srgbClr val="1F2D3A"/>
+                </a:solidFill>
+              </a:rPr>
+              <a:t> (yalnız WSL/Linux) · Kitap: Tarif 2.3</a:t>
             </a:r>
           </a:p>
         </p:txBody>
@@ -34140,8 +34207,8 @@
         </p:nvSpPr>
         <p:spPr>
           <a:xfrm>
-            <a:off x="640080" y="1842515"/>
-            <a:ext cx="10911535" cy="1124712"/>
+            <a:off x="640080" y="1875536"/>
+            <a:ext cx="10911535" cy="1030224"/>
           </a:xfrm>
           <a:prstGeom prst="rect">
             <a:avLst/>
@@ -34175,177 +34242,125 @@
           <a:p>
             <a:pPr algn="l"/>
             <a:r>
-              <a:rPr sz="1116">
+              <a:rPr sz="1240">
                 <a:solidFill>
                   <a:srgbClr val="1F2D3A"/>
                 </a:solidFill>
                 <a:latin typeface="Consolas"/>
               </a:rPr>
-              <a:t>1a kanonik:  RET Herkes TAM | IZIN Pazarlama YAZ  =&gt; RED</a:t>
+              <a:t>GUVENSIZ (once lstat, sonra fopen):</a:t>
             </a:r>
           </a:p>
           <a:p>
             <a:pPr algn="l"/>
             <a:r>
-              <a:rPr sz="1116">
+              <a:rPr sz="1240">
                 <a:solidFill>
                   <a:srgbClr val="1F2D3A"/>
                 </a:solidFill>
                 <a:latin typeface="Consolas"/>
               </a:rPr>
-              <a:t>1b bozuk:    IZIN Pazarlama YAZ | ... RET Herkes  =&gt; IZIN</a:t>
+              <a:t>  &gt;&gt;&gt; SALDIRI BASARILI: yazi gizli_hedef.txt'e yonlendirildi!</a:t>
             </a:r>
           </a:p>
           <a:p>
             <a:pPr algn="l"/>
             <a:r>
-              <a:rPr sz="1116">
+              <a:rPr sz="1240">
                 <a:solidFill>
                   <a:srgbClr val="1F2D3A"/>
                 </a:solidFill>
                 <a:latin typeface="Consolas"/>
               </a:rPr>
-              <a:t>2a NULL DACL (yabanci hesap) =&gt; IZIN (SAHIP_AL, IZIN_YAZ dahil!)</a:t>
+              <a:t>GUVENLI (O_NOFOLLOW ile tek adim):</a:t>
             </a:r>
           </a:p>
           <a:p>
             <a:pPr algn="l"/>
             <a:r>
-              <a:rPr sz="1116">
+              <a:rPr sz="1240">
                 <a:solidFill>
                   <a:srgbClr val="1F2D3A"/>
                 </a:solidFill>
                 <a:latin typeface="Consolas"/>
               </a:rPr>
-              <a:t>2b BOS DACL  (ayni hesap)    =&gt; RED</a:t>
-            </a:r>
-          </a:p>
+              <a:t>  reddedildi: hedef sembolik bag</a:t>
+            </a:r>
+          </a:p>
+        </p:txBody>
+      </p:sp>
+      <p:sp>
+        <p:nvSpPr>
+          <p:cNvPr id="9" name="TextBox 8"/>
+          <p:cNvSpPr txBox="1"/>
+          <p:nvPr/>
+        </p:nvSpPr>
+        <p:spPr>
+          <a:xfrm>
+            <a:off x="640080" y="3015488"/>
+            <a:ext cx="10911535" cy="770128"/>
+          </a:xfrm>
+          <a:prstGeom prst="rect">
+            <a:avLst/>
+          </a:prstGeom>
+          <a:noFill/>
+        </p:spPr>
+        <p:txBody>
+          <a:bodyPr wrap="square" lIns="45720" rIns="45720">
+            <a:spAutoFit/>
+          </a:bodyPr>
+          <a:lstStyle/>
           <a:p>
             <a:pPr algn="l"/>
             <a:r>
-              <a:rPr sz="1116">
-                <a:solidFill>
-                  <a:srgbClr val="1F2D3A"/>
+              <a:rPr sz="2000" b="1">
+                <a:solidFill>
+                  <a:srgbClr val="1F2D3A"/>
+                </a:solidFill>
+              </a:rPr>
+              <a:t>Denetim ile kullanım arasındaki boşluk</a:t>
+            </a:r>
+            <a:r>
+              <a:rPr sz="2000" b="0">
+                <a:solidFill>
+                  <a:srgbClr val="1F2D3A"/>
+                </a:solidFill>
+              </a:rPr>
+              <a:t> bir yarıştır. Çözüm: tek atomik adım (</a:t>
+            </a:r>
+            <a:r>
+              <a:rPr sz="2000" b="0">
+                <a:solidFill>
+                  <a:srgbClr val="A1123F"/>
                 </a:solidFill>
                 <a:latin typeface="Consolas"/>
               </a:rPr>
-              <a:t>3b kalitim kesildi           =&gt; RED (liste bitti)</a:t>
-            </a:r>
-          </a:p>
-        </p:txBody>
-      </p:sp>
-      <p:sp>
-        <p:nvSpPr>
-          <p:cNvPr id="9" name="TextBox 8"/>
-          <p:cNvSpPr txBox="1"/>
-          <p:nvPr/>
-        </p:nvSpPr>
-        <p:spPr>
-          <a:xfrm>
-            <a:off x="640080" y="3076955"/>
-            <a:ext cx="10911535" cy="1120140"/>
-          </a:xfrm>
-          <a:prstGeom prst="rect">
-            <a:avLst/>
-          </a:prstGeom>
-          <a:noFill/>
-        </p:spPr>
-        <p:txBody>
-          <a:bodyPr wrap="square" lIns="45720" rIns="45720">
-            <a:spAutoFit/>
-          </a:bodyPr>
-          <a:lstStyle/>
-          <a:p>
-            <a:pPr>
-              <a:spcAft>
-                <a:spcPts val="300"/>
-              </a:spcAft>
-            </a:pPr>
-            <a:r>
-              <a:rPr sz="1800" b="1">
-                <a:solidFill>
-                  <a:srgbClr val="006D77"/>
-                </a:solidFill>
-              </a:rPr>
-              <a:t>• </a:t>
-            </a:r>
-            <a:r>
-              <a:rPr sz="1800" b="0">
-                <a:solidFill>
-                  <a:srgbClr val="1F2D3A"/>
-                </a:solidFill>
-              </a:rPr>
-              <a:t>Sıra önemli: </a:t>
-            </a:r>
-            <a:r>
-              <a:rPr sz="1800" b="1">
-                <a:solidFill>
-                  <a:srgbClr val="1F2D3A"/>
-                </a:solidFill>
-              </a:rPr>
-              <a:t>açık RET → açık İZİN → miras RET → miras İZİN</a:t>
-            </a:r>
-          </a:p>
-          <a:p>
-            <a:pPr>
-              <a:spcAft>
-                <a:spcPts val="300"/>
-              </a:spcAft>
-            </a:pPr>
-            <a:r>
-              <a:rPr sz="1800" b="1">
-                <a:solidFill>
-                  <a:srgbClr val="006D77"/>
-                </a:solidFill>
-              </a:rPr>
-              <a:t>• </a:t>
-            </a:r>
-            <a:r>
-              <a:rPr sz="1800" b="0">
-                <a:solidFill>
-                  <a:srgbClr val="1F2D3A"/>
-                </a:solidFill>
-              </a:rPr>
-              <a:t>❌ NULL DACL = herkese </a:t>
-            </a:r>
-            <a:r>
-              <a:rPr sz="1800" b="1">
-                <a:solidFill>
-                  <a:srgbClr val="1F2D3A"/>
-                </a:solidFill>
-              </a:rPr>
-              <a:t>her</a:t>
-            </a:r>
-            <a:r>
-              <a:rPr sz="1800" b="0">
-                <a:solidFill>
-                  <a:srgbClr val="1F2D3A"/>
-                </a:solidFill>
-              </a:rPr>
-              <a:t> hak · ✅ gerekli hakları açıkça ver</a:t>
-            </a:r>
-          </a:p>
-          <a:p>
-            <a:pPr>
-              <a:spcAft>
-                <a:spcPts val="300"/>
-              </a:spcAft>
-            </a:pPr>
-            <a:r>
-              <a:rPr sz="1800" b="1">
-                <a:solidFill>
-                  <a:srgbClr val="006D77"/>
-                </a:solidFill>
-              </a:rPr>
-              <a:t>• </a:t>
-            </a:r>
-            <a:r>
-              <a:rPr sz="1800" b="0">
-                <a:solidFill>
-                  <a:srgbClr val="1F2D3A"/>
-                </a:solidFill>
-              </a:rPr>
-              <a:t>Sahip, DACL ne derse desin izinleri değiştirebilir</a:t>
+              <a:t>O_NOFOLLOW</a:t>
+            </a:r>
+            <a:r>
+              <a:rPr sz="2000" b="0">
+                <a:solidFill>
+                  <a:srgbClr val="1F2D3A"/>
+                </a:solidFill>
+              </a:rPr>
+              <a:t>, </a:t>
+            </a:r>
+            <a:r>
+              <a:rPr sz="2000" b="0">
+                <a:solidFill>
+                  <a:srgbClr val="A1123F"/>
+                </a:solidFill>
+                <a:latin typeface="Consolas"/>
+              </a:rPr>
+              <a:t>O_EXCL</a:t>
+            </a:r>
+            <a:r>
+              <a:rPr sz="2000" b="0">
+                <a:solidFill>
+                  <a:srgbClr val="1F2D3A"/>
+                </a:solidFill>
+              </a:rPr>
+              <a:t>), fd üzerinden çalış.</a:t>
             </a:r>
           </a:p>
         </p:txBody>
@@ -34520,7 +34535,7 @@
                   <a:srgbClr val="006D77"/>
                 </a:solidFill>
               </a:rPr>
-              <a:t>Demo 13 — Unix izinleri, umask, setuid</a:t>
+              <a:t>Demo 12 — ACE değerlendirme algoritması</a:t>
             </a:r>
           </a:p>
         </p:txBody>
@@ -34555,7 +34570,7 @@
                 </a:solidFill>
                 <a:latin typeface="Consolas"/>
               </a:rPr>
-              <a:t>code/week-02/13-unix-izin-umask</a:t>
+              <a:t>code/week-02/12-ace-degerlendirme</a:t>
             </a:r>
             <a:r>
               <a:rPr sz="1800" b="0">
@@ -34563,7 +34578,7 @@
                   <a:srgbClr val="1F2D3A"/>
                 </a:solidFill>
               </a:rPr>
-              <a:t> · Tarif 2.1, 2.7, 1.3</a:t>
+              <a:t> · Tarif 2.2</a:t>
             </a:r>
           </a:p>
         </p:txBody>
@@ -34577,7 +34592,7 @@
         <p:spPr>
           <a:xfrm>
             <a:off x="640080" y="1842515"/>
-            <a:ext cx="10911535" cy="954633"/>
+            <a:ext cx="10911535" cy="1124712"/>
           </a:xfrm>
           <a:prstGeom prst="rect">
             <a:avLst/>
@@ -34617,7 +34632,7 @@
                 </a:solidFill>
                 <a:latin typeface="Consolas"/>
               </a:rPr>
-              <a:t>ayse   oku paradoks.txt ---rwxrwx  sahip -&gt; RED</a:t>
+              <a:t>1a kanonik:  RET Herkes TAM | IZIN Pazarlama YAZ  =&gt; RED</a:t>
             </a:r>
           </a:p>
           <a:p>
@@ -34629,7 +34644,7 @@
                 </a:solidFill>
                 <a:latin typeface="Consolas"/>
               </a:rPr>
-              <a:t>zeynep oku paradoks.txt ---rwxrwx  diger -&gt; IZIN</a:t>
+              <a:t>1b bozuk:    IZIN Pazarlama YAZ | ... RET Herkes  =&gt; IZIN</a:t>
             </a:r>
           </a:p>
           <a:p>
@@ -34641,7 +34656,7 @@
                 </a:solidFill>
                 <a:latin typeface="Consolas"/>
               </a:rPr>
-              <a:t>0666 &amp; ~umask:  000 -&gt; rw-rw-rw-   022 -&gt; rw-r--r--   077 -&gt; rw-------</a:t>
+              <a:t>2a NULL DACL (yabanci hesap) =&gt; IZIN (SAHIP_AL, IZIN_YAZ dahil!)</a:t>
             </a:r>
           </a:p>
           <a:p>
@@ -34653,7 +34668,19 @@
                 </a:solidFill>
                 <a:latin typeface="Consolas"/>
               </a:rPr>
-              <a:t>seteuid(1001)  r/e/s = 1001/1001/0   &lt;- sakli UID hala 0!</a:t>
+              <a:t>2b BOS DACL  (ayni hesap)    =&gt; RED</a:t>
+            </a:r>
+          </a:p>
+          <a:p>
+            <a:pPr algn="l"/>
+            <a:r>
+              <a:rPr sz="1116">
+                <a:solidFill>
+                  <a:srgbClr val="1F2D3A"/>
+                </a:solidFill>
+                <a:latin typeface="Consolas"/>
+              </a:rPr>
+              <a:t>3b kalitim kesildi           =&gt; RED (liste bitti)</a:t>
             </a:r>
           </a:p>
         </p:txBody>
@@ -34666,7 +34693,7 @@
         </p:nvSpPr>
         <p:spPr>
           <a:xfrm>
-            <a:off x="640080" y="2906876"/>
+            <a:off x="640080" y="3076955"/>
             <a:ext cx="10911535" cy="1120140"/>
           </a:xfrm>
           <a:prstGeom prst="rect">
@@ -34694,20 +34721,20 @@
               <a:t>• </a:t>
             </a:r>
             <a:r>
+              <a:rPr sz="1800" b="0">
+                <a:solidFill>
+                  <a:srgbClr val="1F2D3A"/>
+                </a:solidFill>
+              </a:rPr>
+              <a:t>Sıra önemli: </a:t>
+            </a:r>
+            <a:r>
               <a:rPr sz="1800" b="1">
                 <a:solidFill>
                   <a:srgbClr val="1F2D3A"/>
                 </a:solidFill>
               </a:rPr>
-              <a:t>İlk eşleşen sınıf</a:t>
-            </a:r>
-            <a:r>
-              <a:rPr sz="1800" b="0">
-                <a:solidFill>
-                  <a:srgbClr val="1F2D3A"/>
-                </a:solidFill>
-              </a:rPr>
-              <a:t> karar verir (sahip → grup → diğerleri)</a:t>
+              <a:t>açık RET → açık İZİN → miras RET → miras İZİN</a:t>
             </a:r>
           </a:p>
           <a:p>
@@ -34727,11 +34754,18 @@
             <a:r>
               <a:rPr sz="1800" b="0">
                 <a:solidFill>
-                  <a:srgbClr val="A1123F"/>
-                </a:solidFill>
-                <a:latin typeface="Consolas"/>
-              </a:rPr>
-              <a:t>fopen()</a:t>
+                  <a:srgbClr val="1F2D3A"/>
+                </a:solidFill>
+              </a:rPr>
+              <a:t>❌ NULL DACL = herkese </a:t>
+            </a:r>
+            <a:r>
+              <a:rPr sz="1800" b="1">
+                <a:solidFill>
+                  <a:srgbClr val="1F2D3A"/>
+                </a:solidFill>
+              </a:rPr>
+              <a:t>her</a:t>
             </a:r>
             <a:r>
               <a:rPr sz="1800" b="0">
@@ -34739,16 +34773,7 @@
                   <a:srgbClr val="1F2D3A"/>
                 </a:solidFill>
               </a:rPr>
-              <a:t> 0666 ister → hassas dosya: </a:t>
-            </a:r>
-            <a:r>
-              <a:rPr sz="1800" b="0">
-                <a:solidFill>
-                  <a:srgbClr val="A1123F"/>
-                </a:solidFill>
-                <a:latin typeface="Consolas"/>
-              </a:rPr>
-              <a:t>open(..., 0600)</a:t>
+              <a:t> hak · ✅ gerekli hakları açıkça ver</a:t>
             </a:r>
           </a:p>
           <a:p>
@@ -34771,24 +34796,7 @@
                   <a:srgbClr val="1F2D3A"/>
                 </a:solidFill>
               </a:rPr>
-              <a:t>Kalıcı bırakma: </a:t>
-            </a:r>
-            <a:r>
-              <a:rPr sz="1800" b="0">
-                <a:solidFill>
-                  <a:srgbClr val="A1123F"/>
-                </a:solidFill>
-                <a:latin typeface="Consolas"/>
-              </a:rPr>
-              <a:t>setresuid()</a:t>
-            </a:r>
-            <a:r>
-              <a:rPr sz="1800" b="0">
-                <a:solidFill>
-                  <a:srgbClr val="1F2D3A"/>
-                </a:solidFill>
-              </a:rPr>
-              <a:t> + doğrula</a:t>
+              <a:t>Sahip, DACL ne derse desin izinleri değiştirebilir</a:t>
             </a:r>
           </a:p>
         </p:txBody>
@@ -34963,7 +34971,7 @@
                   <a:srgbClr val="006D77"/>
                 </a:solidFill>
               </a:rPr>
-              <a:t>Demo 14 — RBAC, görev ayrılığı, Clark–Wilson</a:t>
+              <a:t>Demo 13 — Unix izinleri, umask, setuid</a:t>
             </a:r>
           </a:p>
         </p:txBody>
@@ -34998,7 +35006,7 @@
                 </a:solidFill>
                 <a:latin typeface="Consolas"/>
               </a:rPr>
-              <a:t>code/week-02/14-rbac-clark-wilson</a:t>
+              <a:t>code/week-02/13-unix-izin-umask</a:t>
             </a:r>
             <a:r>
               <a:rPr sz="1800" b="0">
@@ -35006,7 +35014,7 @@
                   <a:srgbClr val="1F2D3A"/>
                 </a:solidFill>
               </a:rPr>
-              <a:t> · banka benzetimi</a:t>
+              <a:t> · Tarif 2.1, 2.7, 1.3</a:t>
             </a:r>
           </a:p>
         </p:txBody>
@@ -35060,7 +35068,7 @@
                 </a:solidFill>
                 <a:latin typeface="Consolas"/>
               </a:rPr>
-              <a:t>ATA cem GISE                 SSD(GISE,ONAYCI)  -&gt; RED</a:t>
+              <a:t>ayse   oku paradoks.txt ---rwxrwx  sahip -&gt; RED</a:t>
             </a:r>
           </a:p>
           <a:p>
@@ -35072,7 +35080,7 @@
                 </a:solidFill>
                 <a:latin typeface="Consolas"/>
               </a:rPr>
-              <a:t>OTURUM deniz GISE,DENETCI    DSD(GISE,DENETCI) -&gt; RED</a:t>
+              <a:t>zeynep oku paradoks.txt ---rwxrwx  diger -&gt; IZIN</a:t>
             </a:r>
           </a:p>
           <a:p>
@@ -35084,7 +35092,7 @@
                 </a:solidFill>
                 <a:latin typeface="Consolas"/>
               </a:rPr>
-              <a:t>OTURUM deniz DENETCI         -&gt; TAMAM</a:t>
+              <a:t>0666 &amp; ~umask:  000 -&gt; rw-rw-rw-   022 -&gt; rw-r--r--   077 -&gt; rw-------</a:t>
             </a:r>
           </a:p>
           <a:p>
@@ -35096,7 +35104,7 @@
                 </a:solidFill>
                 <a:latin typeface="Consolas"/>
               </a:rPr>
-              <a:t>deniz IVP: beklenen 20250, bulunan 20250</a:t>
+              <a:t>seteuid(1001)  r/e/s = 1001/1001/0   &lt;- sakli UID hala 0!</a:t>
             </a:r>
           </a:p>
         </p:txBody>
@@ -35142,7 +35150,7 @@
                   <a:srgbClr val="1F2D3A"/>
                 </a:solidFill>
               </a:rPr>
-              <a:t>SSD:</a:t>
+              <a:t>İlk eşleşen sınıf</a:t>
             </a:r>
             <a:r>
               <a:rPr sz="1800" b="0">
@@ -35150,23 +35158,7 @@
                   <a:srgbClr val="1F2D3A"/>
                 </a:solidFill>
               </a:rPr>
-              <a:t> çelişen iki role atanamaz · </a:t>
-            </a:r>
-            <a:r>
-              <a:rPr sz="1800" b="1">
-                <a:solidFill>
-                  <a:srgbClr val="1F2D3A"/>
-                </a:solidFill>
-              </a:rPr>
-              <a:t>DSD:</a:t>
-            </a:r>
-            <a:r>
-              <a:rPr sz="1800" b="0">
-                <a:solidFill>
-                  <a:srgbClr val="1F2D3A"/>
-                </a:solidFill>
-              </a:rPr>
-              <a:t> aynı oturumda ikisi etkin olamaz</a:t>
+              <a:t> karar verir (sahip → grup → diğerleri)</a:t>
             </a:r>
           </a:p>
           <a:p>
@@ -35186,18 +35178,11 @@
             <a:r>
               <a:rPr sz="1800" b="0">
                 <a:solidFill>
-                  <a:srgbClr val="1F2D3A"/>
-                </a:solidFill>
-              </a:rPr>
-              <a:t>CDI'ya yalnız </a:t>
-            </a:r>
-            <a:r>
-              <a:rPr sz="1800" b="1">
-                <a:solidFill>
-                  <a:srgbClr val="1F2D3A"/>
-                </a:solidFill>
-              </a:rPr>
-              <a:t>sertifikalı TP</a:t>
+                  <a:srgbClr val="A1123F"/>
+                </a:solidFill>
+                <a:latin typeface="Consolas"/>
+              </a:rPr>
+              <a:t>fopen()</a:t>
             </a:r>
             <a:r>
               <a:rPr sz="1800" b="0">
@@ -35205,15 +35190,16 @@
                   <a:srgbClr val="1F2D3A"/>
                 </a:solidFill>
               </a:rPr>
-              <a:t> dokunur; büyük havale → </a:t>
-            </a:r>
-            <a:r>
-              <a:rPr sz="1800" b="1">
-                <a:solidFill>
-                  <a:srgbClr val="1F2D3A"/>
-                </a:solidFill>
-              </a:rPr>
-              <a:t>ikinci kişi onayı</a:t>
+              <a:t> 0666 ister → hassas dosya: </a:t>
+            </a:r>
+            <a:r>
+              <a:rPr sz="1800" b="0">
+                <a:solidFill>
+                  <a:srgbClr val="A1123F"/>
+                </a:solidFill>
+                <a:latin typeface="Consolas"/>
+              </a:rPr>
+              <a:t>open(..., 0600)</a:t>
             </a:r>
           </a:p>
           <a:p>
@@ -35236,15 +35222,24 @@
                   <a:srgbClr val="1F2D3A"/>
                 </a:solidFill>
               </a:rPr>
-              <a:t>⚠️ Hatalı TP sertifikalanırsa kurallar görmez, </a:t>
-            </a:r>
-            <a:r>
-              <a:rPr sz="1800" b="1">
-                <a:solidFill>
-                  <a:srgbClr val="1F2D3A"/>
-                </a:solidFill>
-              </a:rPr>
-              <a:t>IVP yakalar</a:t>
+              <a:t>Kalıcı bırakma: </a:t>
+            </a:r>
+            <a:r>
+              <a:rPr sz="1800" b="0">
+                <a:solidFill>
+                  <a:srgbClr val="A1123F"/>
+                </a:solidFill>
+                <a:latin typeface="Consolas"/>
+              </a:rPr>
+              <a:t>setresuid()</a:t>
+            </a:r>
+            <a:r>
+              <a:rPr sz="1800" b="0">
+                <a:solidFill>
+                  <a:srgbClr val="1F2D3A"/>
+                </a:solidFill>
+              </a:rPr>
+              <a:t> + doğrula</a:t>
             </a:r>
           </a:p>
         </p:txBody>
@@ -35258,6 +35253,462 @@
 </file>
 
 <file path=ppt/slides/slide74.xml><?xml version="1.0" encoding="utf-8"?>
+<p:sld xmlns:a="http://schemas.openxmlformats.org/drawingml/2006/main" xmlns:p="http://schemas.openxmlformats.org/presentationml/2006/main" xmlns:r="http://schemas.openxmlformats.org/officeDocument/2006/relationships">
+  <p:cSld>
+    <p:spTree>
+      <p:nvGrpSpPr>
+        <p:cNvPr id="1" name=""/>
+        <p:cNvGrpSpPr/>
+        <p:nvPr/>
+      </p:nvGrpSpPr>
+      <p:grpSpPr/>
+      <p:pic>
+        <p:nvPicPr>
+          <p:cNvPr id="2" name="Picture 1" descr="rteu_logo_kucuk.jpg"/>
+          <p:cNvPicPr>
+            <a:picLocks noChangeAspect="1"/>
+          </p:cNvPicPr>
+          <p:nvPr/>
+        </p:nvPicPr>
+        <p:blipFill>
+          <a:blip r:embed="rId2"/>
+          <a:stretch>
+            <a:fillRect/>
+          </a:stretch>
+        </p:blipFill>
+        <p:spPr>
+          <a:xfrm>
+            <a:off x="640080" y="164592"/>
+            <a:ext cx="242773" cy="329184"/>
+          </a:xfrm>
+          <a:prstGeom prst="rect">
+            <a:avLst/>
+          </a:prstGeom>
+        </p:spPr>
+      </p:pic>
+      <p:sp>
+        <p:nvSpPr>
+          <p:cNvPr id="3" name="TextBox 2"/>
+          <p:cNvSpPr txBox="1"/>
+          <p:nvPr/>
+        </p:nvSpPr>
+        <p:spPr>
+          <a:xfrm>
+            <a:off x="1051560" y="182880"/>
+            <a:ext cx="7315200" cy="320040"/>
+          </a:xfrm>
+          <a:prstGeom prst="rect">
+            <a:avLst/>
+          </a:prstGeom>
+          <a:noFill/>
+        </p:spPr>
+        <p:txBody>
+          <a:bodyPr wrap="square" lIns="45720" rIns="45720">
+            <a:spAutoFit/>
+          </a:bodyPr>
+          <a:lstStyle/>
+          <a:p>
+            <a:r>
+              <a:rPr sz="1100" b="0">
+                <a:solidFill>
+                  <a:srgbClr val="5B6770"/>
+                </a:solidFill>
+              </a:rPr>
+              <a:t>CEN429 Güvenli Programlama · Hafta 2</a:t>
+            </a:r>
+          </a:p>
+        </p:txBody>
+      </p:sp>
+      <p:sp>
+        <p:nvSpPr>
+          <p:cNvPr id="4" name="TextBox 3"/>
+          <p:cNvSpPr txBox="1"/>
+          <p:nvPr/>
+        </p:nvSpPr>
+        <p:spPr>
+          <a:xfrm>
+            <a:off x="640080" y="6446520"/>
+            <a:ext cx="7315200" cy="274320"/>
+          </a:xfrm>
+          <a:prstGeom prst="rect">
+            <a:avLst/>
+          </a:prstGeom>
+          <a:noFill/>
+        </p:spPr>
+        <p:txBody>
+          <a:bodyPr wrap="square" lIns="45720" rIns="45720">
+            <a:spAutoFit/>
+          </a:bodyPr>
+          <a:lstStyle/>
+          <a:p>
+            <a:r>
+              <a:rPr sz="1000" b="0">
+                <a:solidFill>
+                  <a:srgbClr val="5B6770"/>
+                </a:solidFill>
+              </a:rPr>
+              <a:t>RTEÜ Bilgisayar Mühendisliği · 2026-2027 Güz</a:t>
+            </a:r>
+          </a:p>
+        </p:txBody>
+      </p:sp>
+      <p:sp>
+        <p:nvSpPr>
+          <p:cNvPr id="5" name="TextBox 4"/>
+          <p:cNvSpPr txBox="1"/>
+          <p:nvPr/>
+        </p:nvSpPr>
+        <p:spPr>
+          <a:xfrm>
+            <a:off x="10637215" y="6446520"/>
+            <a:ext cx="914400" cy="274320"/>
+          </a:xfrm>
+          <a:prstGeom prst="rect">
+            <a:avLst/>
+          </a:prstGeom>
+          <a:noFill/>
+        </p:spPr>
+        <p:txBody>
+          <a:bodyPr wrap="square" lIns="45720" rIns="45720">
+            <a:spAutoFit/>
+          </a:bodyPr>
+          <a:lstStyle/>
+          <a:p>
+            <a:pPr algn="r"/>
+            <a:r>
+              <a:rPr sz="1000" b="0">
+                <a:solidFill>
+                  <a:srgbClr val="5B6770"/>
+                </a:solidFill>
+              </a:rPr>
+              <a:t>74</a:t>
+            </a:r>
+          </a:p>
+        </p:txBody>
+      </p:sp>
+      <p:sp>
+        <p:nvSpPr>
+          <p:cNvPr id="6" name="TextBox 5"/>
+          <p:cNvSpPr txBox="1"/>
+          <p:nvPr/>
+        </p:nvSpPr>
+        <p:spPr>
+          <a:xfrm>
+            <a:off x="640080" y="548640"/>
+            <a:ext cx="10911535" cy="731520"/>
+          </a:xfrm>
+          <a:prstGeom prst="rect">
+            <a:avLst/>
+          </a:prstGeom>
+          <a:noFill/>
+        </p:spPr>
+        <p:txBody>
+          <a:bodyPr wrap="square" lIns="45720" rIns="45720" anchor="ctr">
+            <a:spAutoFit/>
+          </a:bodyPr>
+          <a:lstStyle/>
+          <a:p>
+            <a:r>
+              <a:rPr sz="2600" b="1">
+                <a:solidFill>
+                  <a:srgbClr val="006D77"/>
+                </a:solidFill>
+              </a:rPr>
+              <a:t>Demo 14 — RBAC, görev ayrılığı, Clark–Wilson</a:t>
+            </a:r>
+          </a:p>
+        </p:txBody>
+      </p:sp>
+      <p:sp>
+        <p:nvSpPr>
+          <p:cNvPr id="7" name="TextBox 6"/>
+          <p:cNvSpPr txBox="1"/>
+          <p:nvPr/>
+        </p:nvSpPr>
+        <p:spPr>
+          <a:xfrm>
+            <a:off x="640080" y="1325880"/>
+            <a:ext cx="10911535" cy="406908"/>
+          </a:xfrm>
+          <a:prstGeom prst="rect">
+            <a:avLst/>
+          </a:prstGeom>
+          <a:noFill/>
+        </p:spPr>
+        <p:txBody>
+          <a:bodyPr wrap="square" lIns="45720" rIns="45720">
+            <a:spAutoFit/>
+          </a:bodyPr>
+          <a:lstStyle/>
+          <a:p>
+            <a:pPr algn="l"/>
+            <a:r>
+              <a:rPr sz="1800" b="0">
+                <a:solidFill>
+                  <a:srgbClr val="A1123F"/>
+                </a:solidFill>
+                <a:latin typeface="Consolas"/>
+              </a:rPr>
+              <a:t>code/week-02/14-rbac-clark-wilson</a:t>
+            </a:r>
+            <a:r>
+              <a:rPr sz="1800" b="0">
+                <a:solidFill>
+                  <a:srgbClr val="1F2D3A"/>
+                </a:solidFill>
+              </a:rPr>
+              <a:t> · banka benzetimi</a:t>
+            </a:r>
+          </a:p>
+        </p:txBody>
+      </p:sp>
+      <p:sp>
+        <p:nvSpPr>
+          <p:cNvPr id="8" name="Rectangle 7"/>
+          <p:cNvSpPr/>
+          <p:nvPr/>
+        </p:nvSpPr>
+        <p:spPr>
+          <a:xfrm>
+            <a:off x="640080" y="1842515"/>
+            <a:ext cx="10911535" cy="954633"/>
+          </a:xfrm>
+          <a:prstGeom prst="rect">
+            <a:avLst/>
+          </a:prstGeom>
+          <a:solidFill>
+            <a:srgbClr val="F3F4F6"/>
+          </a:solidFill>
+          <a:ln>
+            <a:solidFill>
+              <a:srgbClr val="D9DEE3"/>
+            </a:solidFill>
+          </a:ln>
+        </p:spPr>
+        <p:style>
+          <a:lnRef idx="1">
+            <a:schemeClr val="accent1"/>
+          </a:lnRef>
+          <a:fillRef idx="3">
+            <a:schemeClr val="accent1"/>
+          </a:fillRef>
+          <a:effectRef idx="2">
+            <a:schemeClr val="accent1"/>
+          </a:effectRef>
+          <a:fontRef idx="minor">
+            <a:schemeClr val="lt1"/>
+          </a:fontRef>
+        </p:style>
+        <p:txBody>
+          <a:bodyPr rtlCol="0" anchor="t" wrap="none" lIns="137160" rIns="137160" tIns="91440" bIns="91440"/>
+          <a:lstStyle/>
+          <a:p>
+            <a:pPr algn="l"/>
+            <a:r>
+              <a:rPr sz="1116">
+                <a:solidFill>
+                  <a:srgbClr val="1F2D3A"/>
+                </a:solidFill>
+                <a:latin typeface="Consolas"/>
+              </a:rPr>
+              <a:t>ATA cem GISE                 SSD(GISE,ONAYCI)  -&gt; RED</a:t>
+            </a:r>
+          </a:p>
+          <a:p>
+            <a:pPr algn="l"/>
+            <a:r>
+              <a:rPr sz="1116">
+                <a:solidFill>
+                  <a:srgbClr val="1F2D3A"/>
+                </a:solidFill>
+                <a:latin typeface="Consolas"/>
+              </a:rPr>
+              <a:t>OTURUM deniz GISE,DENETCI    DSD(GISE,DENETCI) -&gt; RED</a:t>
+            </a:r>
+          </a:p>
+          <a:p>
+            <a:pPr algn="l"/>
+            <a:r>
+              <a:rPr sz="1116">
+                <a:solidFill>
+                  <a:srgbClr val="1F2D3A"/>
+                </a:solidFill>
+                <a:latin typeface="Consolas"/>
+              </a:rPr>
+              <a:t>OTURUM deniz DENETCI         -&gt; TAMAM</a:t>
+            </a:r>
+          </a:p>
+          <a:p>
+            <a:pPr algn="l"/>
+            <a:r>
+              <a:rPr sz="1116">
+                <a:solidFill>
+                  <a:srgbClr val="1F2D3A"/>
+                </a:solidFill>
+                <a:latin typeface="Consolas"/>
+              </a:rPr>
+              <a:t>deniz IVP: beklenen 20250, bulunan 20250</a:t>
+            </a:r>
+          </a:p>
+        </p:txBody>
+      </p:sp>
+      <p:sp>
+        <p:nvSpPr>
+          <p:cNvPr id="9" name="TextBox 8"/>
+          <p:cNvSpPr txBox="1"/>
+          <p:nvPr/>
+        </p:nvSpPr>
+        <p:spPr>
+          <a:xfrm>
+            <a:off x="640080" y="2906876"/>
+            <a:ext cx="10911535" cy="1120140"/>
+          </a:xfrm>
+          <a:prstGeom prst="rect">
+            <a:avLst/>
+          </a:prstGeom>
+          <a:noFill/>
+        </p:spPr>
+        <p:txBody>
+          <a:bodyPr wrap="square" lIns="45720" rIns="45720">
+            <a:spAutoFit/>
+          </a:bodyPr>
+          <a:lstStyle/>
+          <a:p>
+            <a:pPr>
+              <a:spcAft>
+                <a:spcPts val="300"/>
+              </a:spcAft>
+            </a:pPr>
+            <a:r>
+              <a:rPr sz="1800" b="1">
+                <a:solidFill>
+                  <a:srgbClr val="006D77"/>
+                </a:solidFill>
+              </a:rPr>
+              <a:t>• </a:t>
+            </a:r>
+            <a:r>
+              <a:rPr sz="1800" b="1">
+                <a:solidFill>
+                  <a:srgbClr val="1F2D3A"/>
+                </a:solidFill>
+              </a:rPr>
+              <a:t>SSD:</a:t>
+            </a:r>
+            <a:r>
+              <a:rPr sz="1800" b="0">
+                <a:solidFill>
+                  <a:srgbClr val="1F2D3A"/>
+                </a:solidFill>
+              </a:rPr>
+              <a:t> çelişen iki role atanamaz · </a:t>
+            </a:r>
+            <a:r>
+              <a:rPr sz="1800" b="1">
+                <a:solidFill>
+                  <a:srgbClr val="1F2D3A"/>
+                </a:solidFill>
+              </a:rPr>
+              <a:t>DSD:</a:t>
+            </a:r>
+            <a:r>
+              <a:rPr sz="1800" b="0">
+                <a:solidFill>
+                  <a:srgbClr val="1F2D3A"/>
+                </a:solidFill>
+              </a:rPr>
+              <a:t> aynı oturumda ikisi etkin olamaz</a:t>
+            </a:r>
+          </a:p>
+          <a:p>
+            <a:pPr>
+              <a:spcAft>
+                <a:spcPts val="300"/>
+              </a:spcAft>
+            </a:pPr>
+            <a:r>
+              <a:rPr sz="1800" b="1">
+                <a:solidFill>
+                  <a:srgbClr val="006D77"/>
+                </a:solidFill>
+              </a:rPr>
+              <a:t>• </a:t>
+            </a:r>
+            <a:r>
+              <a:rPr sz="1800" b="0">
+                <a:solidFill>
+                  <a:srgbClr val="1F2D3A"/>
+                </a:solidFill>
+              </a:rPr>
+              <a:t>CDI'ya yalnız </a:t>
+            </a:r>
+            <a:r>
+              <a:rPr sz="1800" b="1">
+                <a:solidFill>
+                  <a:srgbClr val="1F2D3A"/>
+                </a:solidFill>
+              </a:rPr>
+              <a:t>sertifikalı TP</a:t>
+            </a:r>
+            <a:r>
+              <a:rPr sz="1800" b="0">
+                <a:solidFill>
+                  <a:srgbClr val="1F2D3A"/>
+                </a:solidFill>
+              </a:rPr>
+              <a:t> dokunur; büyük havale → </a:t>
+            </a:r>
+            <a:r>
+              <a:rPr sz="1800" b="1">
+                <a:solidFill>
+                  <a:srgbClr val="1F2D3A"/>
+                </a:solidFill>
+              </a:rPr>
+              <a:t>ikinci kişi onayı</a:t>
+            </a:r>
+          </a:p>
+          <a:p>
+            <a:pPr>
+              <a:spcAft>
+                <a:spcPts val="300"/>
+              </a:spcAft>
+            </a:pPr>
+            <a:r>
+              <a:rPr sz="1800" b="1">
+                <a:solidFill>
+                  <a:srgbClr val="006D77"/>
+                </a:solidFill>
+              </a:rPr>
+              <a:t>• </a:t>
+            </a:r>
+            <a:r>
+              <a:rPr sz="1800" b="0">
+                <a:solidFill>
+                  <a:srgbClr val="1F2D3A"/>
+                </a:solidFill>
+              </a:rPr>
+              <a:t>⚠️ Hatalı TP sertifikalanırsa kurallar görmez, </a:t>
+            </a:r>
+            <a:r>
+              <a:rPr sz="1800" b="1">
+                <a:solidFill>
+                  <a:srgbClr val="1F2D3A"/>
+                </a:solidFill>
+              </a:rPr>
+              <a:t>IVP yakalar</a:t>
+            </a:r>
+          </a:p>
+        </p:txBody>
+      </p:sp>
+    </p:spTree>
+  </p:cSld>
+  <p:clrMapOvr>
+    <a:masterClrMapping/>
+  </p:clrMapOvr>
+</p:sld>
+</file>
+
+<file path=ppt/slides/slide75.xml><?xml version="1.0" encoding="utf-8"?>
 <p:sld xmlns:a="http://schemas.openxmlformats.org/drawingml/2006/main" xmlns:p="http://schemas.openxmlformats.org/presentationml/2006/main" xmlns:r="http://schemas.openxmlformats.org/officeDocument/2006/relationships">
   <p:cSld>
     <p:bg>
@@ -35370,7 +35821,7 @@
                   <a:srgbClr val="D8F0F2"/>
                 </a:solidFill>
               </a:rPr>
-              <a:t>74</a:t>
+              <a:t>75</a:t>
             </a:r>
           </a:p>
         </p:txBody>
@@ -35417,7 +35868,7 @@
 </p:sld>
 </file>
 
-<file path=ppt/slides/slide75.xml><?xml version="1.0" encoding="utf-8"?>
+<file path=ppt/slides/slide76.xml><?xml version="1.0" encoding="utf-8"?>
 <p:sld xmlns:a="http://schemas.openxmlformats.org/drawingml/2006/main" xmlns:p="http://schemas.openxmlformats.org/presentationml/2006/main" xmlns:r="http://schemas.openxmlformats.org/officeDocument/2006/relationships">
   <p:cSld>
     <p:spTree>
@@ -35546,7 +35997,7 @@
                   <a:srgbClr val="5B6770"/>
                 </a:solidFill>
               </a:rPr>
-              <a:t>75</a:t>
+              <a:t>76</a:t>
             </a:r>
           </a:p>
         </p:txBody>
@@ -36033,7 +36484,7 @@
 </p:sld>
 </file>
 
-<file path=ppt/slides/slide76.xml><?xml version="1.0" encoding="utf-8"?>
+<file path=ppt/slides/slide77.xml><?xml version="1.0" encoding="utf-8"?>
 <p:sld xmlns:a="http://schemas.openxmlformats.org/drawingml/2006/main" xmlns:p="http://schemas.openxmlformats.org/presentationml/2006/main" xmlns:r="http://schemas.openxmlformats.org/officeDocument/2006/relationships">
   <p:cSld>
     <p:spTree>
@@ -36162,7 +36613,7 @@
                   <a:srgbClr val="5B6770"/>
                 </a:solidFill>
               </a:rPr>
-              <a:t>76</a:t>
+              <a:t>77</a:t>
             </a:r>
           </a:p>
         </p:txBody>
@@ -36618,380 +37069,6 @@
 </p:sld>
 </file>
 
-<file path=ppt/slides/slide77.xml><?xml version="1.0" encoding="utf-8"?>
-<p:sld xmlns:a="http://schemas.openxmlformats.org/drawingml/2006/main" xmlns:p="http://schemas.openxmlformats.org/presentationml/2006/main" xmlns:r="http://schemas.openxmlformats.org/officeDocument/2006/relationships">
-  <p:cSld>
-    <p:spTree>
-      <p:nvGrpSpPr>
-        <p:cNvPr id="1" name=""/>
-        <p:cNvGrpSpPr/>
-        <p:nvPr/>
-      </p:nvGrpSpPr>
-      <p:grpSpPr/>
-      <p:pic>
-        <p:nvPicPr>
-          <p:cNvPr id="2" name="Picture 1" descr="rteu_logo_kucuk.jpg"/>
-          <p:cNvPicPr>
-            <a:picLocks noChangeAspect="1"/>
-          </p:cNvPicPr>
-          <p:nvPr/>
-        </p:nvPicPr>
-        <p:blipFill>
-          <a:blip r:embed="rId2"/>
-          <a:stretch>
-            <a:fillRect/>
-          </a:stretch>
-        </p:blipFill>
-        <p:spPr>
-          <a:xfrm>
-            <a:off x="640080" y="164592"/>
-            <a:ext cx="242773" cy="329184"/>
-          </a:xfrm>
-          <a:prstGeom prst="rect">
-            <a:avLst/>
-          </a:prstGeom>
-        </p:spPr>
-      </p:pic>
-      <p:sp>
-        <p:nvSpPr>
-          <p:cNvPr id="3" name="TextBox 2"/>
-          <p:cNvSpPr txBox="1"/>
-          <p:nvPr/>
-        </p:nvSpPr>
-        <p:spPr>
-          <a:xfrm>
-            <a:off x="1051560" y="182880"/>
-            <a:ext cx="7315200" cy="320040"/>
-          </a:xfrm>
-          <a:prstGeom prst="rect">
-            <a:avLst/>
-          </a:prstGeom>
-          <a:noFill/>
-        </p:spPr>
-        <p:txBody>
-          <a:bodyPr wrap="square" lIns="45720" rIns="45720">
-            <a:spAutoFit/>
-          </a:bodyPr>
-          <a:lstStyle/>
-          <a:p>
-            <a:r>
-              <a:rPr sz="1100" b="0">
-                <a:solidFill>
-                  <a:srgbClr val="5B6770"/>
-                </a:solidFill>
-              </a:rPr>
-              <a:t>CEN429 Güvenli Programlama · Hafta 2</a:t>
-            </a:r>
-          </a:p>
-        </p:txBody>
-      </p:sp>
-      <p:sp>
-        <p:nvSpPr>
-          <p:cNvPr id="4" name="TextBox 3"/>
-          <p:cNvSpPr txBox="1"/>
-          <p:nvPr/>
-        </p:nvSpPr>
-        <p:spPr>
-          <a:xfrm>
-            <a:off x="640080" y="6446520"/>
-            <a:ext cx="7315200" cy="274320"/>
-          </a:xfrm>
-          <a:prstGeom prst="rect">
-            <a:avLst/>
-          </a:prstGeom>
-          <a:noFill/>
-        </p:spPr>
-        <p:txBody>
-          <a:bodyPr wrap="square" lIns="45720" rIns="45720">
-            <a:spAutoFit/>
-          </a:bodyPr>
-          <a:lstStyle/>
-          <a:p>
-            <a:r>
-              <a:rPr sz="1000" b="0">
-                <a:solidFill>
-                  <a:srgbClr val="5B6770"/>
-                </a:solidFill>
-              </a:rPr>
-              <a:t>RTEÜ Bilgisayar Mühendisliği · 2026-2027 Güz</a:t>
-            </a:r>
-          </a:p>
-        </p:txBody>
-      </p:sp>
-      <p:sp>
-        <p:nvSpPr>
-          <p:cNvPr id="5" name="TextBox 4"/>
-          <p:cNvSpPr txBox="1"/>
-          <p:nvPr/>
-        </p:nvSpPr>
-        <p:spPr>
-          <a:xfrm>
-            <a:off x="10637215" y="6446520"/>
-            <a:ext cx="914400" cy="274320"/>
-          </a:xfrm>
-          <a:prstGeom prst="rect">
-            <a:avLst/>
-          </a:prstGeom>
-          <a:noFill/>
-        </p:spPr>
-        <p:txBody>
-          <a:bodyPr wrap="square" lIns="45720" rIns="45720">
-            <a:spAutoFit/>
-          </a:bodyPr>
-          <a:lstStyle/>
-          <a:p>
-            <a:pPr algn="r"/>
-            <a:r>
-              <a:rPr sz="1000" b="0">
-                <a:solidFill>
-                  <a:srgbClr val="5B6770"/>
-                </a:solidFill>
-              </a:rPr>
-              <a:t>77</a:t>
-            </a:r>
-          </a:p>
-        </p:txBody>
-      </p:sp>
-      <p:sp>
-        <p:nvSpPr>
-          <p:cNvPr id="6" name="TextBox 5"/>
-          <p:cNvSpPr txBox="1"/>
-          <p:nvPr/>
-        </p:nvSpPr>
-        <p:spPr>
-          <a:xfrm>
-            <a:off x="640080" y="548640"/>
-            <a:ext cx="10911535" cy="731520"/>
-          </a:xfrm>
-          <a:prstGeom prst="rect">
-            <a:avLst/>
-          </a:prstGeom>
-          <a:noFill/>
-        </p:spPr>
-        <p:txBody>
-          <a:bodyPr wrap="square" lIns="45720" rIns="45720" anchor="ctr">
-            <a:spAutoFit/>
-          </a:bodyPr>
-          <a:lstStyle/>
-          <a:p>
-            <a:r>
-              <a:rPr sz="3000" b="1">
-                <a:solidFill>
-                  <a:srgbClr val="006D77"/>
-                </a:solidFill>
-              </a:rPr>
-              <a:t>CVE ve CVSS</a:t>
-            </a:r>
-          </a:p>
-        </p:txBody>
-      </p:sp>
-      <p:sp>
-        <p:nvSpPr>
-          <p:cNvPr id="7" name="TextBox 6"/>
-          <p:cNvSpPr txBox="1"/>
-          <p:nvPr/>
-        </p:nvSpPr>
-        <p:spPr>
-          <a:xfrm>
-            <a:off x="640080" y="1325880"/>
-            <a:ext cx="10911535" cy="1173480"/>
-          </a:xfrm>
-          <a:prstGeom prst="rect">
-            <a:avLst/>
-          </a:prstGeom>
-          <a:noFill/>
-        </p:spPr>
-        <p:txBody>
-          <a:bodyPr wrap="square" lIns="45720" rIns="45720">
-            <a:spAutoFit/>
-          </a:bodyPr>
-          <a:lstStyle/>
-          <a:p>
-            <a:pPr>
-              <a:spcAft>
-                <a:spcPts val="300"/>
-              </a:spcAft>
-            </a:pPr>
-            <a:r>
-              <a:rPr sz="2000" b="1">
-                <a:solidFill>
-                  <a:srgbClr val="006D77"/>
-                </a:solidFill>
-              </a:rPr>
-              <a:t>• </a:t>
-            </a:r>
-            <a:r>
-              <a:rPr sz="2000" b="1">
-                <a:solidFill>
-                  <a:srgbClr val="1F2D3A"/>
-                </a:solidFill>
-              </a:rPr>
-              <a:t>CVE:</a:t>
-            </a:r>
-            <a:r>
-              <a:rPr sz="2000" b="0">
-                <a:solidFill>
-                  <a:srgbClr val="1F2D3A"/>
-                </a:solidFill>
-              </a:rPr>
-              <a:t> belirli üründeki belirli açığın </a:t>
-            </a:r>
-            <a:r>
-              <a:rPr sz="2000" b="1">
-                <a:solidFill>
-                  <a:srgbClr val="1F2D3A"/>
-                </a:solidFill>
-              </a:rPr>
-              <a:t>kimliği</a:t>
-            </a:r>
-            <a:r>
-              <a:rPr sz="2000" b="0">
-                <a:solidFill>
-                  <a:srgbClr val="1F2D3A"/>
-                </a:solidFill>
-              </a:rPr>
-              <a:t> (CVE-2014-0160 = Heartbleed). Bir </a:t>
-            </a:r>
-            <a:r>
-              <a:rPr sz="2000" b="1">
-                <a:solidFill>
-                  <a:srgbClr val="1F2D3A"/>
-                </a:solidFill>
-              </a:rPr>
-              <a:t>isim</a:t>
-            </a:r>
-            <a:r>
-              <a:rPr sz="2000" b="0">
-                <a:solidFill>
-                  <a:srgbClr val="1F2D3A"/>
-                </a:solidFill>
-              </a:rPr>
-              <a:t>, ciddiyet değil.</a:t>
-            </a:r>
-          </a:p>
-          <a:p>
-            <a:pPr>
-              <a:spcAft>
-                <a:spcPts val="300"/>
-              </a:spcAft>
-            </a:pPr>
-            <a:r>
-              <a:rPr sz="2000" b="1">
-                <a:solidFill>
-                  <a:srgbClr val="006D77"/>
-                </a:solidFill>
-              </a:rPr>
-              <a:t>• </a:t>
-            </a:r>
-            <a:r>
-              <a:rPr sz="2000" b="1">
-                <a:solidFill>
-                  <a:srgbClr val="1F2D3A"/>
-                </a:solidFill>
-              </a:rPr>
-              <a:t>CVSS:</a:t>
-            </a:r>
-            <a:r>
-              <a:rPr sz="2000" b="0">
-                <a:solidFill>
-                  <a:srgbClr val="1F2D3A"/>
-                </a:solidFill>
-              </a:rPr>
-              <a:t> açığın </a:t>
-            </a:r>
-            <a:r>
-              <a:rPr sz="2000" b="1">
-                <a:solidFill>
-                  <a:srgbClr val="1F2D3A"/>
-                </a:solidFill>
-              </a:rPr>
-              <a:t>ciddiyeti</a:t>
-            </a:r>
-            <a:r>
-              <a:rPr sz="2000" b="0">
-                <a:solidFill>
-                  <a:srgbClr val="1F2D3A"/>
-                </a:solidFill>
-              </a:rPr>
-              <a:t> 0.0–10.0. Üç grup: </a:t>
-            </a:r>
-            <a:r>
-              <a:rPr sz="2000" b="1">
-                <a:solidFill>
-                  <a:srgbClr val="1F2D3A"/>
-                </a:solidFill>
-              </a:rPr>
-              <a:t>Temel</a:t>
-            </a:r>
-            <a:r>
-              <a:rPr sz="2000" b="0">
-                <a:solidFill>
-                  <a:srgbClr val="1F2D3A"/>
-                </a:solidFill>
-              </a:rPr>
-              <a:t> (değişmez), Zamansal, Çevresel.</a:t>
-            </a:r>
-          </a:p>
-        </p:txBody>
-      </p:sp>
-      <p:sp>
-        <p:nvSpPr>
-          <p:cNvPr id="8" name="TextBox 7"/>
-          <p:cNvSpPr txBox="1"/>
-          <p:nvPr/>
-        </p:nvSpPr>
-        <p:spPr>
-          <a:xfrm>
-            <a:off x="640080" y="2609088"/>
-            <a:ext cx="10911535" cy="439928"/>
-          </a:xfrm>
-          <a:prstGeom prst="rect">
-            <a:avLst/>
-          </a:prstGeom>
-          <a:noFill/>
-        </p:spPr>
-        <p:txBody>
-          <a:bodyPr wrap="square" lIns="45720" rIns="45720">
-            <a:spAutoFit/>
-          </a:bodyPr>
-          <a:lstStyle/>
-          <a:p>
-            <a:pPr algn="l"/>
-            <a:r>
-              <a:rPr sz="2000" b="0">
-                <a:solidFill>
-                  <a:srgbClr val="1F2D3A"/>
-                </a:solidFill>
-              </a:rPr>
-              <a:t>Bir CVE bir ya da birden çok </a:t>
-            </a:r>
-            <a:r>
-              <a:rPr sz="2000" b="1">
-                <a:solidFill>
-                  <a:srgbClr val="1F2D3A"/>
-                </a:solidFill>
-              </a:rPr>
-              <a:t>CWE türüne</a:t>
-            </a:r>
-            <a:r>
-              <a:rPr sz="2000" b="0">
-                <a:solidFill>
-                  <a:srgbClr val="1F2D3A"/>
-                </a:solidFill>
-              </a:rPr>
-              <a:t> aittir.</a:t>
-            </a:r>
-          </a:p>
-        </p:txBody>
-      </p:sp>
-    </p:spTree>
-  </p:cSld>
-  <p:clrMapOvr>
-    <a:masterClrMapping/>
-  </p:clrMapOvr>
-</p:sld>
-</file>
-
 <file path=ppt/slides/slide78.xml><?xml version="1.0" encoding="utf-8"?>
 <p:sld xmlns:a="http://schemas.openxmlformats.org/drawingml/2006/main" xmlns:p="http://schemas.openxmlformats.org/presentationml/2006/main" xmlns:r="http://schemas.openxmlformats.org/officeDocument/2006/relationships">
   <p:cSld>
@@ -37122,6 +37199,380 @@
                 </a:solidFill>
               </a:rPr>
               <a:t>78</a:t>
+            </a:r>
+          </a:p>
+        </p:txBody>
+      </p:sp>
+      <p:sp>
+        <p:nvSpPr>
+          <p:cNvPr id="6" name="TextBox 5"/>
+          <p:cNvSpPr txBox="1"/>
+          <p:nvPr/>
+        </p:nvSpPr>
+        <p:spPr>
+          <a:xfrm>
+            <a:off x="640080" y="548640"/>
+            <a:ext cx="10911535" cy="731520"/>
+          </a:xfrm>
+          <a:prstGeom prst="rect">
+            <a:avLst/>
+          </a:prstGeom>
+          <a:noFill/>
+        </p:spPr>
+        <p:txBody>
+          <a:bodyPr wrap="square" lIns="45720" rIns="45720" anchor="ctr">
+            <a:spAutoFit/>
+          </a:bodyPr>
+          <a:lstStyle/>
+          <a:p>
+            <a:r>
+              <a:rPr sz="3000" b="1">
+                <a:solidFill>
+                  <a:srgbClr val="006D77"/>
+                </a:solidFill>
+              </a:rPr>
+              <a:t>CVE ve CVSS</a:t>
+            </a:r>
+          </a:p>
+        </p:txBody>
+      </p:sp>
+      <p:sp>
+        <p:nvSpPr>
+          <p:cNvPr id="7" name="TextBox 6"/>
+          <p:cNvSpPr txBox="1"/>
+          <p:nvPr/>
+        </p:nvSpPr>
+        <p:spPr>
+          <a:xfrm>
+            <a:off x="640080" y="1325880"/>
+            <a:ext cx="10911535" cy="1173480"/>
+          </a:xfrm>
+          <a:prstGeom prst="rect">
+            <a:avLst/>
+          </a:prstGeom>
+          <a:noFill/>
+        </p:spPr>
+        <p:txBody>
+          <a:bodyPr wrap="square" lIns="45720" rIns="45720">
+            <a:spAutoFit/>
+          </a:bodyPr>
+          <a:lstStyle/>
+          <a:p>
+            <a:pPr>
+              <a:spcAft>
+                <a:spcPts val="300"/>
+              </a:spcAft>
+            </a:pPr>
+            <a:r>
+              <a:rPr sz="2000" b="1">
+                <a:solidFill>
+                  <a:srgbClr val="006D77"/>
+                </a:solidFill>
+              </a:rPr>
+              <a:t>• </a:t>
+            </a:r>
+            <a:r>
+              <a:rPr sz="2000" b="1">
+                <a:solidFill>
+                  <a:srgbClr val="1F2D3A"/>
+                </a:solidFill>
+              </a:rPr>
+              <a:t>CVE:</a:t>
+            </a:r>
+            <a:r>
+              <a:rPr sz="2000" b="0">
+                <a:solidFill>
+                  <a:srgbClr val="1F2D3A"/>
+                </a:solidFill>
+              </a:rPr>
+              <a:t> belirli üründeki belirli açığın </a:t>
+            </a:r>
+            <a:r>
+              <a:rPr sz="2000" b="1">
+                <a:solidFill>
+                  <a:srgbClr val="1F2D3A"/>
+                </a:solidFill>
+              </a:rPr>
+              <a:t>kimliği</a:t>
+            </a:r>
+            <a:r>
+              <a:rPr sz="2000" b="0">
+                <a:solidFill>
+                  <a:srgbClr val="1F2D3A"/>
+                </a:solidFill>
+              </a:rPr>
+              <a:t> (CVE-2014-0160 = Heartbleed). Bir </a:t>
+            </a:r>
+            <a:r>
+              <a:rPr sz="2000" b="1">
+                <a:solidFill>
+                  <a:srgbClr val="1F2D3A"/>
+                </a:solidFill>
+              </a:rPr>
+              <a:t>isim</a:t>
+            </a:r>
+            <a:r>
+              <a:rPr sz="2000" b="0">
+                <a:solidFill>
+                  <a:srgbClr val="1F2D3A"/>
+                </a:solidFill>
+              </a:rPr>
+              <a:t>, ciddiyet değil.</a:t>
+            </a:r>
+          </a:p>
+          <a:p>
+            <a:pPr>
+              <a:spcAft>
+                <a:spcPts val="300"/>
+              </a:spcAft>
+            </a:pPr>
+            <a:r>
+              <a:rPr sz="2000" b="1">
+                <a:solidFill>
+                  <a:srgbClr val="006D77"/>
+                </a:solidFill>
+              </a:rPr>
+              <a:t>• </a:t>
+            </a:r>
+            <a:r>
+              <a:rPr sz="2000" b="1">
+                <a:solidFill>
+                  <a:srgbClr val="1F2D3A"/>
+                </a:solidFill>
+              </a:rPr>
+              <a:t>CVSS:</a:t>
+            </a:r>
+            <a:r>
+              <a:rPr sz="2000" b="0">
+                <a:solidFill>
+                  <a:srgbClr val="1F2D3A"/>
+                </a:solidFill>
+              </a:rPr>
+              <a:t> açığın </a:t>
+            </a:r>
+            <a:r>
+              <a:rPr sz="2000" b="1">
+                <a:solidFill>
+                  <a:srgbClr val="1F2D3A"/>
+                </a:solidFill>
+              </a:rPr>
+              <a:t>ciddiyeti</a:t>
+            </a:r>
+            <a:r>
+              <a:rPr sz="2000" b="0">
+                <a:solidFill>
+                  <a:srgbClr val="1F2D3A"/>
+                </a:solidFill>
+              </a:rPr>
+              <a:t> 0.0–10.0. Üç grup: </a:t>
+            </a:r>
+            <a:r>
+              <a:rPr sz="2000" b="1">
+                <a:solidFill>
+                  <a:srgbClr val="1F2D3A"/>
+                </a:solidFill>
+              </a:rPr>
+              <a:t>Temel</a:t>
+            </a:r>
+            <a:r>
+              <a:rPr sz="2000" b="0">
+                <a:solidFill>
+                  <a:srgbClr val="1F2D3A"/>
+                </a:solidFill>
+              </a:rPr>
+              <a:t> (değişmez), Zamansal, Çevresel.</a:t>
+            </a:r>
+          </a:p>
+        </p:txBody>
+      </p:sp>
+      <p:sp>
+        <p:nvSpPr>
+          <p:cNvPr id="8" name="TextBox 7"/>
+          <p:cNvSpPr txBox="1"/>
+          <p:nvPr/>
+        </p:nvSpPr>
+        <p:spPr>
+          <a:xfrm>
+            <a:off x="640080" y="2609088"/>
+            <a:ext cx="10911535" cy="439928"/>
+          </a:xfrm>
+          <a:prstGeom prst="rect">
+            <a:avLst/>
+          </a:prstGeom>
+          <a:noFill/>
+        </p:spPr>
+        <p:txBody>
+          <a:bodyPr wrap="square" lIns="45720" rIns="45720">
+            <a:spAutoFit/>
+          </a:bodyPr>
+          <a:lstStyle/>
+          <a:p>
+            <a:pPr algn="l"/>
+            <a:r>
+              <a:rPr sz="2000" b="0">
+                <a:solidFill>
+                  <a:srgbClr val="1F2D3A"/>
+                </a:solidFill>
+              </a:rPr>
+              <a:t>Bir CVE bir ya da birden çok </a:t>
+            </a:r>
+            <a:r>
+              <a:rPr sz="2000" b="1">
+                <a:solidFill>
+                  <a:srgbClr val="1F2D3A"/>
+                </a:solidFill>
+              </a:rPr>
+              <a:t>CWE türüne</a:t>
+            </a:r>
+            <a:r>
+              <a:rPr sz="2000" b="0">
+                <a:solidFill>
+                  <a:srgbClr val="1F2D3A"/>
+                </a:solidFill>
+              </a:rPr>
+              <a:t> aittir.</a:t>
+            </a:r>
+          </a:p>
+        </p:txBody>
+      </p:sp>
+    </p:spTree>
+  </p:cSld>
+  <p:clrMapOvr>
+    <a:masterClrMapping/>
+  </p:clrMapOvr>
+</p:sld>
+</file>
+
+<file path=ppt/slides/slide79.xml><?xml version="1.0" encoding="utf-8"?>
+<p:sld xmlns:a="http://schemas.openxmlformats.org/drawingml/2006/main" xmlns:p="http://schemas.openxmlformats.org/presentationml/2006/main" xmlns:r="http://schemas.openxmlformats.org/officeDocument/2006/relationships">
+  <p:cSld>
+    <p:spTree>
+      <p:nvGrpSpPr>
+        <p:cNvPr id="1" name=""/>
+        <p:cNvGrpSpPr/>
+        <p:nvPr/>
+      </p:nvGrpSpPr>
+      <p:grpSpPr/>
+      <p:pic>
+        <p:nvPicPr>
+          <p:cNvPr id="2" name="Picture 1" descr="rteu_logo_kucuk.jpg"/>
+          <p:cNvPicPr>
+            <a:picLocks noChangeAspect="1"/>
+          </p:cNvPicPr>
+          <p:nvPr/>
+        </p:nvPicPr>
+        <p:blipFill>
+          <a:blip r:embed="rId2"/>
+          <a:stretch>
+            <a:fillRect/>
+          </a:stretch>
+        </p:blipFill>
+        <p:spPr>
+          <a:xfrm>
+            <a:off x="640080" y="164592"/>
+            <a:ext cx="242773" cy="329184"/>
+          </a:xfrm>
+          <a:prstGeom prst="rect">
+            <a:avLst/>
+          </a:prstGeom>
+        </p:spPr>
+      </p:pic>
+      <p:sp>
+        <p:nvSpPr>
+          <p:cNvPr id="3" name="TextBox 2"/>
+          <p:cNvSpPr txBox="1"/>
+          <p:nvPr/>
+        </p:nvSpPr>
+        <p:spPr>
+          <a:xfrm>
+            <a:off x="1051560" y="182880"/>
+            <a:ext cx="7315200" cy="320040"/>
+          </a:xfrm>
+          <a:prstGeom prst="rect">
+            <a:avLst/>
+          </a:prstGeom>
+          <a:noFill/>
+        </p:spPr>
+        <p:txBody>
+          <a:bodyPr wrap="square" lIns="45720" rIns="45720">
+            <a:spAutoFit/>
+          </a:bodyPr>
+          <a:lstStyle/>
+          <a:p>
+            <a:r>
+              <a:rPr sz="1100" b="0">
+                <a:solidFill>
+                  <a:srgbClr val="5B6770"/>
+                </a:solidFill>
+              </a:rPr>
+              <a:t>CEN429 Güvenli Programlama · Hafta 2</a:t>
+            </a:r>
+          </a:p>
+        </p:txBody>
+      </p:sp>
+      <p:sp>
+        <p:nvSpPr>
+          <p:cNvPr id="4" name="TextBox 3"/>
+          <p:cNvSpPr txBox="1"/>
+          <p:nvPr/>
+        </p:nvSpPr>
+        <p:spPr>
+          <a:xfrm>
+            <a:off x="640080" y="6446520"/>
+            <a:ext cx="7315200" cy="274320"/>
+          </a:xfrm>
+          <a:prstGeom prst="rect">
+            <a:avLst/>
+          </a:prstGeom>
+          <a:noFill/>
+        </p:spPr>
+        <p:txBody>
+          <a:bodyPr wrap="square" lIns="45720" rIns="45720">
+            <a:spAutoFit/>
+          </a:bodyPr>
+          <a:lstStyle/>
+          <a:p>
+            <a:r>
+              <a:rPr sz="1000" b="0">
+                <a:solidFill>
+                  <a:srgbClr val="5B6770"/>
+                </a:solidFill>
+              </a:rPr>
+              <a:t>RTEÜ Bilgisayar Mühendisliği · 2026-2027 Güz</a:t>
+            </a:r>
+          </a:p>
+        </p:txBody>
+      </p:sp>
+      <p:sp>
+        <p:nvSpPr>
+          <p:cNvPr id="5" name="TextBox 4"/>
+          <p:cNvSpPr txBox="1"/>
+          <p:nvPr/>
+        </p:nvSpPr>
+        <p:spPr>
+          <a:xfrm>
+            <a:off x="10637215" y="6446520"/>
+            <a:ext cx="914400" cy="274320"/>
+          </a:xfrm>
+          <a:prstGeom prst="rect">
+            <a:avLst/>
+          </a:prstGeom>
+          <a:noFill/>
+        </p:spPr>
+        <p:txBody>
+          <a:bodyPr wrap="square" lIns="45720" rIns="45720">
+            <a:spAutoFit/>
+          </a:bodyPr>
+          <a:lstStyle/>
+          <a:p>
+            <a:pPr algn="r"/>
+            <a:r>
+              <a:rPr sz="1000" b="0">
+                <a:solidFill>
+                  <a:srgbClr val="5B6770"/>
+                </a:solidFill>
+              </a:rPr>
+              <a:t>79</a:t>
             </a:r>
           </a:p>
         </p:txBody>
@@ -37691,395 +38142,6 @@
 </p:sld>
 </file>
 
-<file path=ppt/slides/slide79.xml><?xml version="1.0" encoding="utf-8"?>
-<p:sld xmlns:a="http://schemas.openxmlformats.org/drawingml/2006/main" xmlns:p="http://schemas.openxmlformats.org/presentationml/2006/main" xmlns:r="http://schemas.openxmlformats.org/officeDocument/2006/relationships">
-  <p:cSld>
-    <p:spTree>
-      <p:nvGrpSpPr>
-        <p:cNvPr id="1" name=""/>
-        <p:cNvGrpSpPr/>
-        <p:nvPr/>
-      </p:nvGrpSpPr>
-      <p:grpSpPr/>
-      <p:pic>
-        <p:nvPicPr>
-          <p:cNvPr id="2" name="Picture 1" descr="rteu_logo_kucuk.jpg"/>
-          <p:cNvPicPr>
-            <a:picLocks noChangeAspect="1"/>
-          </p:cNvPicPr>
-          <p:nvPr/>
-        </p:nvPicPr>
-        <p:blipFill>
-          <a:blip r:embed="rId2"/>
-          <a:stretch>
-            <a:fillRect/>
-          </a:stretch>
-        </p:blipFill>
-        <p:spPr>
-          <a:xfrm>
-            <a:off x="640080" y="164592"/>
-            <a:ext cx="242773" cy="329184"/>
-          </a:xfrm>
-          <a:prstGeom prst="rect">
-            <a:avLst/>
-          </a:prstGeom>
-        </p:spPr>
-      </p:pic>
-      <p:sp>
-        <p:nvSpPr>
-          <p:cNvPr id="3" name="TextBox 2"/>
-          <p:cNvSpPr txBox="1"/>
-          <p:nvPr/>
-        </p:nvSpPr>
-        <p:spPr>
-          <a:xfrm>
-            <a:off x="1051560" y="182880"/>
-            <a:ext cx="7315200" cy="320040"/>
-          </a:xfrm>
-          <a:prstGeom prst="rect">
-            <a:avLst/>
-          </a:prstGeom>
-          <a:noFill/>
-        </p:spPr>
-        <p:txBody>
-          <a:bodyPr wrap="square" lIns="45720" rIns="45720">
-            <a:spAutoFit/>
-          </a:bodyPr>
-          <a:lstStyle/>
-          <a:p>
-            <a:r>
-              <a:rPr sz="1100" b="0">
-                <a:solidFill>
-                  <a:srgbClr val="5B6770"/>
-                </a:solidFill>
-              </a:rPr>
-              <a:t>CEN429 Güvenli Programlama · Hafta 2</a:t>
-            </a:r>
-          </a:p>
-        </p:txBody>
-      </p:sp>
-      <p:sp>
-        <p:nvSpPr>
-          <p:cNvPr id="4" name="TextBox 3"/>
-          <p:cNvSpPr txBox="1"/>
-          <p:nvPr/>
-        </p:nvSpPr>
-        <p:spPr>
-          <a:xfrm>
-            <a:off x="640080" y="6446520"/>
-            <a:ext cx="7315200" cy="274320"/>
-          </a:xfrm>
-          <a:prstGeom prst="rect">
-            <a:avLst/>
-          </a:prstGeom>
-          <a:noFill/>
-        </p:spPr>
-        <p:txBody>
-          <a:bodyPr wrap="square" lIns="45720" rIns="45720">
-            <a:spAutoFit/>
-          </a:bodyPr>
-          <a:lstStyle/>
-          <a:p>
-            <a:r>
-              <a:rPr sz="1000" b="0">
-                <a:solidFill>
-                  <a:srgbClr val="5B6770"/>
-                </a:solidFill>
-              </a:rPr>
-              <a:t>RTEÜ Bilgisayar Mühendisliği · 2026-2027 Güz</a:t>
-            </a:r>
-          </a:p>
-        </p:txBody>
-      </p:sp>
-      <p:sp>
-        <p:nvSpPr>
-          <p:cNvPr id="5" name="TextBox 4"/>
-          <p:cNvSpPr txBox="1"/>
-          <p:nvPr/>
-        </p:nvSpPr>
-        <p:spPr>
-          <a:xfrm>
-            <a:off x="10637215" y="6446520"/>
-            <a:ext cx="914400" cy="274320"/>
-          </a:xfrm>
-          <a:prstGeom prst="rect">
-            <a:avLst/>
-          </a:prstGeom>
-          <a:noFill/>
-        </p:spPr>
-        <p:txBody>
-          <a:bodyPr wrap="square" lIns="45720" rIns="45720">
-            <a:spAutoFit/>
-          </a:bodyPr>
-          <a:lstStyle/>
-          <a:p>
-            <a:pPr algn="r"/>
-            <a:r>
-              <a:rPr sz="1000" b="0">
-                <a:solidFill>
-                  <a:srgbClr val="5B6770"/>
-                </a:solidFill>
-              </a:rPr>
-              <a:t>79</a:t>
-            </a:r>
-          </a:p>
-        </p:txBody>
-      </p:sp>
-      <p:sp>
-        <p:nvSpPr>
-          <p:cNvPr id="6" name="TextBox 5"/>
-          <p:cNvSpPr txBox="1"/>
-          <p:nvPr/>
-        </p:nvSpPr>
-        <p:spPr>
-          <a:xfrm>
-            <a:off x="640080" y="548640"/>
-            <a:ext cx="10911535" cy="731520"/>
-          </a:xfrm>
-          <a:prstGeom prst="rect">
-            <a:avLst/>
-          </a:prstGeom>
-          <a:noFill/>
-        </p:spPr>
-        <p:txBody>
-          <a:bodyPr wrap="square" lIns="45720" rIns="45720" anchor="ctr">
-            <a:spAutoFit/>
-          </a:bodyPr>
-          <a:lstStyle/>
-          <a:p>
-            <a:r>
-              <a:rPr sz="3000" b="1">
-                <a:solidFill>
-                  <a:srgbClr val="006D77"/>
-                </a:solidFill>
-              </a:rPr>
-              <a:t>Demo 05 — CVSS hesaplayıcı</a:t>
-            </a:r>
-          </a:p>
-        </p:txBody>
-      </p:sp>
-      <p:sp>
-        <p:nvSpPr>
-          <p:cNvPr id="7" name="TextBox 6"/>
-          <p:cNvSpPr txBox="1"/>
-          <p:nvPr/>
-        </p:nvSpPr>
-        <p:spPr>
-          <a:xfrm>
-            <a:off x="640080" y="1325880"/>
-            <a:ext cx="10911535" cy="439928"/>
-          </a:xfrm>
-          <a:prstGeom prst="rect">
-            <a:avLst/>
-          </a:prstGeom>
-          <a:noFill/>
-        </p:spPr>
-        <p:txBody>
-          <a:bodyPr wrap="square" lIns="45720" rIns="45720">
-            <a:spAutoFit/>
-          </a:bodyPr>
-          <a:lstStyle/>
-          <a:p>
-            <a:pPr algn="l"/>
-            <a:r>
-              <a:rPr sz="2000" b="0">
-                <a:solidFill>
-                  <a:srgbClr val="A1123F"/>
-                </a:solidFill>
-                <a:latin typeface="Consolas"/>
-              </a:rPr>
-              <a:t>code/week-02/05-cvss</a:t>
-            </a:r>
-            <a:r>
-              <a:rPr sz="2000" b="0">
-                <a:solidFill>
-                  <a:srgbClr val="1F2D3A"/>
-                </a:solidFill>
-              </a:rPr>
-              <a:t> (Python)</a:t>
-            </a:r>
-          </a:p>
-        </p:txBody>
-      </p:sp>
-      <p:sp>
-        <p:nvSpPr>
-          <p:cNvPr id="8" name="Rectangle 7"/>
-          <p:cNvSpPr/>
-          <p:nvPr/>
-        </p:nvSpPr>
-        <p:spPr>
-          <a:xfrm>
-            <a:off x="640080" y="1875536"/>
-            <a:ext cx="10911535" cy="841247"/>
-          </a:xfrm>
-          <a:prstGeom prst="rect">
-            <a:avLst/>
-          </a:prstGeom>
-          <a:solidFill>
-            <a:srgbClr val="F3F4F6"/>
-          </a:solidFill>
-          <a:ln>
-            <a:solidFill>
-              <a:srgbClr val="D9DEE3"/>
-            </a:solidFill>
-          </a:ln>
-        </p:spPr>
-        <p:style>
-          <a:lnRef idx="1">
-            <a:schemeClr val="accent1"/>
-          </a:lnRef>
-          <a:fillRef idx="3">
-            <a:schemeClr val="accent1"/>
-          </a:fillRef>
-          <a:effectRef idx="2">
-            <a:schemeClr val="accent1"/>
-          </a:effectRef>
-          <a:fontRef idx="minor">
-            <a:schemeClr val="lt1"/>
-          </a:fontRef>
-        </p:style>
-        <p:txBody>
-          <a:bodyPr rtlCol="0" anchor="t" wrap="none" lIns="137160" rIns="137160" tIns="91440" bIns="91440"/>
-          <a:lstStyle/>
-          <a:p>
-            <a:pPr algn="l"/>
-            <a:r>
-              <a:rPr sz="1240">
-                <a:solidFill>
-                  <a:srgbClr val="1F2D3A"/>
-                </a:solidFill>
-                <a:latin typeface="Consolas"/>
-              </a:rPr>
-              <a:t>AV:N/AC:L/PR:N/UI:N/S:U/C:H/I:H/A:H  = 9.8  Kritik</a:t>
-            </a:r>
-          </a:p>
-          <a:p>
-            <a:pPr algn="l"/>
-            <a:r>
-              <a:rPr sz="1240">
-                <a:solidFill>
-                  <a:srgbClr val="1F2D3A"/>
-                </a:solidFill>
-                <a:latin typeface="Consolas"/>
-              </a:rPr>
-              <a:t>              ... S:U -&gt; S:C          = 10.0 Kritik</a:t>
-            </a:r>
-          </a:p>
-          <a:p>
-            <a:pPr algn="l"/>
-            <a:r>
-              <a:rPr sz="1240">
-                <a:solidFill>
-                  <a:srgbClr val="1F2D3A"/>
-                </a:solidFill>
-                <a:latin typeface="Consolas"/>
-              </a:rPr>
-              <a:t>AV:L (yerel) /PR:L/... C:H/I:H/A:H    = 7.8  Yuksek</a:t>
-            </a:r>
-          </a:p>
-        </p:txBody>
-      </p:sp>
-      <p:sp>
-        <p:nvSpPr>
-          <p:cNvPr id="9" name="TextBox 8"/>
-          <p:cNvSpPr txBox="1"/>
-          <p:nvPr/>
-        </p:nvSpPr>
-        <p:spPr>
-          <a:xfrm>
-            <a:off x="640080" y="2826512"/>
-            <a:ext cx="10911535" cy="1173480"/>
-          </a:xfrm>
-          <a:prstGeom prst="rect">
-            <a:avLst/>
-          </a:prstGeom>
-          <a:noFill/>
-        </p:spPr>
-        <p:txBody>
-          <a:bodyPr wrap="square" lIns="45720" rIns="45720">
-            <a:spAutoFit/>
-          </a:bodyPr>
-          <a:lstStyle/>
-          <a:p>
-            <a:pPr>
-              <a:spcAft>
-                <a:spcPts val="300"/>
-              </a:spcAft>
-            </a:pPr>
-            <a:r>
-              <a:rPr sz="2000" b="1">
-                <a:solidFill>
-                  <a:srgbClr val="006D77"/>
-                </a:solidFill>
-              </a:rPr>
-              <a:t>• </a:t>
-            </a:r>
-            <a:r>
-              <a:rPr sz="2000" b="1">
-                <a:solidFill>
-                  <a:srgbClr val="1F2D3A"/>
-                </a:solidFill>
-              </a:rPr>
-              <a:t>Uzaktan + kimliksiz</a:t>
-            </a:r>
-            <a:r>
-              <a:rPr sz="2000" b="0">
-                <a:solidFill>
-                  <a:srgbClr val="1F2D3A"/>
-                </a:solidFill>
-              </a:rPr>
-              <a:t> en yüksek; kapsam değişince 10.0.</a:t>
-            </a:r>
-          </a:p>
-          <a:p>
-            <a:pPr>
-              <a:spcAft>
-                <a:spcPts val="300"/>
-              </a:spcAft>
-            </a:pPr>
-            <a:r>
-              <a:rPr sz="2000" b="1">
-                <a:solidFill>
-                  <a:srgbClr val="006D77"/>
-                </a:solidFill>
-              </a:rPr>
-              <a:t>• </a:t>
-            </a:r>
-            <a:r>
-              <a:rPr sz="2000" b="0">
-                <a:solidFill>
-                  <a:srgbClr val="1F2D3A"/>
-                </a:solidFill>
-              </a:rPr>
-              <a:t>⚠️ Temel puan </a:t>
-            </a:r>
-            <a:r>
-              <a:rPr sz="2000" b="1">
-                <a:solidFill>
-                  <a:srgbClr val="1F2D3A"/>
-                </a:solidFill>
-              </a:rPr>
-              <a:t>bağlamı bilmez</a:t>
-            </a:r>
-            <a:r>
-              <a:rPr sz="2000" b="0">
-                <a:solidFill>
-                  <a:srgbClr val="1F2D3A"/>
-                </a:solidFill>
-              </a:rPr>
-              <a:t>: 4.0'lık açık tam sizin varlığınızı vuruyorsa sizin için 9.8'den önemli olabilir.</a:t>
-            </a:r>
-          </a:p>
-        </p:txBody>
-      </p:sp>
-    </p:spTree>
-  </p:cSld>
-  <p:clrMapOvr>
-    <a:masterClrMapping/>
-  </p:clrMapOvr>
-</p:sld>
-</file>
-
 <file path=ppt/slides/slide8.xml><?xml version="1.0" encoding="utf-8"?>
 <p:sld xmlns:a="http://schemas.openxmlformats.org/drawingml/2006/main" xmlns:p="http://schemas.openxmlformats.org/presentationml/2006/main" xmlns:r="http://schemas.openxmlformats.org/officeDocument/2006/relationships">
   <p:cSld>
@@ -38441,21 +38503,64 @@
                   <a:srgbClr val="006D77"/>
                 </a:solidFill>
               </a:rPr>
-              <a:t>Zafiyet yaşam döngüsü</a:t>
-            </a:r>
-          </a:p>
-        </p:txBody>
-      </p:sp>
-      <p:sp>
-        <p:nvSpPr>
-          <p:cNvPr id="7" name="Rectangle 6"/>
+              <a:t>Demo 05 — CVSS hesaplayıcı</a:t>
+            </a:r>
+          </a:p>
+        </p:txBody>
+      </p:sp>
+      <p:sp>
+        <p:nvSpPr>
+          <p:cNvPr id="7" name="TextBox 6"/>
+          <p:cNvSpPr txBox="1"/>
+          <p:nvPr/>
+        </p:nvSpPr>
+        <p:spPr>
+          <a:xfrm>
+            <a:off x="640080" y="1325880"/>
+            <a:ext cx="10911535" cy="439928"/>
+          </a:xfrm>
+          <a:prstGeom prst="rect">
+            <a:avLst/>
+          </a:prstGeom>
+          <a:noFill/>
+        </p:spPr>
+        <p:txBody>
+          <a:bodyPr wrap="square" lIns="45720" rIns="45720">
+            <a:spAutoFit/>
+          </a:bodyPr>
+          <a:lstStyle/>
+          <a:p>
+            <a:pPr algn="l"/>
+            <a:r>
+              <a:rPr sz="2000" b="0">
+                <a:solidFill>
+                  <a:srgbClr val="A1123F"/>
+                </a:solidFill>
+                <a:latin typeface="Consolas"/>
+              </a:rPr>
+              <a:t>code/week-02/05-cvss</a:t>
+            </a:r>
+            <a:r>
+              <a:rPr sz="2000" b="0">
+                <a:solidFill>
+                  <a:srgbClr val="1F2D3A"/>
+                </a:solidFill>
+              </a:rPr>
+              <a:t> (Python)</a:t>
+            </a:r>
+          </a:p>
+        </p:txBody>
+      </p:sp>
+      <p:sp>
+        <p:nvSpPr>
+          <p:cNvPr id="8" name="Rectangle 7"/>
           <p:cNvSpPr/>
           <p:nvPr/>
         </p:nvSpPr>
         <p:spPr>
           <a:xfrm>
-            <a:off x="640080" y="1325880"/>
-            <a:ext cx="10911535" cy="652272"/>
+            <a:off x="640080" y="1875536"/>
+            <a:ext cx="10911535" cy="841247"/>
           </a:xfrm>
           <a:prstGeom prst="rect">
             <a:avLst/>
@@ -38495,7 +38600,7 @@
                 </a:solidFill>
                 <a:latin typeface="Consolas"/>
               </a:rPr>
-              <a:t>Kesif -&gt; Ozel ifsa -&gt; Yama -&gt; Yama yayini -&gt; Kamuya acilma -&gt; Guncelleme</a:t>
+              <a:t>AV:N/AC:L/PR:N/UI:N/S:U/C:H/I:H/A:H  = 9.8  Kritik</a:t>
             </a:r>
           </a:p>
           <a:p>
@@ -38507,21 +38612,33 @@
                 </a:solidFill>
                 <a:latin typeface="Consolas"/>
               </a:rPr>
-              <a:t>   \.................. zero-day (yama yokken saldiri) ................/</a:t>
-            </a:r>
-          </a:p>
-        </p:txBody>
-      </p:sp>
-      <p:sp>
-        <p:nvSpPr>
-          <p:cNvPr id="8" name="TextBox 7"/>
-          <p:cNvSpPr txBox="1"/>
-          <p:nvPr/>
-        </p:nvSpPr>
-        <p:spPr>
-          <a:xfrm>
-            <a:off x="640080" y="2087880"/>
-            <a:ext cx="10911535" cy="1549400"/>
+              <a:t>              ... S:U -&gt; S:C          = 10.0 Kritik</a:t>
+            </a:r>
+          </a:p>
+          <a:p>
+            <a:pPr algn="l"/>
+            <a:r>
+              <a:rPr sz="1240">
+                <a:solidFill>
+                  <a:srgbClr val="1F2D3A"/>
+                </a:solidFill>
+                <a:latin typeface="Consolas"/>
+              </a:rPr>
+              <a:t>AV:L (yerel) /PR:L/... C:H/I:H/A:H    = 7.8  Yuksek</a:t>
+            </a:r>
+          </a:p>
+        </p:txBody>
+      </p:sp>
+      <p:sp>
+        <p:nvSpPr>
+          <p:cNvPr id="9" name="TextBox 8"/>
+          <p:cNvSpPr txBox="1"/>
+          <p:nvPr/>
+        </p:nvSpPr>
+        <p:spPr>
+          <a:xfrm>
+            <a:off x="640080" y="2826512"/>
+            <a:ext cx="10911535" cy="1173480"/>
           </a:xfrm>
           <a:prstGeom prst="rect">
             <a:avLst/>
@@ -38553,7 +38670,7 @@
                   <a:srgbClr val="1F2D3A"/>
                 </a:solidFill>
               </a:rPr>
-              <a:t>Zero-day:</a:t>
+              <a:t>Uzaktan + kimliksiz</a:t>
             </a:r>
             <a:r>
               <a:rPr sz="2000" b="0">
@@ -38561,7 +38678,7 @@
                   <a:srgbClr val="1F2D3A"/>
                 </a:solidFill>
               </a:rPr>
-              <a:t> satıcının bilmediği/yamasının olmadığı açık.</a:t>
+              <a:t> en yüksek; kapsam değişince 10.0.</a:t>
             </a:r>
           </a:p>
           <a:p>
@@ -38579,12 +38696,20 @@
               <a:t>• </a:t>
             </a:r>
             <a:r>
+              <a:rPr sz="2000" b="0">
+                <a:solidFill>
+                  <a:srgbClr val="1F2D3A"/>
+                </a:solidFill>
+              </a:rPr>
+              <a:t>⚠️ Temel puan </a:t>
+            </a:r>
+            <a:r>
               <a:rPr sz="2000" b="1">
                 <a:solidFill>
                   <a:srgbClr val="1F2D3A"/>
                 </a:solidFill>
               </a:rPr>
-              <a:t>Sorumlu ifşa:</a:t>
+              <a:t>bağlamı bilmez</a:t>
             </a:r>
             <a:r>
               <a:rPr sz="2000" b="0">
@@ -38592,38 +38717,7 @@
                   <a:srgbClr val="1F2D3A"/>
                 </a:solidFill>
               </a:rPr>
-              <a:t> önce satıcıya bildir, ~90 gün bekle, sonra açıkla.</a:t>
-            </a:r>
-          </a:p>
-          <a:p>
-            <a:pPr>
-              <a:spcAft>
-                <a:spcPts val="300"/>
-              </a:spcAft>
-            </a:pPr>
-            <a:r>
-              <a:rPr sz="2000" b="1">
-                <a:solidFill>
-                  <a:srgbClr val="006D77"/>
-                </a:solidFill>
-              </a:rPr>
-              <a:t>• </a:t>
-            </a:r>
-            <a:r>
-              <a:rPr sz="2000" b="1">
-                <a:solidFill>
-                  <a:srgbClr val="1F2D3A"/>
-                </a:solidFill>
-              </a:rPr>
-              <a:t>Yama boşluğu:</a:t>
-            </a:r>
-            <a:r>
-              <a:rPr sz="2000" b="0">
-                <a:solidFill>
-                  <a:srgbClr val="1F2D3A"/>
-                </a:solidFill>
-              </a:rPr>
-              <a:t> yama çıkınca açık kamuya açılır; güncellemeyen savunmasız (WannaCry).</a:t>
+              <a:t>: 4.0'lık açık tam sizin varlığınızı vuruyorsa sizin için 9.8'den önemli olabilir.</a:t>
             </a:r>
           </a:p>
         </p:txBody>
@@ -38798,216 +38892,21 @@
                   <a:srgbClr val="006D77"/>
                 </a:solidFill>
               </a:rPr>
-              <a:t>Dönem projesi: bu hafta (S4)</a:t>
-            </a:r>
-          </a:p>
-        </p:txBody>
-      </p:sp>
-      <p:sp>
-        <p:nvSpPr>
-          <p:cNvPr id="7" name="TextBox 6"/>
-          <p:cNvSpPr txBox="1"/>
+              <a:t>Zafiyet yaşam döngüsü</a:t>
+            </a:r>
+          </a:p>
+        </p:txBody>
+      </p:sp>
+      <p:sp>
+        <p:nvSpPr>
+          <p:cNvPr id="7" name="Rectangle 6"/>
+          <p:cNvSpPr/>
           <p:nvPr/>
         </p:nvSpPr>
         <p:spPr>
           <a:xfrm>
             <a:off x="640080" y="1325880"/>
-            <a:ext cx="10911535" cy="1925320"/>
-          </a:xfrm>
-          <a:prstGeom prst="rect">
-            <a:avLst/>
-          </a:prstGeom>
-          <a:noFill/>
-        </p:spPr>
-        <p:txBody>
-          <a:bodyPr wrap="square" lIns="45720" rIns="45720">
-            <a:spAutoFit/>
-          </a:bodyPr>
-          <a:lstStyle/>
-          <a:p>
-            <a:pPr>
-              <a:spcAft>
-                <a:spcPts val="300"/>
-              </a:spcAft>
-            </a:pPr>
-            <a:r>
-              <a:rPr sz="2000" b="1">
-                <a:solidFill>
-                  <a:srgbClr val="006D77"/>
-                </a:solidFill>
-              </a:rPr>
-              <a:t>• </a:t>
-            </a:r>
-            <a:r>
-              <a:rPr sz="2000" b="0">
-                <a:solidFill>
-                  <a:srgbClr val="1F2D3A"/>
-                </a:solidFill>
-              </a:rPr>
-              <a:t> </a:t>
-            </a:r>
-            <a:r>
-              <a:rPr sz="2000" b="1">
-                <a:solidFill>
-                  <a:srgbClr val="1F2D3A"/>
-                </a:solidFill>
-              </a:rPr>
-              <a:t>her satıra bir CWE</a:t>
-            </a:r>
-            <a:r>
-              <a:rPr sz="2000" b="0">
-                <a:solidFill>
-                  <a:srgbClr val="1F2D3A"/>
-                </a:solidFill>
-              </a:rPr>
-              <a:t> ekleyin.</a:t>
-            </a:r>
-          </a:p>
-          <a:p>
-            <a:pPr>
-              <a:spcAft>
-                <a:spcPts val="300"/>
-              </a:spcAft>
-            </a:pPr>
-            <a:r>
-              <a:rPr sz="2000" b="1">
-                <a:solidFill>
-                  <a:srgbClr val="006D77"/>
-                </a:solidFill>
-              </a:rPr>
-              <a:t>• </a:t>
-            </a:r>
-            <a:r>
-              <a:rPr sz="2000" b="0">
-                <a:solidFill>
-                  <a:srgbClr val="1F2D3A"/>
-                </a:solidFill>
-              </a:rPr>
-              <a:t> </a:t>
-            </a:r>
-            <a:r>
-              <a:rPr sz="2000" b="1">
-                <a:solidFill>
-                  <a:srgbClr val="1F2D3A"/>
-                </a:solidFill>
-              </a:rPr>
-              <a:t>saldırı ağacı</a:t>
-            </a:r>
-            <a:r>
-              <a:rPr sz="2000" b="0">
-                <a:solidFill>
-                  <a:srgbClr val="1F2D3A"/>
-                </a:solidFill>
-              </a:rPr>
-              <a:t> (Demo 04 biçimi); en ucuz yol + en etkili önlem.</a:t>
-            </a:r>
-          </a:p>
-          <a:p>
-            <a:pPr>
-              <a:spcAft>
-                <a:spcPts val="300"/>
-              </a:spcAft>
-            </a:pPr>
-            <a:r>
-              <a:rPr sz="2000" b="1">
-                <a:solidFill>
-                  <a:srgbClr val="006D77"/>
-                </a:solidFill>
-              </a:rPr>
-              <a:t>• </a:t>
-            </a:r>
-            <a:r>
-              <a:rPr sz="2000" b="0">
-                <a:solidFill>
-                  <a:srgbClr val="1F2D3A"/>
-                </a:solidFill>
-              </a:rPr>
-              <a:t> </a:t>
-            </a:r>
-            <a:r>
-              <a:rPr sz="2000" b="1">
-                <a:solidFill>
-                  <a:srgbClr val="1F2D3A"/>
-                </a:solidFill>
-              </a:rPr>
-              <a:t>CVE</a:t>
-            </a:r>
-            <a:r>
-              <a:rPr sz="2000" b="0">
-                <a:solidFill>
-                  <a:srgbClr val="1F2D3A"/>
-                </a:solidFill>
-              </a:rPr>
-              <a:t>'lerini bulup </a:t>
-            </a:r>
-            <a:r>
-              <a:rPr sz="2000" b="1">
-                <a:solidFill>
-                  <a:srgbClr val="1F2D3A"/>
-                </a:solidFill>
-              </a:rPr>
-              <a:t>CVSS</a:t>
-            </a:r>
-            <a:r>
-              <a:rPr sz="2000" b="0">
-                <a:solidFill>
-                  <a:srgbClr val="1F2D3A"/>
-                </a:solidFill>
-              </a:rPr>
-              <a:t> puanlayın.</a:t>
-            </a:r>
-          </a:p>
-          <a:p>
-            <a:pPr>
-              <a:spcAft>
-                <a:spcPts val="300"/>
-              </a:spcAft>
-            </a:pPr>
-            <a:r>
-              <a:rPr sz="2000" b="1">
-                <a:solidFill>
-                  <a:srgbClr val="006D77"/>
-                </a:solidFill>
-              </a:rPr>
-              <a:t>• </a:t>
-            </a:r>
-            <a:r>
-              <a:rPr sz="2000" b="0">
-                <a:solidFill>
-                  <a:srgbClr val="1F2D3A"/>
-                </a:solidFill>
-              </a:rPr>
-              <a:t> </a:t>
-            </a:r>
-            <a:r>
-              <a:rPr sz="2000" b="1">
-                <a:solidFill>
-                  <a:srgbClr val="1F2D3A"/>
-                </a:solidFill>
-              </a:rPr>
-              <a:t>erişim modelini</a:t>
-            </a:r>
-            <a:r>
-              <a:rPr sz="2000" b="0">
-                <a:solidFill>
-                  <a:srgbClr val="1F2D3A"/>
-                </a:solidFill>
-              </a:rPr>
-              <a:t> (DAC / MAC / RBAC) gerekçelendirin.</a:t>
-            </a:r>
-          </a:p>
-        </p:txBody>
-      </p:sp>
-      <p:sp>
-        <p:nvSpPr>
-          <p:cNvPr id="8" name="Rectangle 7"/>
-          <p:cNvSpPr/>
-          <p:nvPr/>
-        </p:nvSpPr>
-        <p:spPr>
-          <a:xfrm>
-            <a:off x="640080" y="3360928"/>
-            <a:ext cx="10911535" cy="463295"/>
+            <a:ext cx="10911535" cy="652272"/>
           </a:xfrm>
           <a:prstGeom prst="rect">
             <a:avLst/>
@@ -39047,7 +38946,135 @@
                 </a:solidFill>
                 <a:latin typeface="Consolas"/>
               </a:rPr>
-              <a:t>| ID | Tehdit | Varlik | Yol | CWE | Onlem | Bolum |</a:t>
+              <a:t>Kesif -&gt; Ozel ifsa -&gt; Yama -&gt; Yama yayini -&gt; Kamuya acilma -&gt; Guncelleme</a:t>
+            </a:r>
+          </a:p>
+          <a:p>
+            <a:pPr algn="l"/>
+            <a:r>
+              <a:rPr sz="1240">
+                <a:solidFill>
+                  <a:srgbClr val="1F2D3A"/>
+                </a:solidFill>
+                <a:latin typeface="Consolas"/>
+              </a:rPr>
+              <a:t>   \.................. zero-day (yama yokken saldiri) ................/</a:t>
+            </a:r>
+          </a:p>
+        </p:txBody>
+      </p:sp>
+      <p:sp>
+        <p:nvSpPr>
+          <p:cNvPr id="8" name="TextBox 7"/>
+          <p:cNvSpPr txBox="1"/>
+          <p:nvPr/>
+        </p:nvSpPr>
+        <p:spPr>
+          <a:xfrm>
+            <a:off x="640080" y="2087880"/>
+            <a:ext cx="10911535" cy="1549400"/>
+          </a:xfrm>
+          <a:prstGeom prst="rect">
+            <a:avLst/>
+          </a:prstGeom>
+          <a:noFill/>
+        </p:spPr>
+        <p:txBody>
+          <a:bodyPr wrap="square" lIns="45720" rIns="45720">
+            <a:spAutoFit/>
+          </a:bodyPr>
+          <a:lstStyle/>
+          <a:p>
+            <a:pPr>
+              <a:spcAft>
+                <a:spcPts val="300"/>
+              </a:spcAft>
+            </a:pPr>
+            <a:r>
+              <a:rPr sz="2000" b="1">
+                <a:solidFill>
+                  <a:srgbClr val="006D77"/>
+                </a:solidFill>
+              </a:rPr>
+              <a:t>• </a:t>
+            </a:r>
+            <a:r>
+              <a:rPr sz="2000" b="1">
+                <a:solidFill>
+                  <a:srgbClr val="1F2D3A"/>
+                </a:solidFill>
+              </a:rPr>
+              <a:t>Zero-day:</a:t>
+            </a:r>
+            <a:r>
+              <a:rPr sz="2000" b="0">
+                <a:solidFill>
+                  <a:srgbClr val="1F2D3A"/>
+                </a:solidFill>
+              </a:rPr>
+              <a:t> satıcının bilmediği/yamasının olmadığı açık.</a:t>
+            </a:r>
+          </a:p>
+          <a:p>
+            <a:pPr>
+              <a:spcAft>
+                <a:spcPts val="300"/>
+              </a:spcAft>
+            </a:pPr>
+            <a:r>
+              <a:rPr sz="2000" b="1">
+                <a:solidFill>
+                  <a:srgbClr val="006D77"/>
+                </a:solidFill>
+              </a:rPr>
+              <a:t>• </a:t>
+            </a:r>
+            <a:r>
+              <a:rPr sz="2000" b="1">
+                <a:solidFill>
+                  <a:srgbClr val="1F2D3A"/>
+                </a:solidFill>
+              </a:rPr>
+              <a:t>Sorumlu ifşa:</a:t>
+            </a:r>
+            <a:r>
+              <a:rPr sz="2000" b="0">
+                <a:solidFill>
+                  <a:srgbClr val="1F2D3A"/>
+                </a:solidFill>
+              </a:rPr>
+              <a:t> önce satıcıya bildir, ~90 gün bekle, sonra açıkla.</a:t>
+            </a:r>
+          </a:p>
+          <a:p>
+            <a:pPr>
+              <a:spcAft>
+                <a:spcPts val="300"/>
+              </a:spcAft>
+            </a:pPr>
+            <a:r>
+              <a:rPr sz="2000" b="1">
+                <a:solidFill>
+                  <a:srgbClr val="006D77"/>
+                </a:solidFill>
+              </a:rPr>
+              <a:t>• </a:t>
+            </a:r>
+            <a:r>
+              <a:rPr sz="2000" b="1">
+                <a:solidFill>
+                  <a:srgbClr val="1F2D3A"/>
+                </a:solidFill>
+              </a:rPr>
+              <a:t>Yama boşluğu:</a:t>
+            </a:r>
+            <a:r>
+              <a:rPr sz="2000" b="0">
+                <a:solidFill>
+                  <a:srgbClr val="1F2D3A"/>
+                </a:solidFill>
+              </a:rPr>
+              <a:t> yama çıkınca açık kamuya açılır; güncellemeyen savunmasız (WannaCry).</a:t>
             </a:r>
           </a:p>
         </p:txBody>
@@ -39222,7 +39249,7 @@
                   <a:srgbClr val="006D77"/>
                 </a:solidFill>
               </a:rPr>
-              <a:t>Kendini sınama (seçme)</a:t>
+              <a:t>Dönem projesi: bu hafta (S4)</a:t>
             </a:r>
           </a:p>
         </p:txBody>
@@ -39236,7 +39263,7 @@
         <p:spPr>
           <a:xfrm>
             <a:off x="640080" y="1325880"/>
-            <a:ext cx="10911535" cy="3098800"/>
+            <a:ext cx="10911535" cy="1925320"/>
           </a:xfrm>
           <a:prstGeom prst="rect">
             <a:avLst/>
@@ -39260,7 +39287,7 @@
                   <a:srgbClr val="006D77"/>
                 </a:solidFill>
               </a:rPr>
-              <a:t>1. </a:t>
+              <a:t>• </a:t>
             </a:r>
             <a:r>
               <a:rPr sz="2000" b="0">
@@ -39268,7 +39295,23 @@
                   <a:srgbClr val="1F2D3A"/>
                 </a:solidFill>
               </a:rPr>
-              <a:t>Virüs, solucan, truva atı farkı?</a:t>
+              <a:t> </a:t>
+            </a:r>
+            <a:r>
+              <a:rPr sz="2000" b="1">
+                <a:solidFill>
+                  <a:srgbClr val="1F2D3A"/>
+                </a:solidFill>
+              </a:rPr>
+              <a:t>her satıra bir CWE</a:t>
+            </a:r>
+            <a:r>
+              <a:rPr sz="2000" b="0">
+                <a:solidFill>
+                  <a:srgbClr val="1F2D3A"/>
+                </a:solidFill>
+              </a:rPr>
+              <a:t> ekleyin.</a:t>
             </a:r>
           </a:p>
           <a:p>
@@ -39283,7 +39326,7 @@
                   <a:srgbClr val="006D77"/>
                 </a:solidFill>
               </a:rPr>
-              <a:t>2. </a:t>
+              <a:t>• </a:t>
             </a:r>
             <a:r>
               <a:rPr sz="2000" b="0">
@@ -39291,7 +39334,23 @@
                   <a:srgbClr val="1F2D3A"/>
                 </a:solidFill>
               </a:rPr>
-              <a:t>Polimorfizm ≠ metamorfizm: fark?</a:t>
+              <a:t> </a:t>
+            </a:r>
+            <a:r>
+              <a:rPr sz="2000" b="1">
+                <a:solidFill>
+                  <a:srgbClr val="1F2D3A"/>
+                </a:solidFill>
+              </a:rPr>
+              <a:t>saldırı ağacı</a:t>
+            </a:r>
+            <a:r>
+              <a:rPr sz="2000" b="0">
+                <a:solidFill>
+                  <a:srgbClr val="1F2D3A"/>
+                </a:solidFill>
+              </a:rPr>
+              <a:t> (Demo 04 biçimi); en ucuz yol + en etkili önlem.</a:t>
             </a:r>
           </a:p>
           <a:p>
@@ -39306,7 +39365,7 @@
                   <a:srgbClr val="006D77"/>
                 </a:solidFill>
               </a:rPr>
-              <a:t>3. </a:t>
+              <a:t>• </a:t>
             </a:r>
             <a:r>
               <a:rPr sz="2000" b="0">
@@ -39314,7 +39373,7 @@
                   <a:srgbClr val="1F2D3A"/>
                 </a:solidFill>
               </a:rPr>
-              <a:t>Yüksek entropi zararlıyı </a:t>
+              <a:t> </a:t>
             </a:r>
             <a:r>
               <a:rPr sz="2000" b="1">
@@ -39322,7 +39381,7 @@
                   <a:srgbClr val="1F2D3A"/>
                 </a:solidFill>
               </a:rPr>
-              <a:t>kanıtlar</a:t>
+              <a:t>CVE</a:t>
             </a:r>
             <a:r>
               <a:rPr sz="2000" b="0">
@@ -39330,7 +39389,23 @@
                   <a:srgbClr val="1F2D3A"/>
                 </a:solidFill>
               </a:rPr>
-              <a:t> mı?</a:t>
+              <a:t>'lerini bulup </a:t>
+            </a:r>
+            <a:r>
+              <a:rPr sz="2000" b="1">
+                <a:solidFill>
+                  <a:srgbClr val="1F2D3A"/>
+                </a:solidFill>
+              </a:rPr>
+              <a:t>CVSS</a:t>
+            </a:r>
+            <a:r>
+              <a:rPr sz="2000" b="0">
+                <a:solidFill>
+                  <a:srgbClr val="1F2D3A"/>
+                </a:solidFill>
+              </a:rPr>
+              <a:t> puanlayın.</a:t>
             </a:r>
           </a:p>
           <a:p>
@@ -39345,7 +39420,7 @@
                   <a:srgbClr val="006D77"/>
                 </a:solidFill>
               </a:rPr>
-              <a:t>4. </a:t>
+              <a:t>• </a:t>
             </a:r>
             <a:r>
               <a:rPr sz="2000" b="0">
@@ -39353,22 +39428,15 @@
                   <a:srgbClr val="1F2D3A"/>
                 </a:solidFill>
               </a:rPr>
-              <a:t>BLP iki kuralı ve neyi korur?</a:t>
-            </a:r>
-          </a:p>
-          <a:p>
-            <a:pPr>
-              <a:spcAft>
-                <a:spcPts val="300"/>
-              </a:spcAft>
-            </a:pPr>
+              <a:t> </a:t>
+            </a:r>
             <a:r>
               <a:rPr sz="2000" b="1">
                 <a:solidFill>
-                  <a:srgbClr val="006D77"/>
-                </a:solidFill>
-              </a:rPr>
-              <a:t>5. </a:t>
+                  <a:srgbClr val="1F2D3A"/>
+                </a:solidFill>
+              </a:rPr>
+              <a:t>erişim modelini</a:t>
             </a:r>
             <a:r>
               <a:rPr sz="2000" b="0">
@@ -39376,76 +39444,61 @@
                   <a:srgbClr val="1F2D3A"/>
                 </a:solidFill>
               </a:rPr>
-              <a:t>Biba, BLP'den nasıl ayrılır?</a:t>
-            </a:r>
-          </a:p>
-          <a:p>
-            <a:pPr>
-              <a:spcAft>
-                <a:spcPts val="300"/>
-              </a:spcAft>
-            </a:pPr>
-            <a:r>
-              <a:rPr sz="2000" b="1">
-                <a:solidFill>
-                  <a:srgbClr val="006D77"/>
-                </a:solidFill>
-              </a:rPr>
-              <a:t>6. </a:t>
-            </a:r>
-            <a:r>
-              <a:rPr sz="2000" b="0">
-                <a:solidFill>
-                  <a:srgbClr val="1F2D3A"/>
-                </a:solidFill>
-              </a:rPr>
-              <a:t>DAC ile MAC farkı?</a:t>
-            </a:r>
-          </a:p>
-          <a:p>
-            <a:pPr>
-              <a:spcAft>
-                <a:spcPts val="300"/>
-              </a:spcAft>
-            </a:pPr>
-            <a:r>
-              <a:rPr sz="2000" b="1">
-                <a:solidFill>
-                  <a:srgbClr val="006D77"/>
-                </a:solidFill>
-              </a:rPr>
-              <a:t>7. </a:t>
-            </a:r>
-            <a:r>
-              <a:rPr sz="2000" b="0">
-                <a:solidFill>
-                  <a:srgbClr val="1F2D3A"/>
-                </a:solidFill>
-              </a:rPr>
-              <a:t>CWE ile CVE farkı?</a:t>
-            </a:r>
-          </a:p>
-          <a:p>
-            <a:pPr>
-              <a:spcAft>
-                <a:spcPts val="300"/>
-              </a:spcAft>
-            </a:pPr>
-            <a:r>
-              <a:rPr sz="2000" b="1">
-                <a:solidFill>
-                  <a:srgbClr val="006D77"/>
-                </a:solidFill>
-              </a:rPr>
-              <a:t>8. </a:t>
-            </a:r>
-            <a:r>
-              <a:rPr sz="2000" b="0">
-                <a:solidFill>
-                  <a:srgbClr val="1F2D3A"/>
-                </a:solidFill>
-              </a:rPr>
-              <a:t>CVSS Temel puan neyi ölçmez?</a:t>
+              <a:t> (DAC / MAC / RBAC) gerekçelendirin.</a:t>
+            </a:r>
+          </a:p>
+        </p:txBody>
+      </p:sp>
+      <p:sp>
+        <p:nvSpPr>
+          <p:cNvPr id="8" name="Rectangle 7"/>
+          <p:cNvSpPr/>
+          <p:nvPr/>
+        </p:nvSpPr>
+        <p:spPr>
+          <a:xfrm>
+            <a:off x="640080" y="3360928"/>
+            <a:ext cx="10911535" cy="463295"/>
+          </a:xfrm>
+          <a:prstGeom prst="rect">
+            <a:avLst/>
+          </a:prstGeom>
+          <a:solidFill>
+            <a:srgbClr val="F3F4F6"/>
+          </a:solidFill>
+          <a:ln>
+            <a:solidFill>
+              <a:srgbClr val="D9DEE3"/>
+            </a:solidFill>
+          </a:ln>
+        </p:spPr>
+        <p:style>
+          <a:lnRef idx="1">
+            <a:schemeClr val="accent1"/>
+          </a:lnRef>
+          <a:fillRef idx="3">
+            <a:schemeClr val="accent1"/>
+          </a:fillRef>
+          <a:effectRef idx="2">
+            <a:schemeClr val="accent1"/>
+          </a:effectRef>
+          <a:fontRef idx="minor">
+            <a:schemeClr val="lt1"/>
+          </a:fontRef>
+        </p:style>
+        <p:txBody>
+          <a:bodyPr rtlCol="0" anchor="t" wrap="none" lIns="137160" rIns="137160" tIns="91440" bIns="91440"/>
+          <a:lstStyle/>
+          <a:p>
+            <a:pPr algn="l"/>
+            <a:r>
+              <a:rPr sz="1240">
+                <a:solidFill>
+                  <a:srgbClr val="1F2D3A"/>
+                </a:solidFill>
+                <a:latin typeface="Consolas"/>
+              </a:rPr>
+              <a:t>| ID | Tehdit | Varlik | Yol | CWE | Onlem | Bolum |</a:t>
             </a:r>
           </a:p>
         </p:txBody>
@@ -39615,12 +39668,12 @@
           <a:lstStyle/>
           <a:p>
             <a:r>
-              <a:rPr sz="2600" b="1">
+              <a:rPr sz="3000" b="1">
                 <a:solidFill>
                   <a:srgbClr val="006D77"/>
                 </a:solidFill>
               </a:rPr>
-              <a:t>Kendini sınama — cevaplar (1–4)</a:t>
+              <a:t>Kendini sınama (seçme)</a:t>
             </a:r>
           </a:p>
         </p:txBody>
@@ -39634,7 +39687,7 @@
         <p:spPr>
           <a:xfrm>
             <a:off x="640080" y="1325880"/>
-            <a:ext cx="10911535" cy="2057400"/>
+            <a:ext cx="10911535" cy="3098800"/>
           </a:xfrm>
           <a:prstGeom prst="rect">
             <a:avLst/>
@@ -39653,7 +39706,7 @@
               </a:spcAft>
             </a:pPr>
             <a:r>
-              <a:rPr sz="1800" b="1">
+              <a:rPr sz="2000" b="1">
                 <a:solidFill>
                   <a:srgbClr val="006D77"/>
                 </a:solidFill>
@@ -39661,52 +39714,12 @@
               <a:t>1. </a:t>
             </a:r>
             <a:r>
-              <a:rPr sz="1800" b="1">
-                <a:solidFill>
-                  <a:srgbClr val="1F2D3A"/>
-                </a:solidFill>
-              </a:rPr>
-              <a:t>Virüs</a:t>
-            </a:r>
-            <a:r>
-              <a:rPr sz="1800" b="0">
-                <a:solidFill>
-                  <a:srgbClr val="1F2D3A"/>
-                </a:solidFill>
-              </a:rPr>
-              <a:t> başka programa bulaşır; </a:t>
-            </a:r>
-            <a:r>
-              <a:rPr sz="1800" b="1">
-                <a:solidFill>
-                  <a:srgbClr val="1F2D3A"/>
-                </a:solidFill>
-              </a:rPr>
-              <a:t>solucan</a:t>
-            </a:r>
-            <a:r>
-              <a:rPr sz="1800" b="0">
-                <a:solidFill>
-                  <a:srgbClr val="1F2D3A"/>
-                </a:solidFill>
-              </a:rPr>
-              <a:t> kendi başına ağdan kopyalar; </a:t>
-            </a:r>
-            <a:r>
-              <a:rPr sz="1800" b="1">
-                <a:solidFill>
-                  <a:srgbClr val="1F2D3A"/>
-                </a:solidFill>
-              </a:rPr>
-              <a:t>truva atı</a:t>
-            </a:r>
-            <a:r>
-              <a:rPr sz="1800" b="0">
-                <a:solidFill>
-                  <a:srgbClr val="1F2D3A"/>
-                </a:solidFill>
-              </a:rPr>
-              <a:t> faydalı görünüp gizli zararlı taşır.</a:t>
+              <a:rPr sz="2000" b="0">
+                <a:solidFill>
+                  <a:srgbClr val="1F2D3A"/>
+                </a:solidFill>
+              </a:rPr>
+              <a:t>Virüs, solucan, truva atı farkı?</a:t>
             </a:r>
           </a:p>
           <a:p>
@@ -39716,7 +39729,7 @@
               </a:spcAft>
             </a:pPr>
             <a:r>
-              <a:rPr sz="1800" b="1">
+              <a:rPr sz="2000" b="1">
                 <a:solidFill>
                   <a:srgbClr val="006D77"/>
                 </a:solidFill>
@@ -39724,68 +39737,12 @@
               <a:t>2. </a:t>
             </a:r>
             <a:r>
-              <a:rPr sz="1800" b="1">
-                <a:solidFill>
-                  <a:srgbClr val="1F2D3A"/>
-                </a:solidFill>
-              </a:rPr>
-              <a:t>Polimorfik</a:t>
-            </a:r>
-            <a:r>
-              <a:rPr sz="1800" b="0">
-                <a:solidFill>
-                  <a:srgbClr val="1F2D3A"/>
-                </a:solidFill>
-              </a:rPr>
-              <a:t> her kopyada kendini farklı </a:t>
-            </a:r>
-            <a:r>
-              <a:rPr sz="1800" b="1">
-                <a:solidFill>
-                  <a:srgbClr val="1F2D3A"/>
-                </a:solidFill>
-              </a:rPr>
-              <a:t>şifreler</a:t>
-            </a:r>
-            <a:r>
-              <a:rPr sz="1800" b="0">
-                <a:solidFill>
-                  <a:srgbClr val="1F2D3A"/>
-                </a:solidFill>
-              </a:rPr>
-              <a:t>; </a:t>
-            </a:r>
-            <a:r>
-              <a:rPr sz="1800" b="1">
-                <a:solidFill>
-                  <a:srgbClr val="1F2D3A"/>
-                </a:solidFill>
-              </a:rPr>
-              <a:t>metamorfik</a:t>
-            </a:r>
-            <a:r>
-              <a:rPr sz="1800" b="0">
-                <a:solidFill>
-                  <a:srgbClr val="1F2D3A"/>
-                </a:solidFill>
-              </a:rPr>
-              <a:t> kodunu </a:t>
-            </a:r>
-            <a:r>
-              <a:rPr sz="1800" b="1">
-                <a:solidFill>
-                  <a:srgbClr val="1F2D3A"/>
-                </a:solidFill>
-              </a:rPr>
-              <a:t>yeniden yazar</a:t>
-            </a:r>
-            <a:r>
-              <a:rPr sz="1800" b="0">
-                <a:solidFill>
-                  <a:srgbClr val="1F2D3A"/>
-                </a:solidFill>
-              </a:rPr>
-              <a:t>.</a:t>
+              <a:rPr sz="2000" b="0">
+                <a:solidFill>
+                  <a:srgbClr val="1F2D3A"/>
+                </a:solidFill>
+              </a:rPr>
+              <a:t>Polimorfizm ≠ metamorfizm: fark?</a:t>
             </a:r>
           </a:p>
           <a:p>
@@ -39795,7 +39752,7 @@
               </a:spcAft>
             </a:pPr>
             <a:r>
-              <a:rPr sz="1800" b="1">
+              <a:rPr sz="2000" b="1">
                 <a:solidFill>
                   <a:srgbClr val="006D77"/>
                 </a:solidFill>
@@ -39803,36 +39760,28 @@
               <a:t>3. </a:t>
             </a:r>
             <a:r>
-              <a:rPr sz="1800" b="1">
-                <a:solidFill>
-                  <a:srgbClr val="1F2D3A"/>
-                </a:solidFill>
-              </a:rPr>
-              <a:t>Hayır.</a:t>
-            </a:r>
-            <a:r>
-              <a:rPr sz="1800" b="0">
-                <a:solidFill>
-                  <a:srgbClr val="1F2D3A"/>
-                </a:solidFill>
-              </a:rPr>
-              <a:t> Yüksek entropi bir </a:t>
-            </a:r>
-            <a:r>
-              <a:rPr sz="1800" b="1">
-                <a:solidFill>
-                  <a:srgbClr val="1F2D3A"/>
-                </a:solidFill>
-              </a:rPr>
-              <a:t>ipucudur</a:t>
-            </a:r>
-            <a:r>
-              <a:rPr sz="1800" b="0">
-                <a:solidFill>
-                  <a:srgbClr val="1F2D3A"/>
-                </a:solidFill>
-              </a:rPr>
-              <a:t> (şifreli/paketli); tek başına zararlıyı kanıtlamaz (meşru sıkıştırma da yüksek entropili).</a:t>
+              <a:rPr sz="2000" b="0">
+                <a:solidFill>
+                  <a:srgbClr val="1F2D3A"/>
+                </a:solidFill>
+              </a:rPr>
+              <a:t>Yüksek entropi zararlıyı </a:t>
+            </a:r>
+            <a:r>
+              <a:rPr sz="2000" b="1">
+                <a:solidFill>
+                  <a:srgbClr val="1F2D3A"/>
+                </a:solidFill>
+              </a:rPr>
+              <a:t>kanıtlar</a:t>
+            </a:r>
+            <a:r>
+              <a:rPr sz="2000" b="0">
+                <a:solidFill>
+                  <a:srgbClr val="1F2D3A"/>
+                </a:solidFill>
+              </a:rPr>
+              <a:t> mı?</a:t>
             </a:r>
           </a:p>
           <a:p>
@@ -39842,7 +39791,7 @@
               </a:spcAft>
             </a:pPr>
             <a:r>
-              <a:rPr sz="1800" b="1">
+              <a:rPr sz="2000" b="1">
                 <a:solidFill>
                   <a:srgbClr val="006D77"/>
                 </a:solidFill>
@@ -39850,36 +39799,104 @@
               <a:t>4. </a:t>
             </a:r>
             <a:r>
-              <a:rPr sz="1800" b="1">
-                <a:solidFill>
-                  <a:srgbClr val="1F2D3A"/>
-                </a:solidFill>
-              </a:rPr>
-              <a:t>BLP:</a:t>
-            </a:r>
-            <a:r>
-              <a:rPr sz="1800" b="0">
-                <a:solidFill>
-                  <a:srgbClr val="1F2D3A"/>
-                </a:solidFill>
-              </a:rPr>
-              <a:t> yukarı okuma yok + aşağı yazma yok → </a:t>
-            </a:r>
-            <a:r>
-              <a:rPr sz="1800" b="1">
-                <a:solidFill>
-                  <a:srgbClr val="1F2D3A"/>
-                </a:solidFill>
-              </a:rPr>
-              <a:t>gizliliği</a:t>
-            </a:r>
-            <a:r>
-              <a:rPr sz="1800" b="0">
-                <a:solidFill>
-                  <a:srgbClr val="1F2D3A"/>
-                </a:solidFill>
-              </a:rPr>
-              <a:t> korur.</a:t>
+              <a:rPr sz="2000" b="0">
+                <a:solidFill>
+                  <a:srgbClr val="1F2D3A"/>
+                </a:solidFill>
+              </a:rPr>
+              <a:t>BLP iki kuralı ve neyi korur?</a:t>
+            </a:r>
+          </a:p>
+          <a:p>
+            <a:pPr>
+              <a:spcAft>
+                <a:spcPts val="300"/>
+              </a:spcAft>
+            </a:pPr>
+            <a:r>
+              <a:rPr sz="2000" b="1">
+                <a:solidFill>
+                  <a:srgbClr val="006D77"/>
+                </a:solidFill>
+              </a:rPr>
+              <a:t>5. </a:t>
+            </a:r>
+            <a:r>
+              <a:rPr sz="2000" b="0">
+                <a:solidFill>
+                  <a:srgbClr val="1F2D3A"/>
+                </a:solidFill>
+              </a:rPr>
+              <a:t>Biba, BLP'den nasıl ayrılır?</a:t>
+            </a:r>
+          </a:p>
+          <a:p>
+            <a:pPr>
+              <a:spcAft>
+                <a:spcPts val="300"/>
+              </a:spcAft>
+            </a:pPr>
+            <a:r>
+              <a:rPr sz="2000" b="1">
+                <a:solidFill>
+                  <a:srgbClr val="006D77"/>
+                </a:solidFill>
+              </a:rPr>
+              <a:t>6. </a:t>
+            </a:r>
+            <a:r>
+              <a:rPr sz="2000" b="0">
+                <a:solidFill>
+                  <a:srgbClr val="1F2D3A"/>
+                </a:solidFill>
+              </a:rPr>
+              <a:t>DAC ile MAC farkı?</a:t>
+            </a:r>
+          </a:p>
+          <a:p>
+            <a:pPr>
+              <a:spcAft>
+                <a:spcPts val="300"/>
+              </a:spcAft>
+            </a:pPr>
+            <a:r>
+              <a:rPr sz="2000" b="1">
+                <a:solidFill>
+                  <a:srgbClr val="006D77"/>
+                </a:solidFill>
+              </a:rPr>
+              <a:t>7. </a:t>
+            </a:r>
+            <a:r>
+              <a:rPr sz="2000" b="0">
+                <a:solidFill>
+                  <a:srgbClr val="1F2D3A"/>
+                </a:solidFill>
+              </a:rPr>
+              <a:t>CWE ile CVE farkı?</a:t>
+            </a:r>
+          </a:p>
+          <a:p>
+            <a:pPr>
+              <a:spcAft>
+                <a:spcPts val="300"/>
+              </a:spcAft>
+            </a:pPr>
+            <a:r>
+              <a:rPr sz="2000" b="1">
+                <a:solidFill>
+                  <a:srgbClr val="006D77"/>
+                </a:solidFill>
+              </a:rPr>
+              <a:t>8. </a:t>
+            </a:r>
+            <a:r>
+              <a:rPr sz="2000" b="0">
+                <a:solidFill>
+                  <a:srgbClr val="1F2D3A"/>
+                </a:solidFill>
+              </a:rPr>
+              <a:t>CVSS Temel puan neyi ölçmez?</a:t>
             </a:r>
           </a:p>
         </p:txBody>
@@ -40054,7 +40071,7 @@
                   <a:srgbClr val="006D77"/>
                 </a:solidFill>
               </a:rPr>
-              <a:t>Kendini sınama — cevaplar (5–8)</a:t>
+              <a:t>Kendini sınama — cevaplar (1–4)</a:t>
             </a:r>
           </a:p>
         </p:txBody>
@@ -40100,7 +40117,7 @@
                   <a:srgbClr val="1F2D3A"/>
                 </a:solidFill>
               </a:rPr>
-              <a:t>Biba</a:t>
+              <a:t>Virüs</a:t>
             </a:r>
             <a:r>
               <a:rPr sz="1800" b="0">
@@ -40108,7 +40125,7 @@
                   <a:srgbClr val="1F2D3A"/>
                 </a:solidFill>
               </a:rPr>
-              <a:t> BLP'nin tersidir: aşağı okuma yok + yukarı yazma yok → </a:t>
+              <a:t> başka programa bulaşır; </a:t>
             </a:r>
             <a:r>
               <a:rPr sz="1800" b="1">
@@ -40116,7 +40133,7 @@
                   <a:srgbClr val="1F2D3A"/>
                 </a:solidFill>
               </a:rPr>
-              <a:t>bütünlüğü</a:t>
+              <a:t>solucan</a:t>
             </a:r>
             <a:r>
               <a:rPr sz="1800" b="0">
@@ -40124,7 +40141,23 @@
                   <a:srgbClr val="1F2D3A"/>
                 </a:solidFill>
               </a:rPr>
-              <a:t> korur.</a:t>
+              <a:t> kendi başına ağdan kopyalar; </a:t>
+            </a:r>
+            <a:r>
+              <a:rPr sz="1800" b="1">
+                <a:solidFill>
+                  <a:srgbClr val="1F2D3A"/>
+                </a:solidFill>
+              </a:rPr>
+              <a:t>truva atı</a:t>
+            </a:r>
+            <a:r>
+              <a:rPr sz="1800" b="0">
+                <a:solidFill>
+                  <a:srgbClr val="1F2D3A"/>
+                </a:solidFill>
+              </a:rPr>
+              <a:t> faydalı görünüp gizli zararlı taşır.</a:t>
             </a:r>
           </a:p>
           <a:p>
@@ -40147,7 +40180,7 @@
                   <a:srgbClr val="1F2D3A"/>
                 </a:solidFill>
               </a:rPr>
-              <a:t>DAC</a:t>
+              <a:t>Polimorfik</a:t>
             </a:r>
             <a:r>
               <a:rPr sz="1800" b="0">
@@ -40155,7 +40188,7 @@
                   <a:srgbClr val="1F2D3A"/>
                 </a:solidFill>
               </a:rPr>
-              <a:t> izinleri sahibi belirler (esnek, sızıntıya açık); </a:t>
+              <a:t> her kopyada kendini farklı </a:t>
             </a:r>
             <a:r>
               <a:rPr sz="1800" b="1">
@@ -40163,7 +40196,7 @@
                   <a:srgbClr val="1F2D3A"/>
                 </a:solidFill>
               </a:rPr>
-              <a:t>MAC</a:t>
+              <a:t>şifreler</a:t>
             </a:r>
             <a:r>
               <a:rPr sz="1800" b="0">
@@ -40171,7 +40204,39 @@
                   <a:srgbClr val="1F2D3A"/>
                 </a:solidFill>
               </a:rPr>
-              <a:t> sistemin zorunlu etiketli kuralları (katı).</a:t>
+              <a:t>; </a:t>
+            </a:r>
+            <a:r>
+              <a:rPr sz="1800" b="1">
+                <a:solidFill>
+                  <a:srgbClr val="1F2D3A"/>
+                </a:solidFill>
+              </a:rPr>
+              <a:t>metamorfik</a:t>
+            </a:r>
+            <a:r>
+              <a:rPr sz="1800" b="0">
+                <a:solidFill>
+                  <a:srgbClr val="1F2D3A"/>
+                </a:solidFill>
+              </a:rPr>
+              <a:t> kodunu </a:t>
+            </a:r>
+            <a:r>
+              <a:rPr sz="1800" b="1">
+                <a:solidFill>
+                  <a:srgbClr val="1F2D3A"/>
+                </a:solidFill>
+              </a:rPr>
+              <a:t>yeniden yazar</a:t>
+            </a:r>
+            <a:r>
+              <a:rPr sz="1800" b="0">
+                <a:solidFill>
+                  <a:srgbClr val="1F2D3A"/>
+                </a:solidFill>
+              </a:rPr>
+              <a:t>.</a:t>
             </a:r>
           </a:p>
           <a:p>
@@ -40194,7 +40259,7 @@
                   <a:srgbClr val="1F2D3A"/>
                 </a:solidFill>
               </a:rPr>
-              <a:t>CWE</a:t>
+              <a:t>Hayır.</a:t>
             </a:r>
             <a:r>
               <a:rPr sz="1800" b="0">
@@ -40202,7 +40267,7 @@
                   <a:srgbClr val="1F2D3A"/>
                 </a:solidFill>
               </a:rPr>
-              <a:t> zayıflık </a:t>
+              <a:t> Yüksek entropi bir </a:t>
             </a:r>
             <a:r>
               <a:rPr sz="1800" b="1">
@@ -40210,7 +40275,7 @@
                   <a:srgbClr val="1F2D3A"/>
                 </a:solidFill>
               </a:rPr>
-              <a:t>türü</a:t>
+              <a:t>ipucudur</a:t>
             </a:r>
             <a:r>
               <a:rPr sz="1800" b="0">
@@ -40218,39 +40283,7 @@
                   <a:srgbClr val="1F2D3A"/>
                 </a:solidFill>
               </a:rPr>
-              <a:t> (ör. CWE-416); </a:t>
-            </a:r>
-            <a:r>
-              <a:rPr sz="1800" b="1">
-                <a:solidFill>
-                  <a:srgbClr val="1F2D3A"/>
-                </a:solidFill>
-              </a:rPr>
-              <a:t>CVE</a:t>
-            </a:r>
-            <a:r>
-              <a:rPr sz="1800" b="0">
-                <a:solidFill>
-                  <a:srgbClr val="1F2D3A"/>
-                </a:solidFill>
-              </a:rPr>
-              <a:t> belirli bir üründeki </a:t>
-            </a:r>
-            <a:r>
-              <a:rPr sz="1800" b="1">
-                <a:solidFill>
-                  <a:srgbClr val="1F2D3A"/>
-                </a:solidFill>
-              </a:rPr>
-              <a:t>somut</a:t>
-            </a:r>
-            <a:r>
-              <a:rPr sz="1800" b="0">
-                <a:solidFill>
-                  <a:srgbClr val="1F2D3A"/>
-                </a:solidFill>
-              </a:rPr>
-              <a:t> açık.</a:t>
+              <a:t> (şifreli/paketli); tek başına zararlıyı kanıtlamaz (meşru sıkıştırma da yüksek entropili).</a:t>
             </a:r>
           </a:p>
           <a:p>
@@ -40273,7 +40306,7 @@
                   <a:srgbClr val="1F2D3A"/>
                 </a:solidFill>
               </a:rPr>
-              <a:t>CVSS Temel puan</a:t>
+              <a:t>BLP:</a:t>
             </a:r>
             <a:r>
               <a:rPr sz="1800" b="0">
@@ -40281,7 +40314,7 @@
                   <a:srgbClr val="1F2D3A"/>
                 </a:solidFill>
               </a:rPr>
-              <a:t> olabilirliği/etkiyi ölçer ama </a:t>
+              <a:t> yukarı okuma yok + aşağı yazma yok → </a:t>
             </a:r>
             <a:r>
               <a:rPr sz="1800" b="1">
@@ -40289,7 +40322,7 @@
                   <a:srgbClr val="1F2D3A"/>
                 </a:solidFill>
               </a:rPr>
-              <a:t>istismarın sahada gerçekleşme olasılığını</a:t>
+              <a:t>gizliliği</a:t>
             </a:r>
             <a:r>
               <a:rPr sz="1800" b="0">
@@ -40297,7 +40330,7 @@
                   <a:srgbClr val="1F2D3A"/>
                 </a:solidFill>
               </a:rPr>
-              <a:t> (tehdit/ortam) tek başına ölçmez.</a:t>
+              <a:t> korur.</a:t>
             </a:r>
           </a:p>
         </p:txBody>
@@ -40452,28 +40485,27 @@
         </p:nvSpPr>
         <p:spPr>
           <a:xfrm>
-            <a:off x="640080" y="2194560"/>
-            <a:ext cx="10911535" cy="1280160"/>
-          </a:xfrm>
-          <a:prstGeom prst="rect">
-            <a:avLst/>
-          </a:prstGeom>
-          <a:noFill/>
-        </p:spPr>
-        <p:txBody>
-          <a:bodyPr wrap="square" lIns="45720" rIns="45720">
-            <a:spAutoFit/>
-          </a:bodyPr>
-          <a:lstStyle/>
-          <a:p>
-            <a:pPr algn="ctr"/>
-            <a:r>
-              <a:rPr sz="4000" b="1">
+            <a:off x="640080" y="548640"/>
+            <a:ext cx="10911535" cy="731520"/>
+          </a:xfrm>
+          <a:prstGeom prst="rect">
+            <a:avLst/>
+          </a:prstGeom>
+          <a:noFill/>
+        </p:spPr>
+        <p:txBody>
+          <a:bodyPr wrap="square" lIns="45720" rIns="45720" anchor="ctr">
+            <a:spAutoFit/>
+          </a:bodyPr>
+          <a:lstStyle/>
+          <a:p>
+            <a:r>
+              <a:rPr sz="2600" b="1">
                 <a:solidFill>
                   <a:srgbClr val="006D77"/>
                 </a:solidFill>
               </a:rPr>
-              <a:t>Gelecek hafta</a:t>
+              <a:t>Kendini sınama — cevaplar (5–8)</a:t>
             </a:r>
           </a:p>
         </p:txBody>
@@ -40486,96 +40518,237 @@
         </p:nvSpPr>
         <p:spPr>
           <a:xfrm>
-            <a:off x="640080" y="3566160"/>
-            <a:ext cx="10911535" cy="439928"/>
-          </a:xfrm>
-          <a:prstGeom prst="rect">
-            <a:avLst/>
-          </a:prstGeom>
-          <a:noFill/>
-        </p:spPr>
-        <p:txBody>
-          <a:bodyPr wrap="square" lIns="45720" rIns="45720">
-            <a:spAutoFit/>
-          </a:bodyPr>
-          <a:lstStyle/>
-          <a:p>
-            <a:pPr algn="ctr"/>
-            <a:r>
-              <a:rPr sz="2000" b="1">
-                <a:solidFill>
-                  <a:srgbClr val="1F2D3A"/>
-                </a:solidFill>
-              </a:rPr>
-              <a:t>Hafta 3 — Veri Güvenliği: Aktarımda, Beklemede, Kullanımda</a:t>
-            </a:r>
-          </a:p>
-        </p:txBody>
-      </p:sp>
-      <p:sp>
-        <p:nvSpPr>
-          <p:cNvPr id="8" name="TextBox 7"/>
-          <p:cNvSpPr txBox="1"/>
-          <p:nvPr/>
-        </p:nvSpPr>
-        <p:spPr>
-          <a:xfrm>
-            <a:off x="640080" y="4051808"/>
-            <a:ext cx="10911535" cy="770128"/>
-          </a:xfrm>
-          <a:prstGeom prst="rect">
-            <a:avLst/>
-          </a:prstGeom>
-          <a:noFill/>
-        </p:spPr>
-        <p:txBody>
-          <a:bodyPr wrap="square" lIns="45720" rIns="45720">
-            <a:spAutoFit/>
-          </a:bodyPr>
-          <a:lstStyle/>
-          <a:p>
-            <a:pPr algn="ctr"/>
-            <a:r>
-              <a:rPr sz="2000" b="0">
-                <a:solidFill>
-                  <a:srgbClr val="1F2D3A"/>
-                </a:solidFill>
-              </a:rPr>
-              <a:t>Şifreleme temelleri · TLS 1.3 ve sertifika sabitleme · AES-GCM ile yerel şifreleme · güvenli silme</a:t>
-            </a:r>
-          </a:p>
-        </p:txBody>
-      </p:sp>
-      <p:sp>
-        <p:nvSpPr>
-          <p:cNvPr id="9" name="TextBox 8"/>
-          <p:cNvSpPr txBox="1"/>
-          <p:nvPr/>
-        </p:nvSpPr>
-        <p:spPr>
-          <a:xfrm>
-            <a:off x="640080" y="4867656"/>
-            <a:ext cx="10911535" cy="439928"/>
-          </a:xfrm>
-          <a:prstGeom prst="rect">
-            <a:avLst/>
-          </a:prstGeom>
-          <a:noFill/>
-        </p:spPr>
-        <p:txBody>
-          <a:bodyPr wrap="square" lIns="45720" rIns="45720">
-            <a:spAutoFit/>
-          </a:bodyPr>
-          <a:lstStyle/>
-          <a:p>
-            <a:pPr algn="ctr"/>
-            <a:r>
-              <a:rPr sz="2000" b="0">
-                <a:solidFill>
-                  <a:srgbClr val="1F2D3A"/>
-                </a:solidFill>
-              </a:rPr>
-              <a:t>Kaynak: Viega &amp; Messier, Tarif 9.1–9.3, 10.7–10.9, 4.9–4.11, 13.2</a:t>
+            <a:off x="640080" y="1325880"/>
+            <a:ext cx="10911535" cy="2057400"/>
+          </a:xfrm>
+          <a:prstGeom prst="rect">
+            <a:avLst/>
+          </a:prstGeom>
+          <a:noFill/>
+        </p:spPr>
+        <p:txBody>
+          <a:bodyPr wrap="square" lIns="45720" rIns="45720">
+            <a:spAutoFit/>
+          </a:bodyPr>
+          <a:lstStyle/>
+          <a:p>
+            <a:pPr>
+              <a:spcAft>
+                <a:spcPts val="300"/>
+              </a:spcAft>
+            </a:pPr>
+            <a:r>
+              <a:rPr sz="1800" b="1">
+                <a:solidFill>
+                  <a:srgbClr val="006D77"/>
+                </a:solidFill>
+              </a:rPr>
+              <a:t>1. </a:t>
+            </a:r>
+            <a:r>
+              <a:rPr sz="1800" b="1">
+                <a:solidFill>
+                  <a:srgbClr val="1F2D3A"/>
+                </a:solidFill>
+              </a:rPr>
+              <a:t>Biba</a:t>
+            </a:r>
+            <a:r>
+              <a:rPr sz="1800" b="0">
+                <a:solidFill>
+                  <a:srgbClr val="1F2D3A"/>
+                </a:solidFill>
+              </a:rPr>
+              <a:t> BLP'nin tersidir: aşağı okuma yok + yukarı yazma yok → </a:t>
+            </a:r>
+            <a:r>
+              <a:rPr sz="1800" b="1">
+                <a:solidFill>
+                  <a:srgbClr val="1F2D3A"/>
+                </a:solidFill>
+              </a:rPr>
+              <a:t>bütünlüğü</a:t>
+            </a:r>
+            <a:r>
+              <a:rPr sz="1800" b="0">
+                <a:solidFill>
+                  <a:srgbClr val="1F2D3A"/>
+                </a:solidFill>
+              </a:rPr>
+              <a:t> korur.</a:t>
+            </a:r>
+          </a:p>
+          <a:p>
+            <a:pPr>
+              <a:spcAft>
+                <a:spcPts val="300"/>
+              </a:spcAft>
+            </a:pPr>
+            <a:r>
+              <a:rPr sz="1800" b="1">
+                <a:solidFill>
+                  <a:srgbClr val="006D77"/>
+                </a:solidFill>
+              </a:rPr>
+              <a:t>2. </a:t>
+            </a:r>
+            <a:r>
+              <a:rPr sz="1800" b="1">
+                <a:solidFill>
+                  <a:srgbClr val="1F2D3A"/>
+                </a:solidFill>
+              </a:rPr>
+              <a:t>DAC</a:t>
+            </a:r>
+            <a:r>
+              <a:rPr sz="1800" b="0">
+                <a:solidFill>
+                  <a:srgbClr val="1F2D3A"/>
+                </a:solidFill>
+              </a:rPr>
+              <a:t> izinleri sahibi belirler (esnek, sızıntıya açık); </a:t>
+            </a:r>
+            <a:r>
+              <a:rPr sz="1800" b="1">
+                <a:solidFill>
+                  <a:srgbClr val="1F2D3A"/>
+                </a:solidFill>
+              </a:rPr>
+              <a:t>MAC</a:t>
+            </a:r>
+            <a:r>
+              <a:rPr sz="1800" b="0">
+                <a:solidFill>
+                  <a:srgbClr val="1F2D3A"/>
+                </a:solidFill>
+              </a:rPr>
+              <a:t> sistemin zorunlu etiketli kuralları (katı).</a:t>
+            </a:r>
+          </a:p>
+          <a:p>
+            <a:pPr>
+              <a:spcAft>
+                <a:spcPts val="300"/>
+              </a:spcAft>
+            </a:pPr>
+            <a:r>
+              <a:rPr sz="1800" b="1">
+                <a:solidFill>
+                  <a:srgbClr val="006D77"/>
+                </a:solidFill>
+              </a:rPr>
+              <a:t>3. </a:t>
+            </a:r>
+            <a:r>
+              <a:rPr sz="1800" b="1">
+                <a:solidFill>
+                  <a:srgbClr val="1F2D3A"/>
+                </a:solidFill>
+              </a:rPr>
+              <a:t>CWE</a:t>
+            </a:r>
+            <a:r>
+              <a:rPr sz="1800" b="0">
+                <a:solidFill>
+                  <a:srgbClr val="1F2D3A"/>
+                </a:solidFill>
+              </a:rPr>
+              <a:t> zayıflık </a:t>
+            </a:r>
+            <a:r>
+              <a:rPr sz="1800" b="1">
+                <a:solidFill>
+                  <a:srgbClr val="1F2D3A"/>
+                </a:solidFill>
+              </a:rPr>
+              <a:t>türü</a:t>
+            </a:r>
+            <a:r>
+              <a:rPr sz="1800" b="0">
+                <a:solidFill>
+                  <a:srgbClr val="1F2D3A"/>
+                </a:solidFill>
+              </a:rPr>
+              <a:t> (ör. CWE-416); </a:t>
+            </a:r>
+            <a:r>
+              <a:rPr sz="1800" b="1">
+                <a:solidFill>
+                  <a:srgbClr val="1F2D3A"/>
+                </a:solidFill>
+              </a:rPr>
+              <a:t>CVE</a:t>
+            </a:r>
+            <a:r>
+              <a:rPr sz="1800" b="0">
+                <a:solidFill>
+                  <a:srgbClr val="1F2D3A"/>
+                </a:solidFill>
+              </a:rPr>
+              <a:t> belirli bir üründeki </a:t>
+            </a:r>
+            <a:r>
+              <a:rPr sz="1800" b="1">
+                <a:solidFill>
+                  <a:srgbClr val="1F2D3A"/>
+                </a:solidFill>
+              </a:rPr>
+              <a:t>somut</a:t>
+            </a:r>
+            <a:r>
+              <a:rPr sz="1800" b="0">
+                <a:solidFill>
+                  <a:srgbClr val="1F2D3A"/>
+                </a:solidFill>
+              </a:rPr>
+              <a:t> açık.</a:t>
+            </a:r>
+          </a:p>
+          <a:p>
+            <a:pPr>
+              <a:spcAft>
+                <a:spcPts val="300"/>
+              </a:spcAft>
+            </a:pPr>
+            <a:r>
+              <a:rPr sz="1800" b="1">
+                <a:solidFill>
+                  <a:srgbClr val="006D77"/>
+                </a:solidFill>
+              </a:rPr>
+              <a:t>4. </a:t>
+            </a:r>
+            <a:r>
+              <a:rPr sz="1800" b="1">
+                <a:solidFill>
+                  <a:srgbClr val="1F2D3A"/>
+                </a:solidFill>
+              </a:rPr>
+              <a:t>CVSS Temel puan</a:t>
+            </a:r>
+            <a:r>
+              <a:rPr sz="1800" b="0">
+                <a:solidFill>
+                  <a:srgbClr val="1F2D3A"/>
+                </a:solidFill>
+              </a:rPr>
+              <a:t> olabilirliği/etkiyi ölçer ama </a:t>
+            </a:r>
+            <a:r>
+              <a:rPr sz="1800" b="1">
+                <a:solidFill>
+                  <a:srgbClr val="1F2D3A"/>
+                </a:solidFill>
+              </a:rPr>
+              <a:t>istismarın sahada gerçekleşme olasılığını</a:t>
+            </a:r>
+            <a:r>
+              <a:rPr sz="1800" b="0">
+                <a:solidFill>
+                  <a:srgbClr val="1F2D3A"/>
+                </a:solidFill>
+              </a:rPr>
+              <a:t> (tehdit/ortam) tek başına ölçmez.</a:t>
             </a:r>
           </a:p>
         </p:txBody>
@@ -40589,6 +40762,284 @@
 </file>
 
 <file path=ppt/slides/slide86.xml><?xml version="1.0" encoding="utf-8"?>
+<p:sld xmlns:a="http://schemas.openxmlformats.org/drawingml/2006/main" xmlns:p="http://schemas.openxmlformats.org/presentationml/2006/main" xmlns:r="http://schemas.openxmlformats.org/officeDocument/2006/relationships">
+  <p:cSld>
+    <p:spTree>
+      <p:nvGrpSpPr>
+        <p:cNvPr id="1" name=""/>
+        <p:cNvGrpSpPr/>
+        <p:nvPr/>
+      </p:nvGrpSpPr>
+      <p:grpSpPr/>
+      <p:pic>
+        <p:nvPicPr>
+          <p:cNvPr id="2" name="Picture 1" descr="rteu_logo_kucuk.jpg"/>
+          <p:cNvPicPr>
+            <a:picLocks noChangeAspect="1"/>
+          </p:cNvPicPr>
+          <p:nvPr/>
+        </p:nvPicPr>
+        <p:blipFill>
+          <a:blip r:embed="rId2"/>
+          <a:stretch>
+            <a:fillRect/>
+          </a:stretch>
+        </p:blipFill>
+        <p:spPr>
+          <a:xfrm>
+            <a:off x="640080" y="164592"/>
+            <a:ext cx="242773" cy="329184"/>
+          </a:xfrm>
+          <a:prstGeom prst="rect">
+            <a:avLst/>
+          </a:prstGeom>
+        </p:spPr>
+      </p:pic>
+      <p:sp>
+        <p:nvSpPr>
+          <p:cNvPr id="3" name="TextBox 2"/>
+          <p:cNvSpPr txBox="1"/>
+          <p:nvPr/>
+        </p:nvSpPr>
+        <p:spPr>
+          <a:xfrm>
+            <a:off x="1051560" y="182880"/>
+            <a:ext cx="7315200" cy="320040"/>
+          </a:xfrm>
+          <a:prstGeom prst="rect">
+            <a:avLst/>
+          </a:prstGeom>
+          <a:noFill/>
+        </p:spPr>
+        <p:txBody>
+          <a:bodyPr wrap="square" lIns="45720" rIns="45720">
+            <a:spAutoFit/>
+          </a:bodyPr>
+          <a:lstStyle/>
+          <a:p>
+            <a:r>
+              <a:rPr sz="1100" b="0">
+                <a:solidFill>
+                  <a:srgbClr val="5B6770"/>
+                </a:solidFill>
+              </a:rPr>
+              <a:t>CEN429 Güvenli Programlama · Hafta 2</a:t>
+            </a:r>
+          </a:p>
+        </p:txBody>
+      </p:sp>
+      <p:sp>
+        <p:nvSpPr>
+          <p:cNvPr id="4" name="TextBox 3"/>
+          <p:cNvSpPr txBox="1"/>
+          <p:nvPr/>
+        </p:nvSpPr>
+        <p:spPr>
+          <a:xfrm>
+            <a:off x="640080" y="6446520"/>
+            <a:ext cx="7315200" cy="274320"/>
+          </a:xfrm>
+          <a:prstGeom prst="rect">
+            <a:avLst/>
+          </a:prstGeom>
+          <a:noFill/>
+        </p:spPr>
+        <p:txBody>
+          <a:bodyPr wrap="square" lIns="45720" rIns="45720">
+            <a:spAutoFit/>
+          </a:bodyPr>
+          <a:lstStyle/>
+          <a:p>
+            <a:r>
+              <a:rPr sz="1000" b="0">
+                <a:solidFill>
+                  <a:srgbClr val="5B6770"/>
+                </a:solidFill>
+              </a:rPr>
+              <a:t>RTEÜ Bilgisayar Mühendisliği · 2026-2027 Güz</a:t>
+            </a:r>
+          </a:p>
+        </p:txBody>
+      </p:sp>
+      <p:sp>
+        <p:nvSpPr>
+          <p:cNvPr id="5" name="TextBox 4"/>
+          <p:cNvSpPr txBox="1"/>
+          <p:nvPr/>
+        </p:nvSpPr>
+        <p:spPr>
+          <a:xfrm>
+            <a:off x="10637215" y="6446520"/>
+            <a:ext cx="914400" cy="274320"/>
+          </a:xfrm>
+          <a:prstGeom prst="rect">
+            <a:avLst/>
+          </a:prstGeom>
+          <a:noFill/>
+        </p:spPr>
+        <p:txBody>
+          <a:bodyPr wrap="square" lIns="45720" rIns="45720">
+            <a:spAutoFit/>
+          </a:bodyPr>
+          <a:lstStyle/>
+          <a:p>
+            <a:pPr algn="r"/>
+            <a:r>
+              <a:rPr sz="1000" b="0">
+                <a:solidFill>
+                  <a:srgbClr val="5B6770"/>
+                </a:solidFill>
+              </a:rPr>
+              <a:t>86</a:t>
+            </a:r>
+          </a:p>
+        </p:txBody>
+      </p:sp>
+      <p:sp>
+        <p:nvSpPr>
+          <p:cNvPr id="6" name="TextBox 5"/>
+          <p:cNvSpPr txBox="1"/>
+          <p:nvPr/>
+        </p:nvSpPr>
+        <p:spPr>
+          <a:xfrm>
+            <a:off x="640080" y="2194560"/>
+            <a:ext cx="10911535" cy="1280160"/>
+          </a:xfrm>
+          <a:prstGeom prst="rect">
+            <a:avLst/>
+          </a:prstGeom>
+          <a:noFill/>
+        </p:spPr>
+        <p:txBody>
+          <a:bodyPr wrap="square" lIns="45720" rIns="45720">
+            <a:spAutoFit/>
+          </a:bodyPr>
+          <a:lstStyle/>
+          <a:p>
+            <a:pPr algn="ctr"/>
+            <a:r>
+              <a:rPr sz="4000" b="1">
+                <a:solidFill>
+                  <a:srgbClr val="006D77"/>
+                </a:solidFill>
+              </a:rPr>
+              <a:t>Gelecek hafta</a:t>
+            </a:r>
+          </a:p>
+        </p:txBody>
+      </p:sp>
+      <p:sp>
+        <p:nvSpPr>
+          <p:cNvPr id="7" name="TextBox 6"/>
+          <p:cNvSpPr txBox="1"/>
+          <p:nvPr/>
+        </p:nvSpPr>
+        <p:spPr>
+          <a:xfrm>
+            <a:off x="640080" y="3566160"/>
+            <a:ext cx="10911535" cy="439928"/>
+          </a:xfrm>
+          <a:prstGeom prst="rect">
+            <a:avLst/>
+          </a:prstGeom>
+          <a:noFill/>
+        </p:spPr>
+        <p:txBody>
+          <a:bodyPr wrap="square" lIns="45720" rIns="45720">
+            <a:spAutoFit/>
+          </a:bodyPr>
+          <a:lstStyle/>
+          <a:p>
+            <a:pPr algn="ctr"/>
+            <a:r>
+              <a:rPr sz="2000" b="1">
+                <a:solidFill>
+                  <a:srgbClr val="1F2D3A"/>
+                </a:solidFill>
+              </a:rPr>
+              <a:t>Hafta 3 — Veri Güvenliği: Aktarımda, Beklemede, Kullanımda</a:t>
+            </a:r>
+          </a:p>
+        </p:txBody>
+      </p:sp>
+      <p:sp>
+        <p:nvSpPr>
+          <p:cNvPr id="8" name="TextBox 7"/>
+          <p:cNvSpPr txBox="1"/>
+          <p:nvPr/>
+        </p:nvSpPr>
+        <p:spPr>
+          <a:xfrm>
+            <a:off x="640080" y="4051808"/>
+            <a:ext cx="10911535" cy="770128"/>
+          </a:xfrm>
+          <a:prstGeom prst="rect">
+            <a:avLst/>
+          </a:prstGeom>
+          <a:noFill/>
+        </p:spPr>
+        <p:txBody>
+          <a:bodyPr wrap="square" lIns="45720" rIns="45720">
+            <a:spAutoFit/>
+          </a:bodyPr>
+          <a:lstStyle/>
+          <a:p>
+            <a:pPr algn="ctr"/>
+            <a:r>
+              <a:rPr sz="2000" b="0">
+                <a:solidFill>
+                  <a:srgbClr val="1F2D3A"/>
+                </a:solidFill>
+              </a:rPr>
+              <a:t>Şifreleme temelleri · TLS 1.3 ve sertifika sabitleme · AES-GCM ile yerel şifreleme · güvenli silme</a:t>
+            </a:r>
+          </a:p>
+        </p:txBody>
+      </p:sp>
+      <p:sp>
+        <p:nvSpPr>
+          <p:cNvPr id="9" name="TextBox 8"/>
+          <p:cNvSpPr txBox="1"/>
+          <p:nvPr/>
+        </p:nvSpPr>
+        <p:spPr>
+          <a:xfrm>
+            <a:off x="640080" y="4867656"/>
+            <a:ext cx="10911535" cy="439928"/>
+          </a:xfrm>
+          <a:prstGeom prst="rect">
+            <a:avLst/>
+          </a:prstGeom>
+          <a:noFill/>
+        </p:spPr>
+        <p:txBody>
+          <a:bodyPr wrap="square" lIns="45720" rIns="45720">
+            <a:spAutoFit/>
+          </a:bodyPr>
+          <a:lstStyle/>
+          <a:p>
+            <a:pPr algn="ctr"/>
+            <a:r>
+              <a:rPr sz="2000" b="0">
+                <a:solidFill>
+                  <a:srgbClr val="1F2D3A"/>
+                </a:solidFill>
+              </a:rPr>
+              <a:t>Kaynak: Viega &amp; Messier, Tarif 9.1–9.3, 10.7–10.9, 4.9–4.11, 13.2</a:t>
+            </a:r>
+          </a:p>
+        </p:txBody>
+      </p:sp>
+    </p:spTree>
+  </p:cSld>
+  <p:clrMapOvr>
+    <a:masterClrMapping/>
+  </p:clrMapOvr>
+</p:sld>
+</file>
+
+<file path=ppt/slides/slide87.xml><?xml version="1.0" encoding="utf-8"?>
 <p:sld xmlns:a="http://schemas.openxmlformats.org/drawingml/2006/main" xmlns:p="http://schemas.openxmlformats.org/presentationml/2006/main" xmlns:r="http://schemas.openxmlformats.org/officeDocument/2006/relationships">
   <p:cSld>
     <p:bg>
@@ -40701,7 +41152,7 @@
                   <a:srgbClr val="D8F0F2"/>
                 </a:solidFill>
               </a:rPr>
-              <a:t>86</a:t>
+              <a:t>87</a:t>
             </a:r>
           </a:p>
         </p:txBody>
@@ -40736,297 +41187,6 @@
                 </a:solidFill>
               </a:rPr>
               <a:t>Ek · Erişim modelleri karşılaştırma</a:t>
-            </a:r>
-          </a:p>
-        </p:txBody>
-      </p:sp>
-    </p:spTree>
-  </p:cSld>
-  <p:clrMapOvr>
-    <a:masterClrMapping/>
-  </p:clrMapOvr>
-</p:sld>
-</file>
-
-<file path=ppt/slides/slide87.xml><?xml version="1.0" encoding="utf-8"?>
-<p:sld xmlns:a="http://schemas.openxmlformats.org/drawingml/2006/main" xmlns:p="http://schemas.openxmlformats.org/presentationml/2006/main" xmlns:r="http://schemas.openxmlformats.org/officeDocument/2006/relationships">
-  <p:cSld>
-    <p:spTree>
-      <p:nvGrpSpPr>
-        <p:cNvPr id="1" name=""/>
-        <p:cNvGrpSpPr/>
-        <p:nvPr/>
-      </p:nvGrpSpPr>
-      <p:grpSpPr/>
-      <p:pic>
-        <p:nvPicPr>
-          <p:cNvPr id="2" name="Picture 1" descr="rteu_logo_kucuk.jpg"/>
-          <p:cNvPicPr>
-            <a:picLocks noChangeAspect="1"/>
-          </p:cNvPicPr>
-          <p:nvPr/>
-        </p:nvPicPr>
-        <p:blipFill>
-          <a:blip r:embed="rId2"/>
-          <a:stretch>
-            <a:fillRect/>
-          </a:stretch>
-        </p:blipFill>
-        <p:spPr>
-          <a:xfrm>
-            <a:off x="640080" y="164592"/>
-            <a:ext cx="242773" cy="329184"/>
-          </a:xfrm>
-          <a:prstGeom prst="rect">
-            <a:avLst/>
-          </a:prstGeom>
-        </p:spPr>
-      </p:pic>
-      <p:sp>
-        <p:nvSpPr>
-          <p:cNvPr id="3" name="TextBox 2"/>
-          <p:cNvSpPr txBox="1"/>
-          <p:nvPr/>
-        </p:nvSpPr>
-        <p:spPr>
-          <a:xfrm>
-            <a:off x="1051560" y="182880"/>
-            <a:ext cx="7315200" cy="320040"/>
-          </a:xfrm>
-          <a:prstGeom prst="rect">
-            <a:avLst/>
-          </a:prstGeom>
-          <a:noFill/>
-        </p:spPr>
-        <p:txBody>
-          <a:bodyPr wrap="square" lIns="45720" rIns="45720">
-            <a:spAutoFit/>
-          </a:bodyPr>
-          <a:lstStyle/>
-          <a:p>
-            <a:r>
-              <a:rPr sz="1100" b="0">
-                <a:solidFill>
-                  <a:srgbClr val="5B6770"/>
-                </a:solidFill>
-              </a:rPr>
-              <a:t>CEN429 Güvenli Programlama · Hafta 2</a:t>
-            </a:r>
-          </a:p>
-        </p:txBody>
-      </p:sp>
-      <p:sp>
-        <p:nvSpPr>
-          <p:cNvPr id="4" name="TextBox 3"/>
-          <p:cNvSpPr txBox="1"/>
-          <p:nvPr/>
-        </p:nvSpPr>
-        <p:spPr>
-          <a:xfrm>
-            <a:off x="640080" y="6446520"/>
-            <a:ext cx="7315200" cy="274320"/>
-          </a:xfrm>
-          <a:prstGeom prst="rect">
-            <a:avLst/>
-          </a:prstGeom>
-          <a:noFill/>
-        </p:spPr>
-        <p:txBody>
-          <a:bodyPr wrap="square" lIns="45720" rIns="45720">
-            <a:spAutoFit/>
-          </a:bodyPr>
-          <a:lstStyle/>
-          <a:p>
-            <a:r>
-              <a:rPr sz="1000" b="0">
-                <a:solidFill>
-                  <a:srgbClr val="5B6770"/>
-                </a:solidFill>
-              </a:rPr>
-              <a:t>RTEÜ Bilgisayar Mühendisliği · 2026-2027 Güz</a:t>
-            </a:r>
-          </a:p>
-        </p:txBody>
-      </p:sp>
-      <p:sp>
-        <p:nvSpPr>
-          <p:cNvPr id="5" name="TextBox 4"/>
-          <p:cNvSpPr txBox="1"/>
-          <p:nvPr/>
-        </p:nvSpPr>
-        <p:spPr>
-          <a:xfrm>
-            <a:off x="10637215" y="6446520"/>
-            <a:ext cx="914400" cy="274320"/>
-          </a:xfrm>
-          <a:prstGeom prst="rect">
-            <a:avLst/>
-          </a:prstGeom>
-          <a:noFill/>
-        </p:spPr>
-        <p:txBody>
-          <a:bodyPr wrap="square" lIns="45720" rIns="45720">
-            <a:spAutoFit/>
-          </a:bodyPr>
-          <a:lstStyle/>
-          <a:p>
-            <a:pPr algn="r"/>
-            <a:r>
-              <a:rPr sz="1000" b="0">
-                <a:solidFill>
-                  <a:srgbClr val="5B6770"/>
-                </a:solidFill>
-              </a:rPr>
-              <a:t>87</a:t>
-            </a:r>
-          </a:p>
-        </p:txBody>
-      </p:sp>
-      <p:sp>
-        <p:nvSpPr>
-          <p:cNvPr id="6" name="TextBox 5"/>
-          <p:cNvSpPr txBox="1"/>
-          <p:nvPr/>
-        </p:nvSpPr>
-        <p:spPr>
-          <a:xfrm>
-            <a:off x="640080" y="548640"/>
-            <a:ext cx="10911535" cy="731520"/>
-          </a:xfrm>
-          <a:prstGeom prst="rect">
-            <a:avLst/>
-          </a:prstGeom>
-          <a:noFill/>
-        </p:spPr>
-        <p:txBody>
-          <a:bodyPr wrap="square" lIns="45720" rIns="45720" anchor="ctr">
-            <a:spAutoFit/>
-          </a:bodyPr>
-          <a:lstStyle/>
-          <a:p>
-            <a:r>
-              <a:rPr sz="3000" b="1">
-                <a:solidFill>
-                  <a:srgbClr val="006D77"/>
-                </a:solidFill>
-              </a:rPr>
-              <a:t>BLP · gizlilik kuralı</a:t>
-            </a:r>
-          </a:p>
-        </p:txBody>
-      </p:sp>
-      <p:sp>
-        <p:nvSpPr>
-          <p:cNvPr id="7" name="TextBox 6"/>
-          <p:cNvSpPr txBox="1"/>
-          <p:nvPr/>
-        </p:nvSpPr>
-        <p:spPr>
-          <a:xfrm>
-            <a:off x="640080" y="1325880"/>
-            <a:ext cx="10911535" cy="1219200"/>
-          </a:xfrm>
-          <a:prstGeom prst="rect">
-            <a:avLst/>
-          </a:prstGeom>
-          <a:noFill/>
-        </p:spPr>
-        <p:txBody>
-          <a:bodyPr wrap="square" lIns="45720" rIns="45720">
-            <a:spAutoFit/>
-          </a:bodyPr>
-          <a:lstStyle/>
-          <a:p>
-            <a:pPr>
-              <a:spcAft>
-                <a:spcPts val="300"/>
-              </a:spcAft>
-            </a:pPr>
-            <a:r>
-              <a:rPr sz="2000" b="1">
-                <a:solidFill>
-                  <a:srgbClr val="006D77"/>
-                </a:solidFill>
-              </a:rPr>
-              <a:t>• </a:t>
-            </a:r>
-            <a:r>
-              <a:rPr sz="2000" b="1">
-                <a:solidFill>
-                  <a:srgbClr val="1F2D3A"/>
-                </a:solidFill>
-              </a:rPr>
-              <a:t>"Yukarı yazma, aşağı okuma yok"</a:t>
-            </a:r>
-            <a:r>
-              <a:rPr sz="2000" b="0">
-                <a:solidFill>
-                  <a:srgbClr val="1F2D3A"/>
-                </a:solidFill>
-              </a:rPr>
-              <a:t> değil — tersi:</a:t>
-            </a:r>
-          </a:p>
-          <a:p>
-            <a:pPr>
-              <a:spcAft>
-                <a:spcPts val="300"/>
-              </a:spcAft>
-            </a:pPr>
-            <a:r>
-              <a:rPr sz="2000" b="1">
-                <a:solidFill>
-                  <a:srgbClr val="006D77"/>
-                </a:solidFill>
-              </a:rPr>
-              <a:t>• </a:t>
-            </a:r>
-            <a:r>
-              <a:rPr sz="2000" b="1">
-                <a:solidFill>
-                  <a:srgbClr val="1F2D3A"/>
-                </a:solidFill>
-              </a:rPr>
-              <a:t>Yukarı okuma yok</a:t>
-            </a:r>
-            <a:r>
-              <a:rPr sz="2000" b="0">
-                <a:solidFill>
-                  <a:srgbClr val="1F2D3A"/>
-                </a:solidFill>
-              </a:rPr>
-              <a:t> (no read up): düşük yetkili, yüksek gizli veriyi okuyamaz.</a:t>
-            </a:r>
-          </a:p>
-          <a:p>
-            <a:pPr>
-              <a:spcAft>
-                <a:spcPts val="300"/>
-              </a:spcAft>
-            </a:pPr>
-            <a:r>
-              <a:rPr sz="2000" b="1">
-                <a:solidFill>
-                  <a:srgbClr val="006D77"/>
-                </a:solidFill>
-              </a:rPr>
-              <a:t>• </a:t>
-            </a:r>
-            <a:r>
-              <a:rPr sz="2000" b="1">
-                <a:solidFill>
-                  <a:srgbClr val="1F2D3A"/>
-                </a:solidFill>
-              </a:rPr>
-              <a:t>Aşağı yazma yok</a:t>
-            </a:r>
-            <a:r>
-              <a:rPr sz="2000" b="0">
-                <a:solidFill>
-                  <a:srgbClr val="1F2D3A"/>
-                </a:solidFill>
-              </a:rPr>
-              <a:t> (no write down): yüksek yetkili, düşük seviyeye sızdıramaz.</a:t>
             </a:r>
           </a:p>
         </p:txBody>
@@ -41201,7 +41361,7 @@
                   <a:srgbClr val="006D77"/>
                 </a:solidFill>
               </a:rPr>
-              <a:t>BLP · örnek</a:t>
+              <a:t>BLP · gizlilik kuralı</a:t>
             </a:r>
           </a:p>
         </p:txBody>
@@ -41215,7 +41375,7 @@
         <p:spPr>
           <a:xfrm>
             <a:off x="640080" y="1325880"/>
-            <a:ext cx="10911535" cy="843280"/>
+            <a:ext cx="10911535" cy="1219200"/>
           </a:xfrm>
           <a:prstGeom prst="rect">
             <a:avLst/>
@@ -41242,28 +41402,20 @@
               <a:t>• </a:t>
             </a:r>
             <a:r>
+              <a:rPr sz="2000" b="1">
+                <a:solidFill>
+                  <a:srgbClr val="1F2D3A"/>
+                </a:solidFill>
+              </a:rPr>
+              <a:t>"Yukarı yazma, aşağı okuma yok"</a:t>
+            </a:r>
+            <a:r>
               <a:rPr sz="2000" b="0">
                 <a:solidFill>
                   <a:srgbClr val="1F2D3A"/>
                 </a:solidFill>
               </a:rPr>
-              <a:t>"Gizli" etiketli bir kullanıcı "Çok Gizli" belgeyi </a:t>
-            </a:r>
-            <a:r>
-              <a:rPr sz="2000" b="1">
-                <a:solidFill>
-                  <a:srgbClr val="1F2D3A"/>
-                </a:solidFill>
-              </a:rPr>
-              <a:t>okuyamaz</a:t>
-            </a:r>
-            <a:r>
-              <a:rPr sz="2000" b="0">
-                <a:solidFill>
-                  <a:srgbClr val="1F2D3A"/>
-                </a:solidFill>
-              </a:rPr>
-              <a:t>.</a:t>
+              <a:t> değil — tersi:</a:t>
             </a:r>
           </a:p>
           <a:p>
@@ -41281,20 +41433,43 @@
               <a:t>• </a:t>
             </a:r>
             <a:r>
+              <a:rPr sz="2000" b="1">
+                <a:solidFill>
+                  <a:srgbClr val="1F2D3A"/>
+                </a:solidFill>
+              </a:rPr>
+              <a:t>Yukarı okuma yok</a:t>
+            </a:r>
+            <a:r>
               <a:rPr sz="2000" b="0">
                 <a:solidFill>
                   <a:srgbClr val="1F2D3A"/>
                 </a:solidFill>
               </a:rPr>
-              <a:t>"Çok Gizli" bir süreç "Genel" dosyaya </a:t>
-            </a:r>
+              <a:t> (no read up): düşük yetkili, yüksek gizli veriyi okuyamaz.</a:t>
+            </a:r>
+          </a:p>
+          <a:p>
+            <a:pPr>
+              <a:spcAft>
+                <a:spcPts val="300"/>
+              </a:spcAft>
+            </a:pPr>
             <a:r>
               <a:rPr sz="2000" b="1">
                 <a:solidFill>
-                  <a:srgbClr val="1F2D3A"/>
-                </a:solidFill>
-              </a:rPr>
-              <a:t>yazamaz</a:t>
+                  <a:srgbClr val="006D77"/>
+                </a:solidFill>
+              </a:rPr>
+              <a:t>• </a:t>
+            </a:r>
+            <a:r>
+              <a:rPr sz="2000" b="1">
+                <a:solidFill>
+                  <a:srgbClr val="1F2D3A"/>
+                </a:solidFill>
+              </a:rPr>
+              <a:t>Aşağı yazma yok</a:t>
             </a:r>
             <a:r>
               <a:rPr sz="2000" b="0">
@@ -41302,57 +41477,7 @@
                   <a:srgbClr val="1F2D3A"/>
                 </a:solidFill>
               </a:rPr>
-              <a:t> (sızıntı önlenir).</a:t>
-            </a:r>
-          </a:p>
-        </p:txBody>
-      </p:sp>
-      <p:sp>
-        <p:nvSpPr>
-          <p:cNvPr id="8" name="TextBox 7"/>
-          <p:cNvSpPr txBox="1"/>
-          <p:nvPr/>
-        </p:nvSpPr>
-        <p:spPr>
-          <a:xfrm>
-            <a:off x="640080" y="2278888"/>
-            <a:ext cx="10911535" cy="439928"/>
-          </a:xfrm>
-          <a:prstGeom prst="rect">
-            <a:avLst/>
-          </a:prstGeom>
-          <a:noFill/>
-        </p:spPr>
-        <p:txBody>
-          <a:bodyPr wrap="square" lIns="45720" rIns="45720">
-            <a:spAutoFit/>
-          </a:bodyPr>
-          <a:lstStyle/>
-          <a:p>
-            <a:pPr algn="l"/>
-            <a:r>
-              <a:rPr sz="2000" b="0">
-                <a:solidFill>
-                  <a:srgbClr val="1F2D3A"/>
-                </a:solidFill>
-              </a:rPr>
-              <a:t>Amaç: </a:t>
-            </a:r>
-            <a:r>
-              <a:rPr sz="2000" b="1">
-                <a:solidFill>
-                  <a:srgbClr val="1F2D3A"/>
-                </a:solidFill>
-              </a:rPr>
-              <a:t>gizlilik</a:t>
-            </a:r>
-            <a:r>
-              <a:rPr sz="2000" b="0">
-                <a:solidFill>
-                  <a:srgbClr val="1F2D3A"/>
-                </a:solidFill>
-              </a:rPr>
-              <a:t>.</a:t>
+              <a:t> (no write down): yüksek yetkili, düşük seviyeye sızdıramaz.</a:t>
             </a:r>
           </a:p>
         </p:txBody>
@@ -41527,7 +41652,7 @@
                   <a:srgbClr val="006D77"/>
                 </a:solidFill>
               </a:rPr>
-              <a:t>Biba · bütünlük kuralı</a:t>
+              <a:t>BLP · örnek</a:t>
             </a:r>
           </a:p>
         </p:txBody>
@@ -41541,7 +41666,7 @@
         <p:spPr>
           <a:xfrm>
             <a:off x="640080" y="1325880"/>
-            <a:ext cx="10911535" cy="1219200"/>
+            <a:ext cx="10911535" cy="843280"/>
           </a:xfrm>
           <a:prstGeom prst="rect">
             <a:avLst/>
@@ -41573,7 +41698,7 @@
                   <a:srgbClr val="1F2D3A"/>
                 </a:solidFill>
               </a:rPr>
-              <a:t>BLP'nin </a:t>
+              <a:t>"Gizli" etiketli bir kullanıcı "Çok Gizli" belgeyi </a:t>
             </a:r>
             <a:r>
               <a:rPr sz="2000" b="1">
@@ -41581,7 +41706,7 @@
                   <a:srgbClr val="1F2D3A"/>
                 </a:solidFill>
               </a:rPr>
-              <a:t>tersi</a:t>
+              <a:t>okuyamaz</a:t>
             </a:r>
             <a:r>
               <a:rPr sz="2000" b="0">
@@ -41589,7 +41714,7 @@
                   <a:srgbClr val="1F2D3A"/>
                 </a:solidFill>
               </a:rPr>
-              <a:t>:</a:t>
+              <a:t>.</a:t>
             </a:r>
           </a:p>
           <a:p>
@@ -41607,12 +41732,20 @@
               <a:t>• </a:t>
             </a:r>
             <a:r>
+              <a:rPr sz="2000" b="0">
+                <a:solidFill>
+                  <a:srgbClr val="1F2D3A"/>
+                </a:solidFill>
+              </a:rPr>
+              <a:t>"Çok Gizli" bir süreç "Genel" dosyaya </a:t>
+            </a:r>
+            <a:r>
               <a:rPr sz="2000" b="1">
                 <a:solidFill>
                   <a:srgbClr val="1F2D3A"/>
                 </a:solidFill>
               </a:rPr>
-              <a:t>Aşağı okuma yok</a:t>
+              <a:t>yazamaz</a:t>
             </a:r>
             <a:r>
               <a:rPr sz="2000" b="0">
@@ -41620,80 +41753,49 @@
                   <a:srgbClr val="1F2D3A"/>
                 </a:solidFill>
               </a:rPr>
-              <a:t>: yüksek bütünlüklü, düşük güvenilir veriyi okumaz.</a:t>
-            </a:r>
-          </a:p>
-          <a:p>
-            <a:pPr>
-              <a:spcAft>
-                <a:spcPts val="300"/>
-              </a:spcAft>
-            </a:pPr>
+              <a:t> (sızıntı önlenir).</a:t>
+            </a:r>
+          </a:p>
+        </p:txBody>
+      </p:sp>
+      <p:sp>
+        <p:nvSpPr>
+          <p:cNvPr id="8" name="TextBox 7"/>
+          <p:cNvSpPr txBox="1"/>
+          <p:nvPr/>
+        </p:nvSpPr>
+        <p:spPr>
+          <a:xfrm>
+            <a:off x="640080" y="2278888"/>
+            <a:ext cx="10911535" cy="439928"/>
+          </a:xfrm>
+          <a:prstGeom prst="rect">
+            <a:avLst/>
+          </a:prstGeom>
+          <a:noFill/>
+        </p:spPr>
+        <p:txBody>
+          <a:bodyPr wrap="square" lIns="45720" rIns="45720">
+            <a:spAutoFit/>
+          </a:bodyPr>
+          <a:lstStyle/>
+          <a:p>
+            <a:pPr algn="l"/>
+            <a:r>
+              <a:rPr sz="2000" b="0">
+                <a:solidFill>
+                  <a:srgbClr val="1F2D3A"/>
+                </a:solidFill>
+              </a:rPr>
+              <a:t>Amaç: </a:t>
+            </a:r>
             <a:r>
               <a:rPr sz="2000" b="1">
                 <a:solidFill>
-                  <a:srgbClr val="006D77"/>
-                </a:solidFill>
-              </a:rPr>
-              <a:t>• </a:t>
-            </a:r>
-            <a:r>
-              <a:rPr sz="2000" b="1">
-                <a:solidFill>
-                  <a:srgbClr val="1F2D3A"/>
-                </a:solidFill>
-              </a:rPr>
-              <a:t>Yukarı yazma yok</a:t>
-            </a:r>
-            <a:r>
-              <a:rPr sz="2000" b="0">
-                <a:solidFill>
-                  <a:srgbClr val="1F2D3A"/>
-                </a:solidFill>
-              </a:rPr>
-              <a:t>: düşük güvenilir, yüksek bütünlüğe yazamaz.</a:t>
-            </a:r>
-          </a:p>
-        </p:txBody>
-      </p:sp>
-      <p:sp>
-        <p:nvSpPr>
-          <p:cNvPr id="8" name="TextBox 7"/>
-          <p:cNvSpPr txBox="1"/>
-          <p:nvPr/>
-        </p:nvSpPr>
-        <p:spPr>
-          <a:xfrm>
-            <a:off x="640080" y="2654808"/>
-            <a:ext cx="10911535" cy="439928"/>
-          </a:xfrm>
-          <a:prstGeom prst="rect">
-            <a:avLst/>
-          </a:prstGeom>
-          <a:noFill/>
-        </p:spPr>
-        <p:txBody>
-          <a:bodyPr wrap="square" lIns="45720" rIns="45720">
-            <a:spAutoFit/>
-          </a:bodyPr>
-          <a:lstStyle/>
-          <a:p>
-            <a:pPr algn="l"/>
-            <a:r>
-              <a:rPr sz="2000" b="0">
-                <a:solidFill>
-                  <a:srgbClr val="1F2D3A"/>
-                </a:solidFill>
-              </a:rPr>
-              <a:t>Amaç: </a:t>
-            </a:r>
-            <a:r>
-              <a:rPr sz="2000" b="1">
-                <a:solidFill>
-                  <a:srgbClr val="1F2D3A"/>
-                </a:solidFill>
-              </a:rPr>
-              <a:t>bütünlük</a:t>
+                  <a:srgbClr val="1F2D3A"/>
+                </a:solidFill>
+              </a:rPr>
+              <a:t>gizlilik</a:t>
             </a:r>
             <a:r>
               <a:rPr sz="2000" b="0">
@@ -42159,6 +42261,355 @@
                 </a:solidFill>
               </a:rPr>
               <a:t>90</a:t>
+            </a:r>
+          </a:p>
+        </p:txBody>
+      </p:sp>
+      <p:sp>
+        <p:nvSpPr>
+          <p:cNvPr id="6" name="TextBox 5"/>
+          <p:cNvSpPr txBox="1"/>
+          <p:nvPr/>
+        </p:nvSpPr>
+        <p:spPr>
+          <a:xfrm>
+            <a:off x="640080" y="548640"/>
+            <a:ext cx="10911535" cy="731520"/>
+          </a:xfrm>
+          <a:prstGeom prst="rect">
+            <a:avLst/>
+          </a:prstGeom>
+          <a:noFill/>
+        </p:spPr>
+        <p:txBody>
+          <a:bodyPr wrap="square" lIns="45720" rIns="45720" anchor="ctr">
+            <a:spAutoFit/>
+          </a:bodyPr>
+          <a:lstStyle/>
+          <a:p>
+            <a:r>
+              <a:rPr sz="3000" b="1">
+                <a:solidFill>
+                  <a:srgbClr val="006D77"/>
+                </a:solidFill>
+              </a:rPr>
+              <a:t>Biba · bütünlük kuralı</a:t>
+            </a:r>
+          </a:p>
+        </p:txBody>
+      </p:sp>
+      <p:sp>
+        <p:nvSpPr>
+          <p:cNvPr id="7" name="TextBox 6"/>
+          <p:cNvSpPr txBox="1"/>
+          <p:nvPr/>
+        </p:nvSpPr>
+        <p:spPr>
+          <a:xfrm>
+            <a:off x="640080" y="1325880"/>
+            <a:ext cx="10911535" cy="1219200"/>
+          </a:xfrm>
+          <a:prstGeom prst="rect">
+            <a:avLst/>
+          </a:prstGeom>
+          <a:noFill/>
+        </p:spPr>
+        <p:txBody>
+          <a:bodyPr wrap="square" lIns="45720" rIns="45720">
+            <a:spAutoFit/>
+          </a:bodyPr>
+          <a:lstStyle/>
+          <a:p>
+            <a:pPr>
+              <a:spcAft>
+                <a:spcPts val="300"/>
+              </a:spcAft>
+            </a:pPr>
+            <a:r>
+              <a:rPr sz="2000" b="1">
+                <a:solidFill>
+                  <a:srgbClr val="006D77"/>
+                </a:solidFill>
+              </a:rPr>
+              <a:t>• </a:t>
+            </a:r>
+            <a:r>
+              <a:rPr sz="2000" b="0">
+                <a:solidFill>
+                  <a:srgbClr val="1F2D3A"/>
+                </a:solidFill>
+              </a:rPr>
+              <a:t>BLP'nin </a:t>
+            </a:r>
+            <a:r>
+              <a:rPr sz="2000" b="1">
+                <a:solidFill>
+                  <a:srgbClr val="1F2D3A"/>
+                </a:solidFill>
+              </a:rPr>
+              <a:t>tersi</a:t>
+            </a:r>
+            <a:r>
+              <a:rPr sz="2000" b="0">
+                <a:solidFill>
+                  <a:srgbClr val="1F2D3A"/>
+                </a:solidFill>
+              </a:rPr>
+              <a:t>:</a:t>
+            </a:r>
+          </a:p>
+          <a:p>
+            <a:pPr>
+              <a:spcAft>
+                <a:spcPts val="300"/>
+              </a:spcAft>
+            </a:pPr>
+            <a:r>
+              <a:rPr sz="2000" b="1">
+                <a:solidFill>
+                  <a:srgbClr val="006D77"/>
+                </a:solidFill>
+              </a:rPr>
+              <a:t>• </a:t>
+            </a:r>
+            <a:r>
+              <a:rPr sz="2000" b="1">
+                <a:solidFill>
+                  <a:srgbClr val="1F2D3A"/>
+                </a:solidFill>
+              </a:rPr>
+              <a:t>Aşağı okuma yok</a:t>
+            </a:r>
+            <a:r>
+              <a:rPr sz="2000" b="0">
+                <a:solidFill>
+                  <a:srgbClr val="1F2D3A"/>
+                </a:solidFill>
+              </a:rPr>
+              <a:t>: yüksek bütünlüklü, düşük güvenilir veriyi okumaz.</a:t>
+            </a:r>
+          </a:p>
+          <a:p>
+            <a:pPr>
+              <a:spcAft>
+                <a:spcPts val="300"/>
+              </a:spcAft>
+            </a:pPr>
+            <a:r>
+              <a:rPr sz="2000" b="1">
+                <a:solidFill>
+                  <a:srgbClr val="006D77"/>
+                </a:solidFill>
+              </a:rPr>
+              <a:t>• </a:t>
+            </a:r>
+            <a:r>
+              <a:rPr sz="2000" b="1">
+                <a:solidFill>
+                  <a:srgbClr val="1F2D3A"/>
+                </a:solidFill>
+              </a:rPr>
+              <a:t>Yukarı yazma yok</a:t>
+            </a:r>
+            <a:r>
+              <a:rPr sz="2000" b="0">
+                <a:solidFill>
+                  <a:srgbClr val="1F2D3A"/>
+                </a:solidFill>
+              </a:rPr>
+              <a:t>: düşük güvenilir, yüksek bütünlüğe yazamaz.</a:t>
+            </a:r>
+          </a:p>
+        </p:txBody>
+      </p:sp>
+      <p:sp>
+        <p:nvSpPr>
+          <p:cNvPr id="8" name="TextBox 7"/>
+          <p:cNvSpPr txBox="1"/>
+          <p:nvPr/>
+        </p:nvSpPr>
+        <p:spPr>
+          <a:xfrm>
+            <a:off x="640080" y="2654808"/>
+            <a:ext cx="10911535" cy="439928"/>
+          </a:xfrm>
+          <a:prstGeom prst="rect">
+            <a:avLst/>
+          </a:prstGeom>
+          <a:noFill/>
+        </p:spPr>
+        <p:txBody>
+          <a:bodyPr wrap="square" lIns="45720" rIns="45720">
+            <a:spAutoFit/>
+          </a:bodyPr>
+          <a:lstStyle/>
+          <a:p>
+            <a:pPr algn="l"/>
+            <a:r>
+              <a:rPr sz="2000" b="0">
+                <a:solidFill>
+                  <a:srgbClr val="1F2D3A"/>
+                </a:solidFill>
+              </a:rPr>
+              <a:t>Amaç: </a:t>
+            </a:r>
+            <a:r>
+              <a:rPr sz="2000" b="1">
+                <a:solidFill>
+                  <a:srgbClr val="1F2D3A"/>
+                </a:solidFill>
+              </a:rPr>
+              <a:t>bütünlük</a:t>
+            </a:r>
+            <a:r>
+              <a:rPr sz="2000" b="0">
+                <a:solidFill>
+                  <a:srgbClr val="1F2D3A"/>
+                </a:solidFill>
+              </a:rPr>
+              <a:t>.</a:t>
+            </a:r>
+          </a:p>
+        </p:txBody>
+      </p:sp>
+    </p:spTree>
+  </p:cSld>
+  <p:clrMapOvr>
+    <a:masterClrMapping/>
+  </p:clrMapOvr>
+</p:sld>
+</file>
+
+<file path=ppt/slides/slide91.xml><?xml version="1.0" encoding="utf-8"?>
+<p:sld xmlns:a="http://schemas.openxmlformats.org/drawingml/2006/main" xmlns:p="http://schemas.openxmlformats.org/presentationml/2006/main" xmlns:r="http://schemas.openxmlformats.org/officeDocument/2006/relationships">
+  <p:cSld>
+    <p:spTree>
+      <p:nvGrpSpPr>
+        <p:cNvPr id="1" name=""/>
+        <p:cNvGrpSpPr/>
+        <p:nvPr/>
+      </p:nvGrpSpPr>
+      <p:grpSpPr/>
+      <p:pic>
+        <p:nvPicPr>
+          <p:cNvPr id="2" name="Picture 1" descr="rteu_logo_kucuk.jpg"/>
+          <p:cNvPicPr>
+            <a:picLocks noChangeAspect="1"/>
+          </p:cNvPicPr>
+          <p:nvPr/>
+        </p:nvPicPr>
+        <p:blipFill>
+          <a:blip r:embed="rId2"/>
+          <a:stretch>
+            <a:fillRect/>
+          </a:stretch>
+        </p:blipFill>
+        <p:spPr>
+          <a:xfrm>
+            <a:off x="640080" y="164592"/>
+            <a:ext cx="242773" cy="329184"/>
+          </a:xfrm>
+          <a:prstGeom prst="rect">
+            <a:avLst/>
+          </a:prstGeom>
+        </p:spPr>
+      </p:pic>
+      <p:sp>
+        <p:nvSpPr>
+          <p:cNvPr id="3" name="TextBox 2"/>
+          <p:cNvSpPr txBox="1"/>
+          <p:nvPr/>
+        </p:nvSpPr>
+        <p:spPr>
+          <a:xfrm>
+            <a:off x="1051560" y="182880"/>
+            <a:ext cx="7315200" cy="320040"/>
+          </a:xfrm>
+          <a:prstGeom prst="rect">
+            <a:avLst/>
+          </a:prstGeom>
+          <a:noFill/>
+        </p:spPr>
+        <p:txBody>
+          <a:bodyPr wrap="square" lIns="45720" rIns="45720">
+            <a:spAutoFit/>
+          </a:bodyPr>
+          <a:lstStyle/>
+          <a:p>
+            <a:r>
+              <a:rPr sz="1100" b="0">
+                <a:solidFill>
+                  <a:srgbClr val="5B6770"/>
+                </a:solidFill>
+              </a:rPr>
+              <a:t>CEN429 Güvenli Programlama · Hafta 2</a:t>
+            </a:r>
+          </a:p>
+        </p:txBody>
+      </p:sp>
+      <p:sp>
+        <p:nvSpPr>
+          <p:cNvPr id="4" name="TextBox 3"/>
+          <p:cNvSpPr txBox="1"/>
+          <p:nvPr/>
+        </p:nvSpPr>
+        <p:spPr>
+          <a:xfrm>
+            <a:off x="640080" y="6446520"/>
+            <a:ext cx="7315200" cy="274320"/>
+          </a:xfrm>
+          <a:prstGeom prst="rect">
+            <a:avLst/>
+          </a:prstGeom>
+          <a:noFill/>
+        </p:spPr>
+        <p:txBody>
+          <a:bodyPr wrap="square" lIns="45720" rIns="45720">
+            <a:spAutoFit/>
+          </a:bodyPr>
+          <a:lstStyle/>
+          <a:p>
+            <a:r>
+              <a:rPr sz="1000" b="0">
+                <a:solidFill>
+                  <a:srgbClr val="5B6770"/>
+                </a:solidFill>
+              </a:rPr>
+              <a:t>RTEÜ Bilgisayar Mühendisliği · 2026-2027 Güz</a:t>
+            </a:r>
+          </a:p>
+        </p:txBody>
+      </p:sp>
+      <p:sp>
+        <p:nvSpPr>
+          <p:cNvPr id="5" name="TextBox 4"/>
+          <p:cNvSpPr txBox="1"/>
+          <p:nvPr/>
+        </p:nvSpPr>
+        <p:spPr>
+          <a:xfrm>
+            <a:off x="10637215" y="6446520"/>
+            <a:ext cx="914400" cy="274320"/>
+          </a:xfrm>
+          <a:prstGeom prst="rect">
+            <a:avLst/>
+          </a:prstGeom>
+          <a:noFill/>
+        </p:spPr>
+        <p:txBody>
+          <a:bodyPr wrap="square" lIns="45720" rIns="45720">
+            <a:spAutoFit/>
+          </a:bodyPr>
+          <a:lstStyle/>
+          <a:p>
+            <a:pPr algn="r"/>
+            <a:r>
+              <a:rPr sz="1000" b="0">
+                <a:solidFill>
+                  <a:srgbClr val="5B6770"/>
+                </a:solidFill>
+              </a:rPr>
+              <a:t>91</a:t>
             </a:r>
           </a:p>
         </p:txBody>
@@ -42532,289 +42983,6 @@
 </p:sld>
 </file>
 
-<file path=ppt/slides/slide91.xml><?xml version="1.0" encoding="utf-8"?>
-<p:sld xmlns:a="http://schemas.openxmlformats.org/drawingml/2006/main" xmlns:p="http://schemas.openxmlformats.org/presentationml/2006/main" xmlns:r="http://schemas.openxmlformats.org/officeDocument/2006/relationships">
-  <p:cSld>
-    <p:spTree>
-      <p:nvGrpSpPr>
-        <p:cNvPr id="1" name=""/>
-        <p:cNvGrpSpPr/>
-        <p:nvPr/>
-      </p:nvGrpSpPr>
-      <p:grpSpPr/>
-      <p:pic>
-        <p:nvPicPr>
-          <p:cNvPr id="2" name="Picture 1" descr="rteu_logo_kucuk.jpg"/>
-          <p:cNvPicPr>
-            <a:picLocks noChangeAspect="1"/>
-          </p:cNvPicPr>
-          <p:nvPr/>
-        </p:nvPicPr>
-        <p:blipFill>
-          <a:blip r:embed="rId2"/>
-          <a:stretch>
-            <a:fillRect/>
-          </a:stretch>
-        </p:blipFill>
-        <p:spPr>
-          <a:xfrm>
-            <a:off x="640080" y="164592"/>
-            <a:ext cx="242773" cy="329184"/>
-          </a:xfrm>
-          <a:prstGeom prst="rect">
-            <a:avLst/>
-          </a:prstGeom>
-        </p:spPr>
-      </p:pic>
-      <p:sp>
-        <p:nvSpPr>
-          <p:cNvPr id="3" name="TextBox 2"/>
-          <p:cNvSpPr txBox="1"/>
-          <p:nvPr/>
-        </p:nvSpPr>
-        <p:spPr>
-          <a:xfrm>
-            <a:off x="1051560" y="182880"/>
-            <a:ext cx="7315200" cy="320040"/>
-          </a:xfrm>
-          <a:prstGeom prst="rect">
-            <a:avLst/>
-          </a:prstGeom>
-          <a:noFill/>
-        </p:spPr>
-        <p:txBody>
-          <a:bodyPr wrap="square" lIns="45720" rIns="45720">
-            <a:spAutoFit/>
-          </a:bodyPr>
-          <a:lstStyle/>
-          <a:p>
-            <a:r>
-              <a:rPr sz="1100" b="0">
-                <a:solidFill>
-                  <a:srgbClr val="5B6770"/>
-                </a:solidFill>
-              </a:rPr>
-              <a:t>CEN429 Güvenli Programlama · Hafta 2</a:t>
-            </a:r>
-          </a:p>
-        </p:txBody>
-      </p:sp>
-      <p:sp>
-        <p:nvSpPr>
-          <p:cNvPr id="4" name="TextBox 3"/>
-          <p:cNvSpPr txBox="1"/>
-          <p:nvPr/>
-        </p:nvSpPr>
-        <p:spPr>
-          <a:xfrm>
-            <a:off x="640080" y="6446520"/>
-            <a:ext cx="7315200" cy="274320"/>
-          </a:xfrm>
-          <a:prstGeom prst="rect">
-            <a:avLst/>
-          </a:prstGeom>
-          <a:noFill/>
-        </p:spPr>
-        <p:txBody>
-          <a:bodyPr wrap="square" lIns="45720" rIns="45720">
-            <a:spAutoFit/>
-          </a:bodyPr>
-          <a:lstStyle/>
-          <a:p>
-            <a:r>
-              <a:rPr sz="1000" b="0">
-                <a:solidFill>
-                  <a:srgbClr val="5B6770"/>
-                </a:solidFill>
-              </a:rPr>
-              <a:t>RTEÜ Bilgisayar Mühendisliği · 2026-2027 Güz</a:t>
-            </a:r>
-          </a:p>
-        </p:txBody>
-      </p:sp>
-      <p:sp>
-        <p:nvSpPr>
-          <p:cNvPr id="5" name="TextBox 4"/>
-          <p:cNvSpPr txBox="1"/>
-          <p:nvPr/>
-        </p:nvSpPr>
-        <p:spPr>
-          <a:xfrm>
-            <a:off x="10637215" y="6446520"/>
-            <a:ext cx="914400" cy="274320"/>
-          </a:xfrm>
-          <a:prstGeom prst="rect">
-            <a:avLst/>
-          </a:prstGeom>
-          <a:noFill/>
-        </p:spPr>
-        <p:txBody>
-          <a:bodyPr wrap="square" lIns="45720" rIns="45720">
-            <a:spAutoFit/>
-          </a:bodyPr>
-          <a:lstStyle/>
-          <a:p>
-            <a:pPr algn="r"/>
-            <a:r>
-              <a:rPr sz="1000" b="0">
-                <a:solidFill>
-                  <a:srgbClr val="5B6770"/>
-                </a:solidFill>
-              </a:rPr>
-              <a:t>91</a:t>
-            </a:r>
-          </a:p>
-        </p:txBody>
-      </p:sp>
-      <p:sp>
-        <p:nvSpPr>
-          <p:cNvPr id="6" name="TextBox 5"/>
-          <p:cNvSpPr txBox="1"/>
-          <p:nvPr/>
-        </p:nvSpPr>
-        <p:spPr>
-          <a:xfrm>
-            <a:off x="640080" y="548640"/>
-            <a:ext cx="10911535" cy="731520"/>
-          </a:xfrm>
-          <a:prstGeom prst="rect">
-            <a:avLst/>
-          </a:prstGeom>
-          <a:noFill/>
-        </p:spPr>
-        <p:txBody>
-          <a:bodyPr wrap="square" lIns="45720" rIns="45720" anchor="ctr">
-            <a:spAutoFit/>
-          </a:bodyPr>
-          <a:lstStyle/>
-          <a:p>
-            <a:r>
-              <a:rPr sz="3000" b="1">
-                <a:solidFill>
-                  <a:srgbClr val="006D77"/>
-                </a:solidFill>
-              </a:rPr>
-              <a:t>Clark–Wilson</a:t>
-            </a:r>
-          </a:p>
-        </p:txBody>
-      </p:sp>
-      <p:sp>
-        <p:nvSpPr>
-          <p:cNvPr id="7" name="TextBox 6"/>
-          <p:cNvSpPr txBox="1"/>
-          <p:nvPr/>
-        </p:nvSpPr>
-        <p:spPr>
-          <a:xfrm>
-            <a:off x="640080" y="1325880"/>
-            <a:ext cx="10911535" cy="1219200"/>
-          </a:xfrm>
-          <a:prstGeom prst="rect">
-            <a:avLst/>
-          </a:prstGeom>
-          <a:noFill/>
-        </p:spPr>
-        <p:txBody>
-          <a:bodyPr wrap="square" lIns="45720" rIns="45720">
-            <a:spAutoFit/>
-          </a:bodyPr>
-          <a:lstStyle/>
-          <a:p>
-            <a:pPr>
-              <a:spcAft>
-                <a:spcPts val="300"/>
-              </a:spcAft>
-            </a:pPr>
-            <a:r>
-              <a:rPr sz="2000" b="1">
-                <a:solidFill>
-                  <a:srgbClr val="006D77"/>
-                </a:solidFill>
-              </a:rPr>
-              <a:t>• </a:t>
-            </a:r>
-            <a:r>
-              <a:rPr sz="2000" b="0">
-                <a:solidFill>
-                  <a:srgbClr val="1F2D3A"/>
-                </a:solidFill>
-              </a:rPr>
-              <a:t>Ticari bütünlük: iyi biçimli işlemler + görev ayrımı.</a:t>
-            </a:r>
-          </a:p>
-          <a:p>
-            <a:pPr>
-              <a:spcAft>
-                <a:spcPts val="300"/>
-              </a:spcAft>
-            </a:pPr>
-            <a:r>
-              <a:rPr sz="2000" b="1">
-                <a:solidFill>
-                  <a:srgbClr val="006D77"/>
-                </a:solidFill>
-              </a:rPr>
-              <a:t>• </a:t>
-            </a:r>
-            <a:r>
-              <a:rPr sz="2000" b="0">
-                <a:solidFill>
-                  <a:srgbClr val="1F2D3A"/>
-                </a:solidFill>
-              </a:rPr>
-              <a:t>Veriye yalnız </a:t>
-            </a:r>
-            <a:r>
-              <a:rPr sz="2000" b="1">
-                <a:solidFill>
-                  <a:srgbClr val="1F2D3A"/>
-                </a:solidFill>
-              </a:rPr>
-              <a:t>onaylı</a:t>
-            </a:r>
-            <a:r>
-              <a:rPr sz="2000" b="0">
-                <a:solidFill>
-                  <a:srgbClr val="1F2D3A"/>
-                </a:solidFill>
-              </a:rPr>
-              <a:t> yordamlarla erişilir.</a:t>
-            </a:r>
-          </a:p>
-          <a:p>
-            <a:pPr>
-              <a:spcAft>
-                <a:spcPts val="300"/>
-              </a:spcAft>
-            </a:pPr>
-            <a:r>
-              <a:rPr sz="2000" b="1">
-                <a:solidFill>
-                  <a:srgbClr val="006D77"/>
-                </a:solidFill>
-              </a:rPr>
-              <a:t>• </a:t>
-            </a:r>
-            <a:r>
-              <a:rPr sz="2000" b="0">
-                <a:solidFill>
-                  <a:srgbClr val="1F2D3A"/>
-                </a:solidFill>
-              </a:rPr>
-              <a:t>Örnek: muhasebe kayıtları.</a:t>
-            </a:r>
-          </a:p>
-        </p:txBody>
-      </p:sp>
-    </p:spTree>
-  </p:cSld>
-  <p:clrMapOvr>
-    <a:masterClrMapping/>
-  </p:clrMapOvr>
-</p:sld>
-</file>
-
 <file path=ppt/slides/slide92.xml><?xml version="1.0" encoding="utf-8"?>
 <p:sld xmlns:a="http://schemas.openxmlformats.org/drawingml/2006/main" xmlns:p="http://schemas.openxmlformats.org/presentationml/2006/main" xmlns:r="http://schemas.openxmlformats.org/officeDocument/2006/relationships">
   <p:cSld>
@@ -42977,7 +43145,7 @@
                   <a:srgbClr val="006D77"/>
                 </a:solidFill>
               </a:rPr>
-              <a:t>DAC / MAC / RBAC · seçim</a:t>
+              <a:t>Clark–Wilson</a:t>
             </a:r>
           </a:p>
         </p:txBody>
@@ -43018,20 +43186,12 @@
               <a:t>• </a:t>
             </a:r>
             <a:r>
-              <a:rPr sz="2000" b="1">
-                <a:solidFill>
-                  <a:srgbClr val="1F2D3A"/>
-                </a:solidFill>
-              </a:rPr>
-              <a:t>DAC:</a:t>
-            </a:r>
-            <a:r>
               <a:rPr sz="2000" b="0">
                 <a:solidFill>
                   <a:srgbClr val="1F2D3A"/>
                 </a:solidFill>
               </a:rPr>
-              <a:t> esnek ama sızıntıya açık (sahibi paylaşır).</a:t>
+              <a:t>Ticari bütünlük: iyi biçimli işlemler + görev ayrımı.</a:t>
             </a:r>
           </a:p>
           <a:p>
@@ -43049,12 +43209,20 @@
               <a:t>• </a:t>
             </a:r>
             <a:r>
+              <a:rPr sz="2000" b="0">
+                <a:solidFill>
+                  <a:srgbClr val="1F2D3A"/>
+                </a:solidFill>
+              </a:rPr>
+              <a:t>Veriye yalnız </a:t>
+            </a:r>
+            <a:r>
               <a:rPr sz="2000" b="1">
                 <a:solidFill>
                   <a:srgbClr val="1F2D3A"/>
                 </a:solidFill>
               </a:rPr>
-              <a:t>MAC:</a:t>
+              <a:t>onaylı</a:t>
             </a:r>
             <a:r>
               <a:rPr sz="2000" b="0">
@@ -43062,7 +43230,7 @@
                   <a:srgbClr val="1F2D3A"/>
                 </a:solidFill>
               </a:rPr>
-              <a:t> katı, askeri/etiketli ortam.</a:t>
+              <a:t> yordamlarla erişilir.</a:t>
             </a:r>
           </a:p>
           <a:p>
@@ -43080,20 +43248,12 @@
               <a:t>• </a:t>
             </a:r>
             <a:r>
-              <a:rPr sz="2000" b="1">
-                <a:solidFill>
-                  <a:srgbClr val="1F2D3A"/>
-                </a:solidFill>
-              </a:rPr>
-              <a:t>RBAC:</a:t>
-            </a:r>
-            <a:r>
               <a:rPr sz="2000" b="0">
                 <a:solidFill>
                   <a:srgbClr val="1F2D3A"/>
                 </a:solidFill>
               </a:rPr>
-              <a:t> kurumsal; rol bazlı, yönetimi kolay.</a:t>
+              <a:t>Örnek: muhasebe kayıtları.</a:t>
             </a:r>
           </a:p>
         </p:txBody>
@@ -43107,6 +43267,297 @@
 </file>
 
 <file path=ppt/slides/slide93.xml><?xml version="1.0" encoding="utf-8"?>
+<p:sld xmlns:a="http://schemas.openxmlformats.org/drawingml/2006/main" xmlns:p="http://schemas.openxmlformats.org/presentationml/2006/main" xmlns:r="http://schemas.openxmlformats.org/officeDocument/2006/relationships">
+  <p:cSld>
+    <p:spTree>
+      <p:nvGrpSpPr>
+        <p:cNvPr id="1" name=""/>
+        <p:cNvGrpSpPr/>
+        <p:nvPr/>
+      </p:nvGrpSpPr>
+      <p:grpSpPr/>
+      <p:pic>
+        <p:nvPicPr>
+          <p:cNvPr id="2" name="Picture 1" descr="rteu_logo_kucuk.jpg"/>
+          <p:cNvPicPr>
+            <a:picLocks noChangeAspect="1"/>
+          </p:cNvPicPr>
+          <p:nvPr/>
+        </p:nvPicPr>
+        <p:blipFill>
+          <a:blip r:embed="rId2"/>
+          <a:stretch>
+            <a:fillRect/>
+          </a:stretch>
+        </p:blipFill>
+        <p:spPr>
+          <a:xfrm>
+            <a:off x="640080" y="164592"/>
+            <a:ext cx="242773" cy="329184"/>
+          </a:xfrm>
+          <a:prstGeom prst="rect">
+            <a:avLst/>
+          </a:prstGeom>
+        </p:spPr>
+      </p:pic>
+      <p:sp>
+        <p:nvSpPr>
+          <p:cNvPr id="3" name="TextBox 2"/>
+          <p:cNvSpPr txBox="1"/>
+          <p:nvPr/>
+        </p:nvSpPr>
+        <p:spPr>
+          <a:xfrm>
+            <a:off x="1051560" y="182880"/>
+            <a:ext cx="7315200" cy="320040"/>
+          </a:xfrm>
+          <a:prstGeom prst="rect">
+            <a:avLst/>
+          </a:prstGeom>
+          <a:noFill/>
+        </p:spPr>
+        <p:txBody>
+          <a:bodyPr wrap="square" lIns="45720" rIns="45720">
+            <a:spAutoFit/>
+          </a:bodyPr>
+          <a:lstStyle/>
+          <a:p>
+            <a:r>
+              <a:rPr sz="1100" b="0">
+                <a:solidFill>
+                  <a:srgbClr val="5B6770"/>
+                </a:solidFill>
+              </a:rPr>
+              <a:t>CEN429 Güvenli Programlama · Hafta 2</a:t>
+            </a:r>
+          </a:p>
+        </p:txBody>
+      </p:sp>
+      <p:sp>
+        <p:nvSpPr>
+          <p:cNvPr id="4" name="TextBox 3"/>
+          <p:cNvSpPr txBox="1"/>
+          <p:nvPr/>
+        </p:nvSpPr>
+        <p:spPr>
+          <a:xfrm>
+            <a:off x="640080" y="6446520"/>
+            <a:ext cx="7315200" cy="274320"/>
+          </a:xfrm>
+          <a:prstGeom prst="rect">
+            <a:avLst/>
+          </a:prstGeom>
+          <a:noFill/>
+        </p:spPr>
+        <p:txBody>
+          <a:bodyPr wrap="square" lIns="45720" rIns="45720">
+            <a:spAutoFit/>
+          </a:bodyPr>
+          <a:lstStyle/>
+          <a:p>
+            <a:r>
+              <a:rPr sz="1000" b="0">
+                <a:solidFill>
+                  <a:srgbClr val="5B6770"/>
+                </a:solidFill>
+              </a:rPr>
+              <a:t>RTEÜ Bilgisayar Mühendisliği · 2026-2027 Güz</a:t>
+            </a:r>
+          </a:p>
+        </p:txBody>
+      </p:sp>
+      <p:sp>
+        <p:nvSpPr>
+          <p:cNvPr id="5" name="TextBox 4"/>
+          <p:cNvSpPr txBox="1"/>
+          <p:nvPr/>
+        </p:nvSpPr>
+        <p:spPr>
+          <a:xfrm>
+            <a:off x="10637215" y="6446520"/>
+            <a:ext cx="914400" cy="274320"/>
+          </a:xfrm>
+          <a:prstGeom prst="rect">
+            <a:avLst/>
+          </a:prstGeom>
+          <a:noFill/>
+        </p:spPr>
+        <p:txBody>
+          <a:bodyPr wrap="square" lIns="45720" rIns="45720">
+            <a:spAutoFit/>
+          </a:bodyPr>
+          <a:lstStyle/>
+          <a:p>
+            <a:pPr algn="r"/>
+            <a:r>
+              <a:rPr sz="1000" b="0">
+                <a:solidFill>
+                  <a:srgbClr val="5B6770"/>
+                </a:solidFill>
+              </a:rPr>
+              <a:t>93</a:t>
+            </a:r>
+          </a:p>
+        </p:txBody>
+      </p:sp>
+      <p:sp>
+        <p:nvSpPr>
+          <p:cNvPr id="6" name="TextBox 5"/>
+          <p:cNvSpPr txBox="1"/>
+          <p:nvPr/>
+        </p:nvSpPr>
+        <p:spPr>
+          <a:xfrm>
+            <a:off x="640080" y="548640"/>
+            <a:ext cx="10911535" cy="731520"/>
+          </a:xfrm>
+          <a:prstGeom prst="rect">
+            <a:avLst/>
+          </a:prstGeom>
+          <a:noFill/>
+        </p:spPr>
+        <p:txBody>
+          <a:bodyPr wrap="square" lIns="45720" rIns="45720" anchor="ctr">
+            <a:spAutoFit/>
+          </a:bodyPr>
+          <a:lstStyle/>
+          <a:p>
+            <a:r>
+              <a:rPr sz="3000" b="1">
+                <a:solidFill>
+                  <a:srgbClr val="006D77"/>
+                </a:solidFill>
+              </a:rPr>
+              <a:t>DAC / MAC / RBAC · seçim</a:t>
+            </a:r>
+          </a:p>
+        </p:txBody>
+      </p:sp>
+      <p:sp>
+        <p:nvSpPr>
+          <p:cNvPr id="7" name="TextBox 6"/>
+          <p:cNvSpPr txBox="1"/>
+          <p:nvPr/>
+        </p:nvSpPr>
+        <p:spPr>
+          <a:xfrm>
+            <a:off x="640080" y="1325880"/>
+            <a:ext cx="10911535" cy="1219200"/>
+          </a:xfrm>
+          <a:prstGeom prst="rect">
+            <a:avLst/>
+          </a:prstGeom>
+          <a:noFill/>
+        </p:spPr>
+        <p:txBody>
+          <a:bodyPr wrap="square" lIns="45720" rIns="45720">
+            <a:spAutoFit/>
+          </a:bodyPr>
+          <a:lstStyle/>
+          <a:p>
+            <a:pPr>
+              <a:spcAft>
+                <a:spcPts val="300"/>
+              </a:spcAft>
+            </a:pPr>
+            <a:r>
+              <a:rPr sz="2000" b="1">
+                <a:solidFill>
+                  <a:srgbClr val="006D77"/>
+                </a:solidFill>
+              </a:rPr>
+              <a:t>• </a:t>
+            </a:r>
+            <a:r>
+              <a:rPr sz="2000" b="1">
+                <a:solidFill>
+                  <a:srgbClr val="1F2D3A"/>
+                </a:solidFill>
+              </a:rPr>
+              <a:t>DAC:</a:t>
+            </a:r>
+            <a:r>
+              <a:rPr sz="2000" b="0">
+                <a:solidFill>
+                  <a:srgbClr val="1F2D3A"/>
+                </a:solidFill>
+              </a:rPr>
+              <a:t> esnek ama sızıntıya açık (sahibi paylaşır).</a:t>
+            </a:r>
+          </a:p>
+          <a:p>
+            <a:pPr>
+              <a:spcAft>
+                <a:spcPts val="300"/>
+              </a:spcAft>
+            </a:pPr>
+            <a:r>
+              <a:rPr sz="2000" b="1">
+                <a:solidFill>
+                  <a:srgbClr val="006D77"/>
+                </a:solidFill>
+              </a:rPr>
+              <a:t>• </a:t>
+            </a:r>
+            <a:r>
+              <a:rPr sz="2000" b="1">
+                <a:solidFill>
+                  <a:srgbClr val="1F2D3A"/>
+                </a:solidFill>
+              </a:rPr>
+              <a:t>MAC:</a:t>
+            </a:r>
+            <a:r>
+              <a:rPr sz="2000" b="0">
+                <a:solidFill>
+                  <a:srgbClr val="1F2D3A"/>
+                </a:solidFill>
+              </a:rPr>
+              <a:t> katı, askeri/etiketli ortam.</a:t>
+            </a:r>
+          </a:p>
+          <a:p>
+            <a:pPr>
+              <a:spcAft>
+                <a:spcPts val="300"/>
+              </a:spcAft>
+            </a:pPr>
+            <a:r>
+              <a:rPr sz="2000" b="1">
+                <a:solidFill>
+                  <a:srgbClr val="006D77"/>
+                </a:solidFill>
+              </a:rPr>
+              <a:t>• </a:t>
+            </a:r>
+            <a:r>
+              <a:rPr sz="2000" b="1">
+                <a:solidFill>
+                  <a:srgbClr val="1F2D3A"/>
+                </a:solidFill>
+              </a:rPr>
+              <a:t>RBAC:</a:t>
+            </a:r>
+            <a:r>
+              <a:rPr sz="2000" b="0">
+                <a:solidFill>
+                  <a:srgbClr val="1F2D3A"/>
+                </a:solidFill>
+              </a:rPr>
+              <a:t> kurumsal; rol bazlı, yönetimi kolay.</a:t>
+            </a:r>
+          </a:p>
+        </p:txBody>
+      </p:sp>
+    </p:spTree>
+  </p:cSld>
+  <p:clrMapOvr>
+    <a:masterClrMapping/>
+  </p:clrMapOvr>
+</p:sld>
+</file>
+
+<file path=ppt/slides/slide94.xml><?xml version="1.0" encoding="utf-8"?>
 <p:sld xmlns:a="http://schemas.openxmlformats.org/drawingml/2006/main" xmlns:p="http://schemas.openxmlformats.org/presentationml/2006/main" xmlns:r="http://schemas.openxmlformats.org/officeDocument/2006/relationships">
   <p:cSld>
     <p:bg>
@@ -43219,7 +43670,7 @@
                   <a:srgbClr val="D8F0F2"/>
                 </a:solidFill>
               </a:rPr>
-              <a:t>93</a:t>
+              <a:t>94</a:t>
             </a:r>
           </a:p>
         </p:txBody>
@@ -43254,302 +43705,6 @@
                 </a:solidFill>
               </a:rPr>
               <a:t>Ek · Zafiyeti bul (kod okuma)</a:t>
-            </a:r>
-          </a:p>
-        </p:txBody>
-      </p:sp>
-    </p:spTree>
-  </p:cSld>
-  <p:clrMapOvr>
-    <a:masterClrMapping/>
-  </p:clrMapOvr>
-</p:sld>
-</file>
-
-<file path=ppt/slides/slide94.xml><?xml version="1.0" encoding="utf-8"?>
-<p:sld xmlns:a="http://schemas.openxmlformats.org/drawingml/2006/main" xmlns:p="http://schemas.openxmlformats.org/presentationml/2006/main" xmlns:r="http://schemas.openxmlformats.org/officeDocument/2006/relationships">
-  <p:cSld>
-    <p:spTree>
-      <p:nvGrpSpPr>
-        <p:cNvPr id="1" name=""/>
-        <p:cNvGrpSpPr/>
-        <p:nvPr/>
-      </p:nvGrpSpPr>
-      <p:grpSpPr/>
-      <p:pic>
-        <p:nvPicPr>
-          <p:cNvPr id="2" name="Picture 1" descr="rteu_logo_kucuk.jpg"/>
-          <p:cNvPicPr>
-            <a:picLocks noChangeAspect="1"/>
-          </p:cNvPicPr>
-          <p:nvPr/>
-        </p:nvPicPr>
-        <p:blipFill>
-          <a:blip r:embed="rId2"/>
-          <a:stretch>
-            <a:fillRect/>
-          </a:stretch>
-        </p:blipFill>
-        <p:spPr>
-          <a:xfrm>
-            <a:off x="640080" y="164592"/>
-            <a:ext cx="242773" cy="329184"/>
-          </a:xfrm>
-          <a:prstGeom prst="rect">
-            <a:avLst/>
-          </a:prstGeom>
-        </p:spPr>
-      </p:pic>
-      <p:sp>
-        <p:nvSpPr>
-          <p:cNvPr id="3" name="TextBox 2"/>
-          <p:cNvSpPr txBox="1"/>
-          <p:nvPr/>
-        </p:nvSpPr>
-        <p:spPr>
-          <a:xfrm>
-            <a:off x="1051560" y="182880"/>
-            <a:ext cx="7315200" cy="320040"/>
-          </a:xfrm>
-          <a:prstGeom prst="rect">
-            <a:avLst/>
-          </a:prstGeom>
-          <a:noFill/>
-        </p:spPr>
-        <p:txBody>
-          <a:bodyPr wrap="square" lIns="45720" rIns="45720">
-            <a:spAutoFit/>
-          </a:bodyPr>
-          <a:lstStyle/>
-          <a:p>
-            <a:r>
-              <a:rPr sz="1100" b="0">
-                <a:solidFill>
-                  <a:srgbClr val="5B6770"/>
-                </a:solidFill>
-              </a:rPr>
-              <a:t>CEN429 Güvenli Programlama · Hafta 2</a:t>
-            </a:r>
-          </a:p>
-        </p:txBody>
-      </p:sp>
-      <p:sp>
-        <p:nvSpPr>
-          <p:cNvPr id="4" name="TextBox 3"/>
-          <p:cNvSpPr txBox="1"/>
-          <p:nvPr/>
-        </p:nvSpPr>
-        <p:spPr>
-          <a:xfrm>
-            <a:off x="640080" y="6446520"/>
-            <a:ext cx="7315200" cy="274320"/>
-          </a:xfrm>
-          <a:prstGeom prst="rect">
-            <a:avLst/>
-          </a:prstGeom>
-          <a:noFill/>
-        </p:spPr>
-        <p:txBody>
-          <a:bodyPr wrap="square" lIns="45720" rIns="45720">
-            <a:spAutoFit/>
-          </a:bodyPr>
-          <a:lstStyle/>
-          <a:p>
-            <a:r>
-              <a:rPr sz="1000" b="0">
-                <a:solidFill>
-                  <a:srgbClr val="5B6770"/>
-                </a:solidFill>
-              </a:rPr>
-              <a:t>RTEÜ Bilgisayar Mühendisliği · 2026-2027 Güz</a:t>
-            </a:r>
-          </a:p>
-        </p:txBody>
-      </p:sp>
-      <p:sp>
-        <p:nvSpPr>
-          <p:cNvPr id="5" name="TextBox 4"/>
-          <p:cNvSpPr txBox="1"/>
-          <p:nvPr/>
-        </p:nvSpPr>
-        <p:spPr>
-          <a:xfrm>
-            <a:off x="10637215" y="6446520"/>
-            <a:ext cx="914400" cy="274320"/>
-          </a:xfrm>
-          <a:prstGeom prst="rect">
-            <a:avLst/>
-          </a:prstGeom>
-          <a:noFill/>
-        </p:spPr>
-        <p:txBody>
-          <a:bodyPr wrap="square" lIns="45720" rIns="45720">
-            <a:spAutoFit/>
-          </a:bodyPr>
-          <a:lstStyle/>
-          <a:p>
-            <a:pPr algn="r"/>
-            <a:r>
-              <a:rPr sz="1000" b="0">
-                <a:solidFill>
-                  <a:srgbClr val="5B6770"/>
-                </a:solidFill>
-              </a:rPr>
-              <a:t>94</a:t>
-            </a:r>
-          </a:p>
-        </p:txBody>
-      </p:sp>
-      <p:sp>
-        <p:nvSpPr>
-          <p:cNvPr id="6" name="TextBox 5"/>
-          <p:cNvSpPr txBox="1"/>
-          <p:nvPr/>
-        </p:nvSpPr>
-        <p:spPr>
-          <a:xfrm>
-            <a:off x="640080" y="548640"/>
-            <a:ext cx="10911535" cy="731520"/>
-          </a:xfrm>
-          <a:prstGeom prst="rect">
-            <a:avLst/>
-          </a:prstGeom>
-          <a:noFill/>
-        </p:spPr>
-        <p:txBody>
-          <a:bodyPr wrap="square" lIns="45720" rIns="45720" anchor="ctr">
-            <a:spAutoFit/>
-          </a:bodyPr>
-          <a:lstStyle/>
-          <a:p>
-            <a:r>
-              <a:rPr sz="3000" b="1">
-                <a:solidFill>
-                  <a:srgbClr val="006D77"/>
-                </a:solidFill>
-              </a:rPr>
-              <a:t>Örnek 1 · günlük enjeksiyonu</a:t>
-            </a:r>
-          </a:p>
-        </p:txBody>
-      </p:sp>
-      <p:sp>
-        <p:nvSpPr>
-          <p:cNvPr id="7" name="Rectangle 6"/>
-          <p:cNvSpPr/>
-          <p:nvPr/>
-        </p:nvSpPr>
-        <p:spPr>
-          <a:xfrm>
-            <a:off x="640080" y="1325880"/>
-            <a:ext cx="10911535" cy="463295"/>
-          </a:xfrm>
-          <a:prstGeom prst="rect">
-            <a:avLst/>
-          </a:prstGeom>
-          <a:solidFill>
-            <a:srgbClr val="F3F4F6"/>
-          </a:solidFill>
-          <a:ln>
-            <a:solidFill>
-              <a:srgbClr val="D9DEE3"/>
-            </a:solidFill>
-          </a:ln>
-        </p:spPr>
-        <p:style>
-          <a:lnRef idx="1">
-            <a:schemeClr val="accent1"/>
-          </a:lnRef>
-          <a:fillRef idx="3">
-            <a:schemeClr val="accent1"/>
-          </a:fillRef>
-          <a:effectRef idx="2">
-            <a:schemeClr val="accent1"/>
-          </a:effectRef>
-          <a:fontRef idx="minor">
-            <a:schemeClr val="lt1"/>
-          </a:fontRef>
-        </p:style>
-        <p:txBody>
-          <a:bodyPr rtlCol="0" anchor="t" wrap="none" lIns="137160" rIns="137160" tIns="91440" bIns="91440"/>
-          <a:lstStyle/>
-          <a:p>
-            <a:pPr algn="l"/>
-            <a:r>
-              <a:rPr sz="1240">
-                <a:solidFill>
-                  <a:srgbClr val="1F2D3A"/>
-                </a:solidFill>
-                <a:latin typeface="Consolas"/>
-              </a:rPr>
-              <a:t>fprintf(log, "giris: %s\n", kullanici_adi);  /* CWE-117 */</a:t>
-            </a:r>
-          </a:p>
-        </p:txBody>
-      </p:sp>
-      <p:sp>
-        <p:nvSpPr>
-          <p:cNvPr id="8" name="TextBox 7"/>
-          <p:cNvSpPr txBox="1"/>
-          <p:nvPr/>
-        </p:nvSpPr>
-        <p:spPr>
-          <a:xfrm>
-            <a:off x="640080" y="1898903"/>
-            <a:ext cx="10911535" cy="439928"/>
-          </a:xfrm>
-          <a:prstGeom prst="rect">
-            <a:avLst/>
-          </a:prstGeom>
-          <a:noFill/>
-        </p:spPr>
-        <p:txBody>
-          <a:bodyPr wrap="square" lIns="45720" rIns="45720">
-            <a:spAutoFit/>
-          </a:bodyPr>
-          <a:lstStyle/>
-          <a:p>
-            <a:pPr algn="l"/>
-            <a:r>
-              <a:rPr sz="2000" b="0">
-                <a:solidFill>
-                  <a:srgbClr val="1F2D3A"/>
-                </a:solidFill>
-              </a:rPr>
-              <a:t>Kullanıcı adı </a:t>
-            </a:r>
-            <a:r>
-              <a:rPr sz="2000" b="0">
-                <a:solidFill>
-                  <a:srgbClr val="A1123F"/>
-                </a:solidFill>
-                <a:latin typeface="Consolas"/>
-              </a:rPr>
-              <a:t>n</a:t>
-            </a:r>
-            <a:r>
-              <a:rPr sz="2000" b="0">
-                <a:solidFill>
-                  <a:srgbClr val="1F2D3A"/>
-                </a:solidFill>
-              </a:rPr>
-              <a:t> içerirse </a:t>
-            </a:r>
-            <a:r>
-              <a:rPr sz="2000" b="1">
-                <a:solidFill>
-                  <a:srgbClr val="1F2D3A"/>
-                </a:solidFill>
-              </a:rPr>
-              <a:t>sahte</a:t>
-            </a:r>
-            <a:r>
-              <a:rPr sz="2000" b="0">
-                <a:solidFill>
-                  <a:srgbClr val="1F2D3A"/>
-                </a:solidFill>
-              </a:rPr>
-              <a:t> günlük satırı ekler. Doğrusu: kaçış/temizleme.</a:t>
             </a:r>
           </a:p>
         </p:txBody>
@@ -43724,7 +43879,7 @@
                   <a:srgbClr val="006D77"/>
                 </a:solidFill>
               </a:rPr>
-              <a:t>Örnek 2 · biçim dizisi</a:t>
+              <a:t>Örnek 1 · günlük enjeksiyonu</a:t>
             </a:r>
           </a:p>
         </p:txBody>
@@ -43778,7 +43933,7 @@
                 </a:solidFill>
                 <a:latin typeface="Consolas"/>
               </a:rPr>
-              <a:t>syslog(LOG_INFO, kullanici_girdisi);  /* CWE-134 */</a:t>
+              <a:t>fprintf(log, "giris: %s\n", kullanici_adi);  /* CWE-117 */</a:t>
             </a:r>
           </a:p>
         </p:txBody>
@@ -43812,7 +43967,7 @@
                   <a:srgbClr val="1F2D3A"/>
                 </a:solidFill>
               </a:rPr>
-              <a:t>Biçim dizgesi sabit olmalı: </a:t>
+              <a:t>Kullanıcı adı </a:t>
             </a:r>
             <a:r>
               <a:rPr sz="2000" b="0">
@@ -43821,7 +43976,7 @@
                 </a:solidFill>
                 <a:latin typeface="Consolas"/>
               </a:rPr>
-              <a:t>syslog(LOG_INFO, "%s", girdi)</a:t>
+              <a:t>n</a:t>
             </a:r>
             <a:r>
               <a:rPr sz="2000" b="0">
@@ -43829,7 +43984,23 @@
                   <a:srgbClr val="1F2D3A"/>
                 </a:solidFill>
               </a:rPr>
-              <a:t>.</a:t>
+              <a:t> içerirse </a:t>
+            </a:r>
+            <a:r>
+              <a:rPr sz="2000" b="1">
+                <a:solidFill>
+                  <a:srgbClr val="1F2D3A"/>
+                </a:solidFill>
+              </a:rPr>
+              <a:t>sahte</a:t>
+            </a:r>
+            <a:r>
+              <a:rPr sz="2000" b="0">
+                <a:solidFill>
+                  <a:srgbClr val="1F2D3A"/>
+                </a:solidFill>
+              </a:rPr>
+              <a:t> günlük satırı ekler. Doğrusu: kaçış/temizleme.</a:t>
             </a:r>
           </a:p>
         </p:txBody>
@@ -44004,84 +44175,104 @@
                   <a:srgbClr val="006D77"/>
                 </a:solidFill>
               </a:rPr>
-              <a:t>Örnek 3 · zayıf tespit</a:t>
-            </a:r>
-          </a:p>
-        </p:txBody>
-      </p:sp>
-      <p:sp>
-        <p:nvSpPr>
-          <p:cNvPr id="7" name="TextBox 6"/>
-          <p:cNvSpPr txBox="1"/>
+              <a:t>Örnek 2 · biçim dizisi</a:t>
+            </a:r>
+          </a:p>
+        </p:txBody>
+      </p:sp>
+      <p:sp>
+        <p:nvSpPr>
+          <p:cNvPr id="7" name="Rectangle 6"/>
+          <p:cNvSpPr/>
           <p:nvPr/>
         </p:nvSpPr>
         <p:spPr>
           <a:xfrm>
             <a:off x="640080" y="1325880"/>
-            <a:ext cx="10911535" cy="843280"/>
-          </a:xfrm>
-          <a:prstGeom prst="rect">
-            <a:avLst/>
-          </a:prstGeom>
-          <a:noFill/>
-        </p:spPr>
-        <p:txBody>
-          <a:bodyPr wrap="square" lIns="45720" rIns="45720">
-            <a:spAutoFit/>
-          </a:bodyPr>
-          <a:lstStyle/>
-          <a:p>
-            <a:pPr>
-              <a:spcAft>
-                <a:spcPts val="300"/>
-              </a:spcAft>
-            </a:pPr>
-            <a:r>
-              <a:rPr sz="2000" b="1">
-                <a:solidFill>
-                  <a:srgbClr val="006D77"/>
-                </a:solidFill>
-              </a:rPr>
-              <a:t>• </a:t>
-            </a:r>
+            <a:ext cx="10911535" cy="463295"/>
+          </a:xfrm>
+          <a:prstGeom prst="rect">
+            <a:avLst/>
+          </a:prstGeom>
+          <a:solidFill>
+            <a:srgbClr val="F3F4F6"/>
+          </a:solidFill>
+          <a:ln>
+            <a:solidFill>
+              <a:srgbClr val="D9DEE3"/>
+            </a:solidFill>
+          </a:ln>
+        </p:spPr>
+        <p:style>
+          <a:lnRef idx="1">
+            <a:schemeClr val="accent1"/>
+          </a:lnRef>
+          <a:fillRef idx="3">
+            <a:schemeClr val="accent1"/>
+          </a:fillRef>
+          <a:effectRef idx="2">
+            <a:schemeClr val="accent1"/>
+          </a:effectRef>
+          <a:fontRef idx="minor">
+            <a:schemeClr val="lt1"/>
+          </a:fontRef>
+        </p:style>
+        <p:txBody>
+          <a:bodyPr rtlCol="0" anchor="t" wrap="none" lIns="137160" rIns="137160" tIns="91440" bIns="91440"/>
+          <a:lstStyle/>
+          <a:p>
+            <a:pPr algn="l"/>
+            <a:r>
+              <a:rPr sz="1240">
+                <a:solidFill>
+                  <a:srgbClr val="1F2D3A"/>
+                </a:solidFill>
+                <a:latin typeface="Consolas"/>
+              </a:rPr>
+              <a:t>syslog(LOG_INFO, kullanici_girdisi);  /* CWE-134 */</a:t>
+            </a:r>
+          </a:p>
+        </p:txBody>
+      </p:sp>
+      <p:sp>
+        <p:nvSpPr>
+          <p:cNvPr id="8" name="TextBox 7"/>
+          <p:cNvSpPr txBox="1"/>
+          <p:nvPr/>
+        </p:nvSpPr>
+        <p:spPr>
+          <a:xfrm>
+            <a:off x="640080" y="1898903"/>
+            <a:ext cx="10911535" cy="439928"/>
+          </a:xfrm>
+          <a:prstGeom prst="rect">
+            <a:avLst/>
+          </a:prstGeom>
+          <a:noFill/>
+        </p:spPr>
+        <p:txBody>
+          <a:bodyPr wrap="square" lIns="45720" rIns="45720">
+            <a:spAutoFit/>
+          </a:bodyPr>
+          <a:lstStyle/>
+          <a:p>
+            <a:pPr algn="l"/>
             <a:r>
               <a:rPr sz="2000" b="0">
                 <a:solidFill>
                   <a:srgbClr val="1F2D3A"/>
                 </a:solidFill>
               </a:rPr>
-              <a:t>Yalnız </a:t>
-            </a:r>
-            <a:r>
-              <a:rPr sz="2000" b="1">
-                <a:solidFill>
-                  <a:srgbClr val="1F2D3A"/>
-                </a:solidFill>
-              </a:rPr>
-              <a:t>imza</a:t>
+              <a:t>Biçim dizgesi sabit olmalı: </a:t>
             </a:r>
             <a:r>
               <a:rPr sz="2000" b="0">
                 <a:solidFill>
-                  <a:srgbClr val="1F2D3A"/>
-                </a:solidFill>
-              </a:rPr>
-              <a:t> ile tarama, polimorfik virüsü kaçırır.</a:t>
-            </a:r>
-          </a:p>
-          <a:p>
-            <a:pPr>
-              <a:spcAft>
-                <a:spcPts val="300"/>
-              </a:spcAft>
-            </a:pPr>
-            <a:r>
-              <a:rPr sz="2000" b="1">
-                <a:solidFill>
-                  <a:srgbClr val="006D77"/>
-                </a:solidFill>
-              </a:rPr>
-              <a:t>• </a:t>
+                  <a:srgbClr val="A1123F"/>
+                </a:solidFill>
+                <a:latin typeface="Consolas"/>
+              </a:rPr>
+              <a:t>syslog(LOG_INFO, "%s", girdi)</a:t>
             </a:r>
             <a:r>
               <a:rPr sz="2000" b="0">
@@ -44089,7 +44280,7 @@
                   <a:srgbClr val="1F2D3A"/>
                 </a:solidFill>
               </a:rPr>
-              <a:t>Ek: sezgisel + davranış + entropi.</a:t>
+              <a:t>.</a:t>
             </a:r>
           </a:p>
         </p:txBody>
@@ -44103,6 +44294,266 @@
 </file>
 
 <file path=ppt/slides/slide97.xml><?xml version="1.0" encoding="utf-8"?>
+<p:sld xmlns:a="http://schemas.openxmlformats.org/drawingml/2006/main" xmlns:p="http://schemas.openxmlformats.org/presentationml/2006/main" xmlns:r="http://schemas.openxmlformats.org/officeDocument/2006/relationships">
+  <p:cSld>
+    <p:spTree>
+      <p:nvGrpSpPr>
+        <p:cNvPr id="1" name=""/>
+        <p:cNvGrpSpPr/>
+        <p:nvPr/>
+      </p:nvGrpSpPr>
+      <p:grpSpPr/>
+      <p:pic>
+        <p:nvPicPr>
+          <p:cNvPr id="2" name="Picture 1" descr="rteu_logo_kucuk.jpg"/>
+          <p:cNvPicPr>
+            <a:picLocks noChangeAspect="1"/>
+          </p:cNvPicPr>
+          <p:nvPr/>
+        </p:nvPicPr>
+        <p:blipFill>
+          <a:blip r:embed="rId2"/>
+          <a:stretch>
+            <a:fillRect/>
+          </a:stretch>
+        </p:blipFill>
+        <p:spPr>
+          <a:xfrm>
+            <a:off x="640080" y="164592"/>
+            <a:ext cx="242773" cy="329184"/>
+          </a:xfrm>
+          <a:prstGeom prst="rect">
+            <a:avLst/>
+          </a:prstGeom>
+        </p:spPr>
+      </p:pic>
+      <p:sp>
+        <p:nvSpPr>
+          <p:cNvPr id="3" name="TextBox 2"/>
+          <p:cNvSpPr txBox="1"/>
+          <p:nvPr/>
+        </p:nvSpPr>
+        <p:spPr>
+          <a:xfrm>
+            <a:off x="1051560" y="182880"/>
+            <a:ext cx="7315200" cy="320040"/>
+          </a:xfrm>
+          <a:prstGeom prst="rect">
+            <a:avLst/>
+          </a:prstGeom>
+          <a:noFill/>
+        </p:spPr>
+        <p:txBody>
+          <a:bodyPr wrap="square" lIns="45720" rIns="45720">
+            <a:spAutoFit/>
+          </a:bodyPr>
+          <a:lstStyle/>
+          <a:p>
+            <a:r>
+              <a:rPr sz="1100" b="0">
+                <a:solidFill>
+                  <a:srgbClr val="5B6770"/>
+                </a:solidFill>
+              </a:rPr>
+              <a:t>CEN429 Güvenli Programlama · Hafta 2</a:t>
+            </a:r>
+          </a:p>
+        </p:txBody>
+      </p:sp>
+      <p:sp>
+        <p:nvSpPr>
+          <p:cNvPr id="4" name="TextBox 3"/>
+          <p:cNvSpPr txBox="1"/>
+          <p:nvPr/>
+        </p:nvSpPr>
+        <p:spPr>
+          <a:xfrm>
+            <a:off x="640080" y="6446520"/>
+            <a:ext cx="7315200" cy="274320"/>
+          </a:xfrm>
+          <a:prstGeom prst="rect">
+            <a:avLst/>
+          </a:prstGeom>
+          <a:noFill/>
+        </p:spPr>
+        <p:txBody>
+          <a:bodyPr wrap="square" lIns="45720" rIns="45720">
+            <a:spAutoFit/>
+          </a:bodyPr>
+          <a:lstStyle/>
+          <a:p>
+            <a:r>
+              <a:rPr sz="1000" b="0">
+                <a:solidFill>
+                  <a:srgbClr val="5B6770"/>
+                </a:solidFill>
+              </a:rPr>
+              <a:t>RTEÜ Bilgisayar Mühendisliği · 2026-2027 Güz</a:t>
+            </a:r>
+          </a:p>
+        </p:txBody>
+      </p:sp>
+      <p:sp>
+        <p:nvSpPr>
+          <p:cNvPr id="5" name="TextBox 4"/>
+          <p:cNvSpPr txBox="1"/>
+          <p:nvPr/>
+        </p:nvSpPr>
+        <p:spPr>
+          <a:xfrm>
+            <a:off x="10637215" y="6446520"/>
+            <a:ext cx="914400" cy="274320"/>
+          </a:xfrm>
+          <a:prstGeom prst="rect">
+            <a:avLst/>
+          </a:prstGeom>
+          <a:noFill/>
+        </p:spPr>
+        <p:txBody>
+          <a:bodyPr wrap="square" lIns="45720" rIns="45720">
+            <a:spAutoFit/>
+          </a:bodyPr>
+          <a:lstStyle/>
+          <a:p>
+            <a:pPr algn="r"/>
+            <a:r>
+              <a:rPr sz="1000" b="0">
+                <a:solidFill>
+                  <a:srgbClr val="5B6770"/>
+                </a:solidFill>
+              </a:rPr>
+              <a:t>97</a:t>
+            </a:r>
+          </a:p>
+        </p:txBody>
+      </p:sp>
+      <p:sp>
+        <p:nvSpPr>
+          <p:cNvPr id="6" name="TextBox 5"/>
+          <p:cNvSpPr txBox="1"/>
+          <p:nvPr/>
+        </p:nvSpPr>
+        <p:spPr>
+          <a:xfrm>
+            <a:off x="640080" y="548640"/>
+            <a:ext cx="10911535" cy="731520"/>
+          </a:xfrm>
+          <a:prstGeom prst="rect">
+            <a:avLst/>
+          </a:prstGeom>
+          <a:noFill/>
+        </p:spPr>
+        <p:txBody>
+          <a:bodyPr wrap="square" lIns="45720" rIns="45720" anchor="ctr">
+            <a:spAutoFit/>
+          </a:bodyPr>
+          <a:lstStyle/>
+          <a:p>
+            <a:r>
+              <a:rPr sz="3000" b="1">
+                <a:solidFill>
+                  <a:srgbClr val="006D77"/>
+                </a:solidFill>
+              </a:rPr>
+              <a:t>Örnek 3 · zayıf tespit</a:t>
+            </a:r>
+          </a:p>
+        </p:txBody>
+      </p:sp>
+      <p:sp>
+        <p:nvSpPr>
+          <p:cNvPr id="7" name="TextBox 6"/>
+          <p:cNvSpPr txBox="1"/>
+          <p:nvPr/>
+        </p:nvSpPr>
+        <p:spPr>
+          <a:xfrm>
+            <a:off x="640080" y="1325880"/>
+            <a:ext cx="10911535" cy="843280"/>
+          </a:xfrm>
+          <a:prstGeom prst="rect">
+            <a:avLst/>
+          </a:prstGeom>
+          <a:noFill/>
+        </p:spPr>
+        <p:txBody>
+          <a:bodyPr wrap="square" lIns="45720" rIns="45720">
+            <a:spAutoFit/>
+          </a:bodyPr>
+          <a:lstStyle/>
+          <a:p>
+            <a:pPr>
+              <a:spcAft>
+                <a:spcPts val="300"/>
+              </a:spcAft>
+            </a:pPr>
+            <a:r>
+              <a:rPr sz="2000" b="1">
+                <a:solidFill>
+                  <a:srgbClr val="006D77"/>
+                </a:solidFill>
+              </a:rPr>
+              <a:t>• </a:t>
+            </a:r>
+            <a:r>
+              <a:rPr sz="2000" b="0">
+                <a:solidFill>
+                  <a:srgbClr val="1F2D3A"/>
+                </a:solidFill>
+              </a:rPr>
+              <a:t>Yalnız </a:t>
+            </a:r>
+            <a:r>
+              <a:rPr sz="2000" b="1">
+                <a:solidFill>
+                  <a:srgbClr val="1F2D3A"/>
+                </a:solidFill>
+              </a:rPr>
+              <a:t>imza</a:t>
+            </a:r>
+            <a:r>
+              <a:rPr sz="2000" b="0">
+                <a:solidFill>
+                  <a:srgbClr val="1F2D3A"/>
+                </a:solidFill>
+              </a:rPr>
+              <a:t> ile tarama, polimorfik virüsü kaçırır.</a:t>
+            </a:r>
+          </a:p>
+          <a:p>
+            <a:pPr>
+              <a:spcAft>
+                <a:spcPts val="300"/>
+              </a:spcAft>
+            </a:pPr>
+            <a:r>
+              <a:rPr sz="2000" b="1">
+                <a:solidFill>
+                  <a:srgbClr val="006D77"/>
+                </a:solidFill>
+              </a:rPr>
+              <a:t>• </a:t>
+            </a:r>
+            <a:r>
+              <a:rPr sz="2000" b="0">
+                <a:solidFill>
+                  <a:srgbClr val="1F2D3A"/>
+                </a:solidFill>
+              </a:rPr>
+              <a:t>Ek: sezgisel + davranış + entropi.</a:t>
+            </a:r>
+          </a:p>
+        </p:txBody>
+      </p:sp>
+    </p:spTree>
+  </p:cSld>
+  <p:clrMapOvr>
+    <a:masterClrMapping/>
+  </p:clrMapOvr>
+</p:sld>
+</file>
+
+<file path=ppt/slides/slide98.xml><?xml version="1.0" encoding="utf-8"?>
 <p:sld xmlns:a="http://schemas.openxmlformats.org/drawingml/2006/main" xmlns:p="http://schemas.openxmlformats.org/presentationml/2006/main" xmlns:r="http://schemas.openxmlformats.org/officeDocument/2006/relationships">
   <p:cSld>
     <p:bg>
@@ -44215,7 +44666,7 @@
                   <a:srgbClr val="D8F0F2"/>
                 </a:solidFill>
               </a:rPr>
-              <a:t>97</a:t>
+              <a:t>98</a:t>
             </a:r>
           </a:p>
         </p:txBody>
@@ -44250,257 +44701,6 @@
                 </a:solidFill>
               </a:rPr>
               <a:t>Ek · Çözümlü kendini sınama</a:t>
-            </a:r>
-          </a:p>
-        </p:txBody>
-      </p:sp>
-    </p:spTree>
-  </p:cSld>
-  <p:clrMapOvr>
-    <a:masterClrMapping/>
-  </p:clrMapOvr>
-</p:sld>
-</file>
-
-<file path=ppt/slides/slide98.xml><?xml version="1.0" encoding="utf-8"?>
-<p:sld xmlns:a="http://schemas.openxmlformats.org/drawingml/2006/main" xmlns:p="http://schemas.openxmlformats.org/presentationml/2006/main" xmlns:r="http://schemas.openxmlformats.org/officeDocument/2006/relationships">
-  <p:cSld>
-    <p:spTree>
-      <p:nvGrpSpPr>
-        <p:cNvPr id="1" name=""/>
-        <p:cNvGrpSpPr/>
-        <p:nvPr/>
-      </p:nvGrpSpPr>
-      <p:grpSpPr/>
-      <p:pic>
-        <p:nvPicPr>
-          <p:cNvPr id="2" name="Picture 1" descr="rteu_logo_kucuk.jpg"/>
-          <p:cNvPicPr>
-            <a:picLocks noChangeAspect="1"/>
-          </p:cNvPicPr>
-          <p:nvPr/>
-        </p:nvPicPr>
-        <p:blipFill>
-          <a:blip r:embed="rId2"/>
-          <a:stretch>
-            <a:fillRect/>
-          </a:stretch>
-        </p:blipFill>
-        <p:spPr>
-          <a:xfrm>
-            <a:off x="640080" y="164592"/>
-            <a:ext cx="242773" cy="329184"/>
-          </a:xfrm>
-          <a:prstGeom prst="rect">
-            <a:avLst/>
-          </a:prstGeom>
-        </p:spPr>
-      </p:pic>
-      <p:sp>
-        <p:nvSpPr>
-          <p:cNvPr id="3" name="TextBox 2"/>
-          <p:cNvSpPr txBox="1"/>
-          <p:nvPr/>
-        </p:nvSpPr>
-        <p:spPr>
-          <a:xfrm>
-            <a:off x="1051560" y="182880"/>
-            <a:ext cx="7315200" cy="320040"/>
-          </a:xfrm>
-          <a:prstGeom prst="rect">
-            <a:avLst/>
-          </a:prstGeom>
-          <a:noFill/>
-        </p:spPr>
-        <p:txBody>
-          <a:bodyPr wrap="square" lIns="45720" rIns="45720">
-            <a:spAutoFit/>
-          </a:bodyPr>
-          <a:lstStyle/>
-          <a:p>
-            <a:r>
-              <a:rPr sz="1100" b="0">
-                <a:solidFill>
-                  <a:srgbClr val="5B6770"/>
-                </a:solidFill>
-              </a:rPr>
-              <a:t>CEN429 Güvenli Programlama · Hafta 2</a:t>
-            </a:r>
-          </a:p>
-        </p:txBody>
-      </p:sp>
-      <p:sp>
-        <p:nvSpPr>
-          <p:cNvPr id="4" name="TextBox 3"/>
-          <p:cNvSpPr txBox="1"/>
-          <p:nvPr/>
-        </p:nvSpPr>
-        <p:spPr>
-          <a:xfrm>
-            <a:off x="640080" y="6446520"/>
-            <a:ext cx="7315200" cy="274320"/>
-          </a:xfrm>
-          <a:prstGeom prst="rect">
-            <a:avLst/>
-          </a:prstGeom>
-          <a:noFill/>
-        </p:spPr>
-        <p:txBody>
-          <a:bodyPr wrap="square" lIns="45720" rIns="45720">
-            <a:spAutoFit/>
-          </a:bodyPr>
-          <a:lstStyle/>
-          <a:p>
-            <a:r>
-              <a:rPr sz="1000" b="0">
-                <a:solidFill>
-                  <a:srgbClr val="5B6770"/>
-                </a:solidFill>
-              </a:rPr>
-              <a:t>RTEÜ Bilgisayar Mühendisliği · 2026-2027 Güz</a:t>
-            </a:r>
-          </a:p>
-        </p:txBody>
-      </p:sp>
-      <p:sp>
-        <p:nvSpPr>
-          <p:cNvPr id="5" name="TextBox 4"/>
-          <p:cNvSpPr txBox="1"/>
-          <p:nvPr/>
-        </p:nvSpPr>
-        <p:spPr>
-          <a:xfrm>
-            <a:off x="10637215" y="6446520"/>
-            <a:ext cx="914400" cy="274320"/>
-          </a:xfrm>
-          <a:prstGeom prst="rect">
-            <a:avLst/>
-          </a:prstGeom>
-          <a:noFill/>
-        </p:spPr>
-        <p:txBody>
-          <a:bodyPr wrap="square" lIns="45720" rIns="45720">
-            <a:spAutoFit/>
-          </a:bodyPr>
-          <a:lstStyle/>
-          <a:p>
-            <a:pPr algn="r"/>
-            <a:r>
-              <a:rPr sz="1000" b="0">
-                <a:solidFill>
-                  <a:srgbClr val="5B6770"/>
-                </a:solidFill>
-              </a:rPr>
-              <a:t>98</a:t>
-            </a:r>
-          </a:p>
-        </p:txBody>
-      </p:sp>
-      <p:sp>
-        <p:nvSpPr>
-          <p:cNvPr id="6" name="TextBox 5"/>
-          <p:cNvSpPr txBox="1"/>
-          <p:nvPr/>
-        </p:nvSpPr>
-        <p:spPr>
-          <a:xfrm>
-            <a:off x="640080" y="548640"/>
-            <a:ext cx="10911535" cy="731520"/>
-          </a:xfrm>
-          <a:prstGeom prst="rect">
-            <a:avLst/>
-          </a:prstGeom>
-          <a:noFill/>
-        </p:spPr>
-        <p:txBody>
-          <a:bodyPr wrap="square" lIns="45720" rIns="45720" anchor="ctr">
-            <a:spAutoFit/>
-          </a:bodyPr>
-          <a:lstStyle/>
-          <a:p>
-            <a:r>
-              <a:rPr sz="3000" b="1">
-                <a:solidFill>
-                  <a:srgbClr val="006D77"/>
-                </a:solidFill>
-              </a:rPr>
-              <a:t>Soru 1</a:t>
-            </a:r>
-          </a:p>
-        </p:txBody>
-      </p:sp>
-      <p:sp>
-        <p:nvSpPr>
-          <p:cNvPr id="7" name="TextBox 6"/>
-          <p:cNvSpPr txBox="1"/>
-          <p:nvPr/>
-        </p:nvSpPr>
-        <p:spPr>
-          <a:xfrm>
-            <a:off x="640080" y="1325880"/>
-            <a:ext cx="10911535" cy="439928"/>
-          </a:xfrm>
-          <a:prstGeom prst="rect">
-            <a:avLst/>
-          </a:prstGeom>
-          <a:noFill/>
-        </p:spPr>
-        <p:txBody>
-          <a:bodyPr wrap="square" lIns="45720" rIns="45720">
-            <a:spAutoFit/>
-          </a:bodyPr>
-          <a:lstStyle/>
-          <a:p>
-            <a:pPr algn="l"/>
-            <a:r>
-              <a:rPr sz="2000" b="1">
-                <a:solidFill>
-                  <a:srgbClr val="1F2D3A"/>
-                </a:solidFill>
-              </a:rPr>
-              <a:t>Virüs ile solucan farkı?</a:t>
-            </a:r>
-          </a:p>
-        </p:txBody>
-      </p:sp>
-      <p:sp>
-        <p:nvSpPr>
-          <p:cNvPr id="8" name="TextBox 7"/>
-          <p:cNvSpPr txBox="1"/>
-          <p:nvPr/>
-        </p:nvSpPr>
-        <p:spPr>
-          <a:xfrm>
-            <a:off x="640080" y="1875536"/>
-            <a:ext cx="10911535" cy="770128"/>
-          </a:xfrm>
-          <a:prstGeom prst="rect">
-            <a:avLst/>
-          </a:prstGeom>
-          <a:noFill/>
-        </p:spPr>
-        <p:txBody>
-          <a:bodyPr wrap="square" lIns="45720" rIns="45720">
-            <a:spAutoFit/>
-          </a:bodyPr>
-          <a:lstStyle/>
-          <a:p>
-            <a:pPr algn="l"/>
-            <a:r>
-              <a:rPr sz="2000" b="1">
-                <a:solidFill>
-                  <a:srgbClr val="1F2D3A"/>
-                </a:solidFill>
-              </a:rPr>
-              <a:t>Cevap:</a:t>
-            </a:r>
-            <a:r>
-              <a:rPr sz="2000" b="0">
-                <a:solidFill>
-                  <a:srgbClr val="1F2D3A"/>
-                </a:solidFill>
-              </a:rPr>
-              <a:t> Virüs başka programa bulaşarak yayılır; solucan kendi başına ağ üzerinden kendini kopyalar.</a:t>
             </a:r>
           </a:p>
         </p:txBody>
@@ -44675,7 +44875,7 @@
                   <a:srgbClr val="006D77"/>
                 </a:solidFill>
               </a:rPr>
-              <a:t>Soru 2</a:t>
+              <a:t>Soru 1</a:t>
             </a:r>
           </a:p>
         </p:txBody>
@@ -44709,7 +44909,7 @@
                   <a:srgbClr val="1F2D3A"/>
                 </a:solidFill>
               </a:rPr>
-              <a:t>Polimorfik virüs neden imza tespitini zorlar?</a:t>
+              <a:t>Virüs ile solucan farkı?</a:t>
             </a:r>
           </a:p>
         </p:txBody>
@@ -44751,7 +44951,7 @@
                   <a:srgbClr val="1F2D3A"/>
                 </a:solidFill>
               </a:rPr>
-              <a:t> Her kopyada kendini farklı şifreler; sabit bir imza kalmaz. Sezgisel/emülasyon gerekir.</a:t>
+              <a:t> Virüs başka programa bulaşarak yayılır; solucan kendi başına ağ üzerinden kendini kopyalar.</a:t>
             </a:r>
           </a:p>
         </p:txBody>
